--- a/findora_presentation.pptx
+++ b/findora_presentation.pptx
@@ -27,8 +27,8 @@
 </file>
 
 <file path=ppt/slideLayouts/slideLayout1.xml><?xml version="1.0" encoding="utf-8"?>
-<p:sldLayout xmlns:a="http://schemas.openxmlformats.org/drawingml/2006/main" xmlns:p="http://schemas.openxmlformats.org/presentationml/2006/main" xmlns:r="http://schemas.openxmlformats.org/officeDocument/2006/relationships" xmlns:p14="http://schemas.microsoft.com/office/powerpoint/2010/main" xmlns:p15="http://schemas.microsoft.com/office/powerpoint/2012/main" xmlns:mc="http://schemas.openxmlformats.org/markup-compatibility/2006" type="title" preserve="1">
-  <p:cSld name="Title Slide">
+<p:sldLayout xmlns:a="http://schemas.openxmlformats.org/drawingml/2006/main" xmlns:p="http://schemas.openxmlformats.org/presentationml/2006/main" xmlns:r="http://schemas.openxmlformats.org/officeDocument/2006/relationships" xmlns:p14="http://schemas.microsoft.com/office/powerpoint/2010/main" xmlns:p15="http://schemas.microsoft.com/office/powerpoint/2012/main" xmlns:mc="http://schemas.openxmlformats.org/markup-compatibility/2006" type="blank" preserve="1">
+  <p:cSld name="Blank">
     <p:bg>
       <p:bgPr>
         <a:solidFill>
@@ -57,85 +57,13 @@
             <a:spLocks noGrp="1"/>
           </p:cNvSpPr>
           <p:nvPr>
-            <p:ph type="title"/>
-          </p:nvPr>
-        </p:nvSpPr>
-        <p:spPr>
-          <a:xfrm>
-            <a:off x="685800" y="2130480"/>
-            <a:ext cx="7772040" cy="1469520"/>
-          </a:xfrm>
-          <a:prstGeom prst="rect">
-            <a:avLst/>
-          </a:prstGeom>
-          <a:noFill/>
-          <a:ln w="0">
-            <a:noFill/>
-          </a:ln>
-        </p:spPr>
-        <p:txBody>
-          <a:bodyPr lIns="91440" tIns="45720" rIns="91440" bIns="45720" anchor="ctr">
-            <a:noAutofit/>
-          </a:bodyPr>
-          <a:lstStyle>
-            <a:lvl1pPr indent="0" algn="ctr" defTabSz="457200">
-              <a:lnSpc>
-                <a:spcPct val="100000"/>
-              </a:lnSpc>
-              <a:buNone/>
-              <a:defRPr lang="en-US" sz="4400" b="0" u="none" strike="noStrike">
-                <a:solidFill>
-                  <a:schemeClr val="dk1"/>
-                </a:solidFill>
-                <a:effectLst/>
-                <a:uFillTx/>
-                <a:latin typeface="Calibri"/>
-              </a:defRPr>
-            </a:lvl1pPr>
-          </a:lstStyle>
-          <a:p>
-            <a:pPr indent="0" algn="ctr" defTabSz="457200">
-              <a:lnSpc>
-                <a:spcPct val="100000"/>
-              </a:lnSpc>
-              <a:buNone/>
-            </a:pPr>
-            <a:r>
-              <a:rPr lang="en-US" sz="4400" b="0" u="none" strike="noStrike">
-                <a:solidFill>
-                  <a:schemeClr val="dk1"/>
-                </a:solidFill>
-                <a:effectLst/>
-                <a:uFillTx/>
-                <a:latin typeface="Calibri"/>
-              </a:rPr>
-              <a:t>Click to edit Master title style</a:t>
-            </a:r>
-            <a:endParaRPr lang="en-US" sz="4400" b="0" u="none" strike="noStrike">
-              <a:solidFill>
-                <a:schemeClr val="dk1"/>
-              </a:solidFill>
-              <a:effectLst/>
-              <a:uFillTx/>
-              <a:latin typeface="Calibri"/>
-            </a:endParaRPr>
-          </a:p>
-        </p:txBody>
-      </p:sp>
-      <p:sp>
-        <p:nvSpPr>
-          <p:cNvPr id="3" name="PlaceHolder 2"/>
-          <p:cNvSpPr>
-            <a:spLocks noGrp="1"/>
-          </p:cNvSpPr>
-          <p:nvPr>
             <p:ph type="dt" idx="1"/>
           </p:nvPr>
         </p:nvSpPr>
         <p:spPr>
           <a:xfrm>
             <a:off x="457200" y="6356520"/>
-            <a:ext cx="2133360" cy="364680"/>
+            <a:ext cx="2133000" cy="364320"/>
           </a:xfrm>
           <a:prstGeom prst="rect">
             <a:avLst/>
@@ -155,6 +83,9 @@
                 <a:spcPct val="100000"/>
               </a:lnSpc>
               <a:buNone/>
+              <a:tabLst>
+                <a:tab pos="0" algn="l"/>
+              </a:tabLst>
               <a:defRPr lang="en-US" sz="1200" b="0" u="none" strike="noStrike">
                 <a:solidFill>
                   <a:schemeClr val="dk1">
@@ -173,6 +104,9 @@
                 <a:spcPct val="100000"/>
               </a:lnSpc>
               <a:buNone/>
+              <a:tabLst>
+                <a:tab pos="0" algn="l"/>
+              </a:tabLst>
             </a:pPr>
             <a:r>
               <a:rPr lang="en-US" sz="1200" b="0" u="none" strike="noStrike">
@@ -200,7 +134,7 @@
       </p:sp>
       <p:sp>
         <p:nvSpPr>
-          <p:cNvPr id="4" name="PlaceHolder 3"/>
+          <p:cNvPr id="3" name="PlaceHolder 2"/>
           <p:cNvSpPr>
             <a:spLocks noGrp="1"/>
           </p:cNvSpPr>
@@ -211,7 +145,7 @@
         <p:spPr>
           <a:xfrm>
             <a:off x="3124080" y="6356520"/>
-            <a:ext cx="2895120" cy="364680"/>
+            <a:ext cx="2894760" cy="364320"/>
           </a:xfrm>
           <a:prstGeom prst="rect">
             <a:avLst/>
@@ -227,7 +161,13 @@
           </a:bodyPr>
           <a:lstStyle>
             <a:lvl1pPr indent="0" algn="ctr">
+              <a:lnSpc>
+                <a:spcPct val="100000"/>
+              </a:lnSpc>
               <a:buNone/>
+              <a:tabLst>
+                <a:tab pos="0" algn="l"/>
+              </a:tabLst>
               <a:defRPr lang="en-US" sz="1400" b="0" u="none" strike="noStrike">
                 <a:solidFill>
                   <a:srgbClr val="000000"/>
@@ -240,7 +180,13 @@
           </a:lstStyle>
           <a:p>
             <a:pPr indent="0" algn="ctr">
+              <a:lnSpc>
+                <a:spcPct val="100000"/>
+              </a:lnSpc>
               <a:buNone/>
+              <a:tabLst>
+                <a:tab pos="0" algn="l"/>
+              </a:tabLst>
             </a:pPr>
             <a:r>
               <a:rPr lang="en-US" sz="1400" b="0" u="none" strike="noStrike">
@@ -266,7 +212,7 @@
       </p:sp>
       <p:sp>
         <p:nvSpPr>
-          <p:cNvPr id="5" name="PlaceHolder 4"/>
+          <p:cNvPr id="4" name="PlaceHolder 3"/>
           <p:cNvSpPr>
             <a:spLocks noGrp="1"/>
           </p:cNvSpPr>
@@ -277,7 +223,7 @@
         <p:spPr>
           <a:xfrm>
             <a:off x="6553080" y="6356520"/>
-            <a:ext cx="2133360" cy="364680"/>
+            <a:ext cx="2133000" cy="364320"/>
           </a:xfrm>
           <a:prstGeom prst="rect">
             <a:avLst/>
@@ -297,6 +243,9 @@
                 <a:spcPct val="100000"/>
               </a:lnSpc>
               <a:buNone/>
+              <a:tabLst>
+                <a:tab pos="0" algn="l"/>
+              </a:tabLst>
               <a:defRPr lang="en-US" sz="1200" b="0" u="none" strike="noStrike">
                 <a:solidFill>
                   <a:schemeClr val="dk1">
@@ -315,8 +264,11 @@
                 <a:spcPct val="100000"/>
               </a:lnSpc>
               <a:buNone/>
-            </a:pPr>
-            <a:fld id="{291E3B6F-08F3-4AAC-A5C5-5D955090F078}" type="slidenum">
+              <a:tabLst>
+                <a:tab pos="0" algn="l"/>
+              </a:tabLst>
+            </a:pPr>
+            <a:fld id="{C4464F65-8F5F-4A94-8015-A16699169C7C}" type="slidenum">
               <a:rPr lang="en-US" sz="1200" b="0" u="none" strike="noStrike">
                 <a:solidFill>
                   <a:schemeClr val="dk1">
@@ -336,6 +288,514 @@
               <a:effectLst/>
               <a:uFillTx/>
               <a:latin typeface="Times New Roman"/>
+            </a:endParaRPr>
+          </a:p>
+        </p:txBody>
+      </p:sp>
+      <p:sp>
+        <p:nvSpPr>
+          <p:cNvPr id="5" name="PlaceHolder 4"/>
+          <p:cNvSpPr>
+            <a:spLocks noGrp="1"/>
+          </p:cNvSpPr>
+          <p:nvPr>
+            <p:ph type="title"/>
+          </p:nvPr>
+        </p:nvSpPr>
+        <p:spPr>
+          <a:xfrm>
+            <a:off x="609480" y="273600"/>
+            <a:ext cx="10971720" cy="1144440"/>
+          </a:xfrm>
+          <a:prstGeom prst="rect">
+            <a:avLst/>
+          </a:prstGeom>
+          <a:noFill/>
+          <a:ln w="0">
+            <a:noFill/>
+          </a:ln>
+        </p:spPr>
+        <p:txBody>
+          <a:bodyPr lIns="0" tIns="0" rIns="0" bIns="0" anchor="ctr">
+            <a:noAutofit/>
+          </a:bodyPr>
+          <a:lstStyle>
+            <a:lvl1pPr indent="0" algn="l">
+              <a:lnSpc>
+                <a:spcPct val="100000"/>
+              </a:lnSpc>
+              <a:buNone/>
+              <a:tabLst>
+                <a:tab pos="0" algn="l"/>
+              </a:tabLst>
+              <a:defRPr lang="en-US" sz="1800" b="0" u="none" strike="noStrike">
+                <a:solidFill>
+                  <a:schemeClr val="dk1"/>
+                </a:solidFill>
+                <a:effectLst/>
+                <a:uFillTx/>
+                <a:latin typeface="Calibri"/>
+              </a:defRPr>
+            </a:lvl1pPr>
+          </a:lstStyle>
+          <a:p>
+            <a:pPr indent="0" algn="l">
+              <a:lnSpc>
+                <a:spcPct val="100000"/>
+              </a:lnSpc>
+              <a:buNone/>
+              <a:tabLst>
+                <a:tab pos="0" algn="l"/>
+              </a:tabLst>
+            </a:pPr>
+            <a:r>
+              <a:rPr lang="en-US" sz="1800" b="0" u="none" strike="noStrike">
+                <a:solidFill>
+                  <a:schemeClr val="dk1"/>
+                </a:solidFill>
+                <a:effectLst/>
+                <a:uFillTx/>
+                <a:latin typeface="Calibri"/>
+              </a:rPr>
+              <a:t>Click to edit the title text format</a:t>
+            </a:r>
+            <a:endParaRPr lang="en-US" sz="1800" b="0" u="none" strike="noStrike">
+              <a:solidFill>
+                <a:schemeClr val="dk1"/>
+              </a:solidFill>
+              <a:effectLst/>
+              <a:uFillTx/>
+              <a:latin typeface="Calibri"/>
+            </a:endParaRPr>
+          </a:p>
+        </p:txBody>
+      </p:sp>
+      <p:sp>
+        <p:nvSpPr>
+          <p:cNvPr id="6" name="PlaceHolder 5"/>
+          <p:cNvSpPr>
+            <a:spLocks noGrp="1"/>
+          </p:cNvSpPr>
+          <p:nvPr>
+            <p:ph type="body"/>
+          </p:nvPr>
+        </p:nvSpPr>
+        <p:spPr>
+          <a:xfrm>
+            <a:off x="609480" y="1604520"/>
+            <a:ext cx="10971720" cy="3976920"/>
+          </a:xfrm>
+          <a:prstGeom prst="rect">
+            <a:avLst/>
+          </a:prstGeom>
+          <a:noFill/>
+          <a:ln w="0">
+            <a:noFill/>
+          </a:ln>
+        </p:spPr>
+        <p:txBody>
+          <a:bodyPr lIns="0" tIns="0" rIns="0" bIns="0" anchor="t">
+            <a:normAutofit/>
+          </a:bodyPr>
+          <a:lstStyle>
+            <a:lvl1pPr algn="l">
+              <a:lnSpc>
+                <a:spcPct val="100000"/>
+              </a:lnSpc>
+              <a:spcBef>
+                <a:spcPts val="1417"/>
+              </a:spcBef>
+              <a:buClr>
+                <a:srgbClr val="000000"/>
+              </a:buClr>
+              <a:buSzPct val="45000"/>
+              <a:buFont typeface="Wingdings" charset="2"/>
+              <a:buChar char=""/>
+              <a:defRPr lang="en-US" sz="3200" b="0" u="none" strike="noStrike">
+                <a:solidFill>
+                  <a:schemeClr val="dk1"/>
+                </a:solidFill>
+                <a:effectLst/>
+                <a:uFillTx/>
+                <a:latin typeface="Calibri"/>
+              </a:defRPr>
+            </a:lvl1pPr>
+            <a:lvl2pPr lvl="1" algn="l">
+              <a:lnSpc>
+                <a:spcPct val="100000"/>
+              </a:lnSpc>
+              <a:spcBef>
+                <a:spcPts val="1134"/>
+              </a:spcBef>
+              <a:buClr>
+                <a:srgbClr val="000000"/>
+              </a:buClr>
+              <a:buSzPct val="75000"/>
+              <a:buFont typeface="Symbol" charset="2"/>
+              <a:buChar char=""/>
+              <a:defRPr lang="en-US" sz="2400" b="0" u="none" strike="noStrike">
+                <a:solidFill>
+                  <a:schemeClr val="dk1"/>
+                </a:solidFill>
+                <a:effectLst/>
+                <a:uFillTx/>
+                <a:latin typeface="Calibri"/>
+              </a:defRPr>
+            </a:lvl2pPr>
+            <a:lvl3pPr lvl="2" algn="l">
+              <a:lnSpc>
+                <a:spcPct val="100000"/>
+              </a:lnSpc>
+              <a:spcBef>
+                <a:spcPts val="850"/>
+              </a:spcBef>
+              <a:buClr>
+                <a:srgbClr val="000000"/>
+              </a:buClr>
+              <a:buSzPct val="45000"/>
+              <a:buFont typeface="Wingdings" charset="2"/>
+              <a:buChar char=""/>
+              <a:defRPr lang="en-US" sz="2000" b="0" u="none" strike="noStrike">
+                <a:solidFill>
+                  <a:schemeClr val="dk1"/>
+                </a:solidFill>
+                <a:effectLst/>
+                <a:uFillTx/>
+                <a:latin typeface="Calibri"/>
+              </a:defRPr>
+            </a:lvl3pPr>
+            <a:lvl4pPr lvl="3" algn="l">
+              <a:lnSpc>
+                <a:spcPct val="100000"/>
+              </a:lnSpc>
+              <a:spcBef>
+                <a:spcPts val="567"/>
+              </a:spcBef>
+              <a:buClr>
+                <a:srgbClr val="000000"/>
+              </a:buClr>
+              <a:buSzPct val="75000"/>
+              <a:buFont typeface="Symbol" charset="2"/>
+              <a:buChar char=""/>
+              <a:defRPr lang="en-US" sz="2000" b="0" u="none" strike="noStrike">
+                <a:solidFill>
+                  <a:schemeClr val="dk1"/>
+                </a:solidFill>
+                <a:effectLst/>
+                <a:uFillTx/>
+                <a:latin typeface="Calibri"/>
+              </a:defRPr>
+            </a:lvl4pPr>
+            <a:lvl5pPr lvl="4" algn="l">
+              <a:lnSpc>
+                <a:spcPct val="100000"/>
+              </a:lnSpc>
+              <a:spcBef>
+                <a:spcPts val="283"/>
+              </a:spcBef>
+              <a:buClr>
+                <a:srgbClr val="000000"/>
+              </a:buClr>
+              <a:buSzPct val="45000"/>
+              <a:buFont typeface="Wingdings" charset="2"/>
+              <a:buChar char=""/>
+              <a:defRPr lang="en-US" sz="2000" b="0" u="none" strike="noStrike">
+                <a:solidFill>
+                  <a:schemeClr val="dk1"/>
+                </a:solidFill>
+                <a:effectLst/>
+                <a:uFillTx/>
+                <a:latin typeface="Calibri"/>
+              </a:defRPr>
+            </a:lvl5pPr>
+            <a:lvl6pPr lvl="5" algn="l">
+              <a:lnSpc>
+                <a:spcPct val="100000"/>
+              </a:lnSpc>
+              <a:spcBef>
+                <a:spcPts val="283"/>
+              </a:spcBef>
+              <a:buClr>
+                <a:srgbClr val="000000"/>
+              </a:buClr>
+              <a:buSzPct val="45000"/>
+              <a:buFont typeface="Wingdings" charset="2"/>
+              <a:buChar char=""/>
+              <a:defRPr lang="en-US" sz="2000" b="0" u="none" strike="noStrike">
+                <a:solidFill>
+                  <a:schemeClr val="dk1"/>
+                </a:solidFill>
+                <a:effectLst/>
+                <a:uFillTx/>
+                <a:latin typeface="Calibri"/>
+              </a:defRPr>
+            </a:lvl6pPr>
+            <a:lvl7pPr lvl="6" algn="l">
+              <a:lnSpc>
+                <a:spcPct val="100000"/>
+              </a:lnSpc>
+              <a:spcBef>
+                <a:spcPts val="283"/>
+              </a:spcBef>
+              <a:buClr>
+                <a:srgbClr val="000000"/>
+              </a:buClr>
+              <a:buSzPct val="45000"/>
+              <a:buFont typeface="Wingdings" charset="2"/>
+              <a:buChar char=""/>
+              <a:defRPr lang="en-US" sz="2000" b="0" u="none" strike="noStrike">
+                <a:solidFill>
+                  <a:schemeClr val="dk1"/>
+                </a:solidFill>
+                <a:effectLst/>
+                <a:uFillTx/>
+                <a:latin typeface="Calibri"/>
+              </a:defRPr>
+            </a:lvl7pPr>
+          </a:lstStyle>
+          <a:p>
+            <a:pPr marL="432000" indent="-324000" algn="l">
+              <a:lnSpc>
+                <a:spcPct val="100000"/>
+              </a:lnSpc>
+              <a:spcBef>
+                <a:spcPts val="1417"/>
+              </a:spcBef>
+              <a:buClr>
+                <a:srgbClr val="000000"/>
+              </a:buClr>
+              <a:buSzPct val="45000"/>
+              <a:buFont typeface="Wingdings" charset="2"/>
+              <a:buChar char=""/>
+            </a:pPr>
+            <a:r>
+              <a:rPr lang="en-US" sz="3200" b="0" u="none" strike="noStrike">
+                <a:solidFill>
+                  <a:schemeClr val="dk1"/>
+                </a:solidFill>
+                <a:effectLst/>
+                <a:uFillTx/>
+                <a:latin typeface="Calibri"/>
+              </a:rPr>
+              <a:t>Click to edit the outline text format</a:t>
+            </a:r>
+            <a:endParaRPr lang="en-US" sz="3200" b="0" u="none" strike="noStrike">
+              <a:solidFill>
+                <a:schemeClr val="dk1"/>
+              </a:solidFill>
+              <a:effectLst/>
+              <a:uFillTx/>
+              <a:latin typeface="Calibri"/>
+            </a:endParaRPr>
+          </a:p>
+          <a:p>
+            <a:pPr marL="864000" lvl="1" indent="-324000" algn="l">
+              <a:lnSpc>
+                <a:spcPct val="100000"/>
+              </a:lnSpc>
+              <a:spcBef>
+                <a:spcPts val="1134"/>
+              </a:spcBef>
+              <a:buClr>
+                <a:srgbClr val="000000"/>
+              </a:buClr>
+              <a:buSzPct val="75000"/>
+              <a:buFont typeface="Symbol" charset="2"/>
+              <a:buChar char=""/>
+            </a:pPr>
+            <a:r>
+              <a:rPr lang="en-US" sz="2400" b="0" u="none" strike="noStrike">
+                <a:solidFill>
+                  <a:schemeClr val="dk1"/>
+                </a:solidFill>
+                <a:effectLst/>
+                <a:uFillTx/>
+                <a:latin typeface="Calibri"/>
+              </a:rPr>
+              <a:t>Second Outline Level</a:t>
+            </a:r>
+            <a:endParaRPr lang="en-US" sz="2400" b="0" u="none" strike="noStrike">
+              <a:solidFill>
+                <a:schemeClr val="dk1"/>
+              </a:solidFill>
+              <a:effectLst/>
+              <a:uFillTx/>
+              <a:latin typeface="Calibri"/>
+            </a:endParaRPr>
+          </a:p>
+          <a:p>
+            <a:pPr marL="1296000" lvl="2" indent="-288000" algn="l">
+              <a:lnSpc>
+                <a:spcPct val="100000"/>
+              </a:lnSpc>
+              <a:spcBef>
+                <a:spcPts val="850"/>
+              </a:spcBef>
+              <a:buClr>
+                <a:srgbClr val="000000"/>
+              </a:buClr>
+              <a:buSzPct val="45000"/>
+              <a:buFont typeface="Wingdings" charset="2"/>
+              <a:buChar char=""/>
+            </a:pPr>
+            <a:r>
+              <a:rPr lang="en-US" sz="2000" b="0" u="none" strike="noStrike">
+                <a:solidFill>
+                  <a:schemeClr val="dk1"/>
+                </a:solidFill>
+                <a:effectLst/>
+                <a:uFillTx/>
+                <a:latin typeface="Calibri"/>
+              </a:rPr>
+              <a:t>Third Outline Level</a:t>
+            </a:r>
+            <a:endParaRPr lang="en-US" sz="2000" b="0" u="none" strike="noStrike">
+              <a:solidFill>
+                <a:schemeClr val="dk1"/>
+              </a:solidFill>
+              <a:effectLst/>
+              <a:uFillTx/>
+              <a:latin typeface="Calibri"/>
+            </a:endParaRPr>
+          </a:p>
+          <a:p>
+            <a:pPr marL="1728000" lvl="3" indent="-216000" algn="l">
+              <a:lnSpc>
+                <a:spcPct val="100000"/>
+              </a:lnSpc>
+              <a:spcBef>
+                <a:spcPts val="567"/>
+              </a:spcBef>
+              <a:buClr>
+                <a:srgbClr val="000000"/>
+              </a:buClr>
+              <a:buSzPct val="75000"/>
+              <a:buFont typeface="Symbol" charset="2"/>
+              <a:buChar char=""/>
+            </a:pPr>
+            <a:r>
+              <a:rPr lang="en-US" sz="2000" b="0" u="none" strike="noStrike">
+                <a:solidFill>
+                  <a:schemeClr val="dk1"/>
+                </a:solidFill>
+                <a:effectLst/>
+                <a:uFillTx/>
+                <a:latin typeface="Calibri"/>
+              </a:rPr>
+              <a:t>Fourth Outline Level</a:t>
+            </a:r>
+            <a:endParaRPr lang="en-US" sz="2000" b="0" u="none" strike="noStrike">
+              <a:solidFill>
+                <a:schemeClr val="dk1"/>
+              </a:solidFill>
+              <a:effectLst/>
+              <a:uFillTx/>
+              <a:latin typeface="Calibri"/>
+            </a:endParaRPr>
+          </a:p>
+          <a:p>
+            <a:pPr marL="2160000" lvl="4" indent="-216000" algn="l">
+              <a:lnSpc>
+                <a:spcPct val="100000"/>
+              </a:lnSpc>
+              <a:spcBef>
+                <a:spcPts val="283"/>
+              </a:spcBef>
+              <a:buClr>
+                <a:srgbClr val="000000"/>
+              </a:buClr>
+              <a:buSzPct val="45000"/>
+              <a:buFont typeface="Wingdings" charset="2"/>
+              <a:buChar char=""/>
+            </a:pPr>
+            <a:r>
+              <a:rPr lang="en-US" sz="2000" b="0" u="none" strike="noStrike">
+                <a:solidFill>
+                  <a:schemeClr val="dk1"/>
+                </a:solidFill>
+                <a:effectLst/>
+                <a:uFillTx/>
+                <a:latin typeface="Calibri"/>
+              </a:rPr>
+              <a:t>Fifth Outline Level</a:t>
+            </a:r>
+            <a:endParaRPr lang="en-US" sz="2000" b="0" u="none" strike="noStrike">
+              <a:solidFill>
+                <a:schemeClr val="dk1"/>
+              </a:solidFill>
+              <a:effectLst/>
+              <a:uFillTx/>
+              <a:latin typeface="Calibri"/>
+            </a:endParaRPr>
+          </a:p>
+          <a:p>
+            <a:pPr marL="2592000" lvl="5" indent="-216000" algn="l">
+              <a:lnSpc>
+                <a:spcPct val="100000"/>
+              </a:lnSpc>
+              <a:spcBef>
+                <a:spcPts val="283"/>
+              </a:spcBef>
+              <a:buClr>
+                <a:srgbClr val="000000"/>
+              </a:buClr>
+              <a:buSzPct val="45000"/>
+              <a:buFont typeface="Wingdings" charset="2"/>
+              <a:buChar char=""/>
+            </a:pPr>
+            <a:r>
+              <a:rPr lang="en-US" sz="2000" b="0" u="none" strike="noStrike">
+                <a:solidFill>
+                  <a:schemeClr val="dk1"/>
+                </a:solidFill>
+                <a:effectLst/>
+                <a:uFillTx/>
+                <a:latin typeface="Calibri"/>
+              </a:rPr>
+              <a:t>Sixth Outline Level</a:t>
+            </a:r>
+            <a:endParaRPr lang="en-US" sz="2000" b="0" u="none" strike="noStrike">
+              <a:solidFill>
+                <a:schemeClr val="dk1"/>
+              </a:solidFill>
+              <a:effectLst/>
+              <a:uFillTx/>
+              <a:latin typeface="Calibri"/>
+            </a:endParaRPr>
+          </a:p>
+          <a:p>
+            <a:pPr marL="3024000" lvl="6" indent="-216000" algn="l">
+              <a:lnSpc>
+                <a:spcPct val="100000"/>
+              </a:lnSpc>
+              <a:spcBef>
+                <a:spcPts val="283"/>
+              </a:spcBef>
+              <a:buClr>
+                <a:srgbClr val="000000"/>
+              </a:buClr>
+              <a:buSzPct val="45000"/>
+              <a:buFont typeface="Wingdings" charset="2"/>
+              <a:buChar char=""/>
+            </a:pPr>
+            <a:r>
+              <a:rPr lang="en-US" sz="2000" b="0" u="none" strike="noStrike">
+                <a:solidFill>
+                  <a:schemeClr val="dk1"/>
+                </a:solidFill>
+                <a:effectLst/>
+                <a:uFillTx/>
+                <a:latin typeface="Calibri"/>
+              </a:rPr>
+              <a:t>Seventh Outline Level</a:t>
+            </a:r>
+            <a:endParaRPr lang="en-US" sz="2000" b="0" u="none" strike="noStrike">
+              <a:solidFill>
+                <a:schemeClr val="dk1"/>
+              </a:solidFill>
+              <a:effectLst/>
+              <a:uFillTx/>
+              <a:latin typeface="Calibri"/>
             </a:endParaRPr>
           </a:p>
         </p:txBody>
@@ -347,7 +807,7 @@
 
 <file path=ppt/slideLayouts/slideLayout10.xml><?xml version="1.0" encoding="utf-8"?>
 <p:sldLayout xmlns:a="http://schemas.openxmlformats.org/drawingml/2006/main" xmlns:p="http://schemas.openxmlformats.org/presentationml/2006/main" xmlns:r="http://schemas.openxmlformats.org/officeDocument/2006/relationships" xmlns:p14="http://schemas.microsoft.com/office/powerpoint/2010/main" xmlns:p15="http://schemas.microsoft.com/office/powerpoint/2012/main" xmlns:mc="http://schemas.openxmlformats.org/markup-compatibility/2006" type="blank" preserve="1">
-  <p:cSld name="Content with Caption">
+  <p:cSld name="Comparison">
     <p:bg>
       <p:bgPr>
         <a:solidFill>
@@ -381,8 +841,86 @@
         </p:nvSpPr>
         <p:spPr>
           <a:xfrm>
-            <a:off x="457200" y="272880"/>
-            <a:ext cx="3007800" cy="1161720"/>
+            <a:off x="457200" y="274680"/>
+            <a:ext cx="8228880" cy="1142280"/>
+          </a:xfrm>
+          <a:prstGeom prst="rect">
+            <a:avLst/>
+          </a:prstGeom>
+          <a:noFill/>
+          <a:ln w="0">
+            <a:noFill/>
+          </a:ln>
+        </p:spPr>
+        <p:txBody>
+          <a:bodyPr lIns="91440" tIns="45720" rIns="91440" bIns="45720" anchor="ctr">
+            <a:noAutofit/>
+          </a:bodyPr>
+          <a:lstStyle>
+            <a:lvl1pPr indent="0" algn="ctr" defTabSz="457200">
+              <a:lnSpc>
+                <a:spcPct val="100000"/>
+              </a:lnSpc>
+              <a:buNone/>
+              <a:tabLst>
+                <a:tab pos="0" algn="l"/>
+              </a:tabLst>
+              <a:defRPr lang="en-US" sz="4400" b="0" u="none" strike="noStrike">
+                <a:solidFill>
+                  <a:schemeClr val="dk1"/>
+                </a:solidFill>
+                <a:effectLst/>
+                <a:uFillTx/>
+                <a:latin typeface="Calibri"/>
+              </a:defRPr>
+            </a:lvl1pPr>
+          </a:lstStyle>
+          <a:p>
+            <a:pPr indent="0" algn="ctr" defTabSz="457200">
+              <a:lnSpc>
+                <a:spcPct val="100000"/>
+              </a:lnSpc>
+              <a:buNone/>
+              <a:tabLst>
+                <a:tab pos="0" algn="l"/>
+              </a:tabLst>
+            </a:pPr>
+            <a:r>
+              <a:rPr lang="en-US" sz="4400" b="0" u="none" strike="noStrike">
+                <a:solidFill>
+                  <a:schemeClr val="dk1"/>
+                </a:solidFill>
+                <a:effectLst/>
+                <a:uFillTx/>
+                <a:latin typeface="Calibri"/>
+              </a:rPr>
+              <a:t>Click to edit Master title style</a:t>
+            </a:r>
+            <a:endParaRPr lang="en-US" sz="4400" b="0" u="none" strike="noStrike">
+              <a:solidFill>
+                <a:schemeClr val="dk1"/>
+              </a:solidFill>
+              <a:effectLst/>
+              <a:uFillTx/>
+              <a:latin typeface="Calibri"/>
+            </a:endParaRPr>
+          </a:p>
+        </p:txBody>
+      </p:sp>
+      <p:sp>
+        <p:nvSpPr>
+          <p:cNvPr id="50" name="PlaceHolder 2"/>
+          <p:cNvSpPr>
+            <a:spLocks noGrp="1"/>
+          </p:cNvSpPr>
+          <p:nvPr>
+            <p:ph type="body"/>
+          </p:nvPr>
+        </p:nvSpPr>
+        <p:spPr>
+          <a:xfrm>
+            <a:off x="457200" y="1535040"/>
+            <a:ext cx="4039560" cy="639000"/>
           </a:xfrm>
           <a:prstGeom prst="rect">
             <a:avLst/>
@@ -401,8 +939,14 @@
               <a:lnSpc>
                 <a:spcPct val="100000"/>
               </a:lnSpc>
+              <a:spcBef>
+                <a:spcPts val="479"/>
+              </a:spcBef>
               <a:buNone/>
-              <a:defRPr lang="en-US" sz="2000" b="1" u="none" strike="noStrike">
+              <a:tabLst>
+                <a:tab pos="0" algn="l"/>
+              </a:tabLst>
+              <a:defRPr lang="en-US" sz="2400" b="1" u="none" strike="noStrike">
                 <a:solidFill>
                   <a:schemeClr val="dk1"/>
                 </a:solidFill>
@@ -417,10 +961,16 @@
               <a:lnSpc>
                 <a:spcPct val="100000"/>
               </a:lnSpc>
+              <a:spcBef>
+                <a:spcPts val="479"/>
+              </a:spcBef>
               <a:buNone/>
-            </a:pPr>
-            <a:r>
-              <a:rPr lang="en-US" sz="2000" b="1" u="none" strike="noStrike">
+              <a:tabLst>
+                <a:tab pos="0" algn="l"/>
+              </a:tabLst>
+            </a:pPr>
+            <a:r>
+              <a:rPr lang="en-US" sz="2400" b="1" u="none" strike="noStrike">
                 <a:solidFill>
                   <a:schemeClr val="dk1"/>
                 </a:solidFill>
@@ -428,9 +978,9 @@
                 <a:uFillTx/>
                 <a:latin typeface="Calibri"/>
               </a:rPr>
-              <a:t>Click to edit Master title style</a:t>
-            </a:r>
-            <a:endParaRPr lang="en-US" sz="2000" b="1" u="none" strike="noStrike">
+              <a:t>Click to edit Master text styles</a:t>
+            </a:r>
+            <a:endParaRPr lang="en-US" sz="2400" b="0" u="none" strike="noStrike">
               <a:solidFill>
                 <a:schemeClr val="dk1"/>
               </a:solidFill>
@@ -443,7 +993,7 @@
       </p:sp>
       <p:sp>
         <p:nvSpPr>
-          <p:cNvPr id="50" name="PlaceHolder 2"/>
+          <p:cNvPr id="51" name="PlaceHolder 3"/>
           <p:cNvSpPr>
             <a:spLocks noGrp="1"/>
           </p:cNvSpPr>
@@ -453,8 +1003,8 @@
         </p:nvSpPr>
         <p:spPr>
           <a:xfrm>
-            <a:off x="3575160" y="272880"/>
-            <a:ext cx="5111280" cy="5852880"/>
+            <a:off x="457200" y="2174760"/>
+            <a:ext cx="4039560" cy="3950640"/>
           </a:xfrm>
           <a:prstGeom prst="rect">
             <a:avLst/>
@@ -474,6 +1024,1460 @@
                 <a:spcPct val="100000"/>
               </a:lnSpc>
               <a:spcBef>
+                <a:spcPts val="479"/>
+              </a:spcBef>
+              <a:buClr>
+                <a:srgbClr val="000000"/>
+              </a:buClr>
+              <a:buFont typeface="Arial"/>
+              <a:buChar char="•"/>
+              <a:tabLst>
+                <a:tab pos="0" algn="l"/>
+              </a:tabLst>
+              <a:defRPr lang="en-US" sz="2400" b="0" u="none" strike="noStrike">
+                <a:solidFill>
+                  <a:schemeClr val="dk1"/>
+                </a:solidFill>
+                <a:effectLst/>
+                <a:uFillTx/>
+                <a:latin typeface="Calibri"/>
+              </a:defRPr>
+            </a:lvl1pPr>
+            <a:lvl2pPr lvl="1" algn="l" defTabSz="457200">
+              <a:lnSpc>
+                <a:spcPct val="100000"/>
+              </a:lnSpc>
+              <a:spcBef>
+                <a:spcPts val="400"/>
+              </a:spcBef>
+              <a:buClr>
+                <a:srgbClr val="000000"/>
+              </a:buClr>
+              <a:buFont typeface="Arial"/>
+              <a:buChar char="–"/>
+              <a:tabLst>
+                <a:tab pos="0" algn="l"/>
+              </a:tabLst>
+              <a:defRPr lang="en-US" sz="2000" b="0" u="none" strike="noStrike">
+                <a:solidFill>
+                  <a:schemeClr val="dk1"/>
+                </a:solidFill>
+                <a:effectLst/>
+                <a:uFillTx/>
+                <a:latin typeface="Calibri"/>
+              </a:defRPr>
+            </a:lvl2pPr>
+            <a:lvl3pPr lvl="2" algn="l" defTabSz="457200">
+              <a:lnSpc>
+                <a:spcPct val="100000"/>
+              </a:lnSpc>
+              <a:spcBef>
+                <a:spcPts val="360"/>
+              </a:spcBef>
+              <a:buClr>
+                <a:srgbClr val="000000"/>
+              </a:buClr>
+              <a:buFont typeface="Arial"/>
+              <a:buChar char="•"/>
+              <a:tabLst>
+                <a:tab pos="0" algn="l"/>
+              </a:tabLst>
+              <a:defRPr lang="en-US" sz="1800" b="0" u="none" strike="noStrike">
+                <a:solidFill>
+                  <a:schemeClr val="dk1"/>
+                </a:solidFill>
+                <a:effectLst/>
+                <a:uFillTx/>
+                <a:latin typeface="Calibri"/>
+              </a:defRPr>
+            </a:lvl3pPr>
+            <a:lvl4pPr lvl="3" algn="l" defTabSz="457200">
+              <a:lnSpc>
+                <a:spcPct val="100000"/>
+              </a:lnSpc>
+              <a:spcBef>
+                <a:spcPts val="320"/>
+              </a:spcBef>
+              <a:buClr>
+                <a:srgbClr val="000000"/>
+              </a:buClr>
+              <a:buFont typeface="Arial"/>
+              <a:buChar char="–"/>
+              <a:tabLst>
+                <a:tab pos="0" algn="l"/>
+              </a:tabLst>
+              <a:defRPr lang="en-US" sz="1600" b="0" u="none" strike="noStrike">
+                <a:solidFill>
+                  <a:schemeClr val="dk1"/>
+                </a:solidFill>
+                <a:effectLst/>
+                <a:uFillTx/>
+                <a:latin typeface="Calibri"/>
+              </a:defRPr>
+            </a:lvl4pPr>
+            <a:lvl5pPr lvl="4" algn="l" defTabSz="457200">
+              <a:lnSpc>
+                <a:spcPct val="100000"/>
+              </a:lnSpc>
+              <a:spcBef>
+                <a:spcPts val="320"/>
+              </a:spcBef>
+              <a:buClr>
+                <a:srgbClr val="000000"/>
+              </a:buClr>
+              <a:buFont typeface="Arial"/>
+              <a:buChar char="»"/>
+              <a:tabLst>
+                <a:tab pos="0" algn="l"/>
+              </a:tabLst>
+              <a:defRPr lang="en-US" sz="1600" b="0" u="none" strike="noStrike">
+                <a:solidFill>
+                  <a:schemeClr val="dk1"/>
+                </a:solidFill>
+                <a:effectLst/>
+                <a:uFillTx/>
+                <a:latin typeface="Calibri"/>
+              </a:defRPr>
+            </a:lvl5pPr>
+          </a:lstStyle>
+          <a:p>
+            <a:pPr marL="343080" indent="-343080" algn="l" defTabSz="457200">
+              <a:lnSpc>
+                <a:spcPct val="100000"/>
+              </a:lnSpc>
+              <a:spcBef>
+                <a:spcPts val="479"/>
+              </a:spcBef>
+              <a:buClr>
+                <a:srgbClr val="000000"/>
+              </a:buClr>
+              <a:buFont typeface="Arial"/>
+              <a:buChar char="•"/>
+              <a:tabLst>
+                <a:tab pos="0" algn="l"/>
+              </a:tabLst>
+            </a:pPr>
+            <a:r>
+              <a:rPr lang="en-US" sz="2400" b="0" u="none" strike="noStrike">
+                <a:solidFill>
+                  <a:schemeClr val="dk1"/>
+                </a:solidFill>
+                <a:effectLst/>
+                <a:uFillTx/>
+                <a:latin typeface="Calibri"/>
+              </a:rPr>
+              <a:t>Click to edit Master text styles</a:t>
+            </a:r>
+            <a:endParaRPr lang="en-US" sz="2400" b="0" u="none" strike="noStrike">
+              <a:solidFill>
+                <a:schemeClr val="dk1"/>
+              </a:solidFill>
+              <a:effectLst/>
+              <a:uFillTx/>
+              <a:latin typeface="Calibri"/>
+            </a:endParaRPr>
+          </a:p>
+          <a:p>
+            <a:pPr marL="743040" lvl="1" indent="-285840" algn="l" defTabSz="457200">
+              <a:lnSpc>
+                <a:spcPct val="100000"/>
+              </a:lnSpc>
+              <a:spcBef>
+                <a:spcPts val="400"/>
+              </a:spcBef>
+              <a:buClr>
+                <a:srgbClr val="000000"/>
+              </a:buClr>
+              <a:buFont typeface="Arial"/>
+              <a:buChar char="–"/>
+              <a:tabLst>
+                <a:tab pos="0" algn="l"/>
+              </a:tabLst>
+            </a:pPr>
+            <a:r>
+              <a:rPr lang="en-US" sz="2000" b="0" u="none" strike="noStrike">
+                <a:solidFill>
+                  <a:schemeClr val="dk1"/>
+                </a:solidFill>
+                <a:effectLst/>
+                <a:uFillTx/>
+                <a:latin typeface="Calibri"/>
+              </a:rPr>
+              <a:t>Second level</a:t>
+            </a:r>
+            <a:endParaRPr lang="en-US" sz="2000" b="0" u="none" strike="noStrike">
+              <a:solidFill>
+                <a:schemeClr val="dk1"/>
+              </a:solidFill>
+              <a:effectLst/>
+              <a:uFillTx/>
+              <a:latin typeface="Calibri"/>
+            </a:endParaRPr>
+          </a:p>
+          <a:p>
+            <a:pPr marL="1143000" lvl="2" indent="-228600" algn="l" defTabSz="457200">
+              <a:lnSpc>
+                <a:spcPct val="100000"/>
+              </a:lnSpc>
+              <a:spcBef>
+                <a:spcPts val="360"/>
+              </a:spcBef>
+              <a:buClr>
+                <a:srgbClr val="000000"/>
+              </a:buClr>
+              <a:buFont typeface="Arial"/>
+              <a:buChar char="•"/>
+              <a:tabLst>
+                <a:tab pos="0" algn="l"/>
+              </a:tabLst>
+            </a:pPr>
+            <a:r>
+              <a:rPr lang="en-US" sz="1800" b="0" u="none" strike="noStrike">
+                <a:solidFill>
+                  <a:schemeClr val="dk1"/>
+                </a:solidFill>
+                <a:effectLst/>
+                <a:uFillTx/>
+                <a:latin typeface="Calibri"/>
+              </a:rPr>
+              <a:t>Third level</a:t>
+            </a:r>
+            <a:endParaRPr lang="en-US" sz="1800" b="0" u="none" strike="noStrike">
+              <a:solidFill>
+                <a:schemeClr val="dk1"/>
+              </a:solidFill>
+              <a:effectLst/>
+              <a:uFillTx/>
+              <a:latin typeface="Calibri"/>
+            </a:endParaRPr>
+          </a:p>
+          <a:p>
+            <a:pPr marL="1600200" lvl="3" indent="-228600" algn="l" defTabSz="457200">
+              <a:lnSpc>
+                <a:spcPct val="100000"/>
+              </a:lnSpc>
+              <a:spcBef>
+                <a:spcPts val="320"/>
+              </a:spcBef>
+              <a:buClr>
+                <a:srgbClr val="000000"/>
+              </a:buClr>
+              <a:buFont typeface="Arial"/>
+              <a:buChar char="–"/>
+              <a:tabLst>
+                <a:tab pos="0" algn="l"/>
+              </a:tabLst>
+            </a:pPr>
+            <a:r>
+              <a:rPr lang="en-US" sz="1600" b="0" u="none" strike="noStrike">
+                <a:solidFill>
+                  <a:schemeClr val="dk1"/>
+                </a:solidFill>
+                <a:effectLst/>
+                <a:uFillTx/>
+                <a:latin typeface="Calibri"/>
+              </a:rPr>
+              <a:t>Fourth level</a:t>
+            </a:r>
+            <a:endParaRPr lang="en-US" sz="1600" b="0" u="none" strike="noStrike">
+              <a:solidFill>
+                <a:schemeClr val="dk1"/>
+              </a:solidFill>
+              <a:effectLst/>
+              <a:uFillTx/>
+              <a:latin typeface="Calibri"/>
+            </a:endParaRPr>
+          </a:p>
+          <a:p>
+            <a:pPr marL="2057400" lvl="4" indent="-228600" algn="l" defTabSz="457200">
+              <a:lnSpc>
+                <a:spcPct val="100000"/>
+              </a:lnSpc>
+              <a:spcBef>
+                <a:spcPts val="320"/>
+              </a:spcBef>
+              <a:buClr>
+                <a:srgbClr val="000000"/>
+              </a:buClr>
+              <a:buFont typeface="Arial"/>
+              <a:buChar char="»"/>
+              <a:tabLst>
+                <a:tab pos="0" algn="l"/>
+              </a:tabLst>
+            </a:pPr>
+            <a:r>
+              <a:rPr lang="en-US" sz="1600" b="0" u="none" strike="noStrike">
+                <a:solidFill>
+                  <a:schemeClr val="dk1"/>
+                </a:solidFill>
+                <a:effectLst/>
+                <a:uFillTx/>
+                <a:latin typeface="Calibri"/>
+              </a:rPr>
+              <a:t>Fifth level</a:t>
+            </a:r>
+            <a:endParaRPr lang="en-US" sz="1600" b="0" u="none" strike="noStrike">
+              <a:solidFill>
+                <a:schemeClr val="dk1"/>
+              </a:solidFill>
+              <a:effectLst/>
+              <a:uFillTx/>
+              <a:latin typeface="Calibri"/>
+            </a:endParaRPr>
+          </a:p>
+        </p:txBody>
+      </p:sp>
+      <p:sp>
+        <p:nvSpPr>
+          <p:cNvPr id="52" name="PlaceHolder 4"/>
+          <p:cNvSpPr>
+            <a:spLocks noGrp="1"/>
+          </p:cNvSpPr>
+          <p:nvPr>
+            <p:ph type="body"/>
+          </p:nvPr>
+        </p:nvSpPr>
+        <p:spPr>
+          <a:xfrm>
+            <a:off x="4645080" y="1535040"/>
+            <a:ext cx="4041000" cy="639000"/>
+          </a:xfrm>
+          <a:prstGeom prst="rect">
+            <a:avLst/>
+          </a:prstGeom>
+          <a:noFill/>
+          <a:ln w="0">
+            <a:noFill/>
+          </a:ln>
+        </p:spPr>
+        <p:txBody>
+          <a:bodyPr lIns="91440" tIns="45720" rIns="91440" bIns="45720" anchor="b">
+            <a:noAutofit/>
+          </a:bodyPr>
+          <a:lstStyle>
+            <a:lvl1pPr indent="0" algn="l" defTabSz="457200">
+              <a:lnSpc>
+                <a:spcPct val="100000"/>
+              </a:lnSpc>
+              <a:spcBef>
+                <a:spcPts val="479"/>
+              </a:spcBef>
+              <a:buNone/>
+              <a:tabLst>
+                <a:tab pos="0" algn="l"/>
+              </a:tabLst>
+              <a:defRPr lang="en-US" sz="2400" b="1" u="none" strike="noStrike">
+                <a:solidFill>
+                  <a:schemeClr val="dk1"/>
+                </a:solidFill>
+                <a:effectLst/>
+                <a:uFillTx/>
+                <a:latin typeface="Calibri"/>
+              </a:defRPr>
+            </a:lvl1pPr>
+          </a:lstStyle>
+          <a:p>
+            <a:pPr indent="0" algn="l" defTabSz="457200">
+              <a:lnSpc>
+                <a:spcPct val="100000"/>
+              </a:lnSpc>
+              <a:spcBef>
+                <a:spcPts val="479"/>
+              </a:spcBef>
+              <a:buNone/>
+              <a:tabLst>
+                <a:tab pos="0" algn="l"/>
+              </a:tabLst>
+            </a:pPr>
+            <a:r>
+              <a:rPr lang="en-US" sz="2400" b="1" u="none" strike="noStrike">
+                <a:solidFill>
+                  <a:schemeClr val="dk1"/>
+                </a:solidFill>
+                <a:effectLst/>
+                <a:uFillTx/>
+                <a:latin typeface="Calibri"/>
+              </a:rPr>
+              <a:t>Click to edit Master text styles</a:t>
+            </a:r>
+            <a:endParaRPr lang="en-US" sz="2400" b="0" u="none" strike="noStrike">
+              <a:solidFill>
+                <a:schemeClr val="dk1"/>
+              </a:solidFill>
+              <a:effectLst/>
+              <a:uFillTx/>
+              <a:latin typeface="Calibri"/>
+            </a:endParaRPr>
+          </a:p>
+        </p:txBody>
+      </p:sp>
+      <p:sp>
+        <p:nvSpPr>
+          <p:cNvPr id="53" name="PlaceHolder 5"/>
+          <p:cNvSpPr>
+            <a:spLocks noGrp="1"/>
+          </p:cNvSpPr>
+          <p:nvPr>
+            <p:ph type="body"/>
+          </p:nvPr>
+        </p:nvSpPr>
+        <p:spPr>
+          <a:xfrm>
+            <a:off x="4645080" y="2174760"/>
+            <a:ext cx="4041000" cy="3950640"/>
+          </a:xfrm>
+          <a:prstGeom prst="rect">
+            <a:avLst/>
+          </a:prstGeom>
+          <a:noFill/>
+          <a:ln w="0">
+            <a:noFill/>
+          </a:ln>
+        </p:spPr>
+        <p:txBody>
+          <a:bodyPr lIns="91440" tIns="45720" rIns="91440" bIns="45720" anchor="t">
+            <a:noAutofit/>
+          </a:bodyPr>
+          <a:lstStyle>
+            <a:lvl1pPr algn="l" defTabSz="457200">
+              <a:lnSpc>
+                <a:spcPct val="100000"/>
+              </a:lnSpc>
+              <a:spcBef>
+                <a:spcPts val="479"/>
+              </a:spcBef>
+              <a:buClr>
+                <a:srgbClr val="000000"/>
+              </a:buClr>
+              <a:buFont typeface="Arial"/>
+              <a:buChar char="•"/>
+              <a:tabLst>
+                <a:tab pos="0" algn="l"/>
+              </a:tabLst>
+              <a:defRPr lang="en-US" sz="2400" b="0" u="none" strike="noStrike">
+                <a:solidFill>
+                  <a:schemeClr val="dk1"/>
+                </a:solidFill>
+                <a:effectLst/>
+                <a:uFillTx/>
+                <a:latin typeface="Calibri"/>
+              </a:defRPr>
+            </a:lvl1pPr>
+            <a:lvl2pPr lvl="1" algn="l" defTabSz="457200">
+              <a:lnSpc>
+                <a:spcPct val="100000"/>
+              </a:lnSpc>
+              <a:spcBef>
+                <a:spcPts val="400"/>
+              </a:spcBef>
+              <a:buClr>
+                <a:srgbClr val="000000"/>
+              </a:buClr>
+              <a:buFont typeface="Arial"/>
+              <a:buChar char="–"/>
+              <a:tabLst>
+                <a:tab pos="0" algn="l"/>
+              </a:tabLst>
+              <a:defRPr lang="en-US" sz="2000" b="0" u="none" strike="noStrike">
+                <a:solidFill>
+                  <a:schemeClr val="dk1"/>
+                </a:solidFill>
+                <a:effectLst/>
+                <a:uFillTx/>
+                <a:latin typeface="Calibri"/>
+              </a:defRPr>
+            </a:lvl2pPr>
+            <a:lvl3pPr lvl="2" algn="l" defTabSz="457200">
+              <a:lnSpc>
+                <a:spcPct val="100000"/>
+              </a:lnSpc>
+              <a:spcBef>
+                <a:spcPts val="360"/>
+              </a:spcBef>
+              <a:buClr>
+                <a:srgbClr val="000000"/>
+              </a:buClr>
+              <a:buFont typeface="Arial"/>
+              <a:buChar char="•"/>
+              <a:tabLst>
+                <a:tab pos="0" algn="l"/>
+              </a:tabLst>
+              <a:defRPr lang="en-US" sz="1800" b="0" u="none" strike="noStrike">
+                <a:solidFill>
+                  <a:schemeClr val="dk1"/>
+                </a:solidFill>
+                <a:effectLst/>
+                <a:uFillTx/>
+                <a:latin typeface="Calibri"/>
+              </a:defRPr>
+            </a:lvl3pPr>
+            <a:lvl4pPr lvl="3" algn="l" defTabSz="457200">
+              <a:lnSpc>
+                <a:spcPct val="100000"/>
+              </a:lnSpc>
+              <a:spcBef>
+                <a:spcPts val="320"/>
+              </a:spcBef>
+              <a:buClr>
+                <a:srgbClr val="000000"/>
+              </a:buClr>
+              <a:buFont typeface="Arial"/>
+              <a:buChar char="–"/>
+              <a:tabLst>
+                <a:tab pos="0" algn="l"/>
+              </a:tabLst>
+              <a:defRPr lang="en-US" sz="1600" b="0" u="none" strike="noStrike">
+                <a:solidFill>
+                  <a:schemeClr val="dk1"/>
+                </a:solidFill>
+                <a:effectLst/>
+                <a:uFillTx/>
+                <a:latin typeface="Calibri"/>
+              </a:defRPr>
+            </a:lvl4pPr>
+            <a:lvl5pPr lvl="4" algn="l" defTabSz="457200">
+              <a:lnSpc>
+                <a:spcPct val="100000"/>
+              </a:lnSpc>
+              <a:spcBef>
+                <a:spcPts val="320"/>
+              </a:spcBef>
+              <a:buClr>
+                <a:srgbClr val="000000"/>
+              </a:buClr>
+              <a:buFont typeface="Arial"/>
+              <a:buChar char="»"/>
+              <a:tabLst>
+                <a:tab pos="0" algn="l"/>
+              </a:tabLst>
+              <a:defRPr lang="en-US" sz="1600" b="0" u="none" strike="noStrike">
+                <a:solidFill>
+                  <a:schemeClr val="dk1"/>
+                </a:solidFill>
+                <a:effectLst/>
+                <a:uFillTx/>
+                <a:latin typeface="Calibri"/>
+              </a:defRPr>
+            </a:lvl5pPr>
+          </a:lstStyle>
+          <a:p>
+            <a:pPr marL="343080" indent="-343080" algn="l" defTabSz="457200">
+              <a:lnSpc>
+                <a:spcPct val="100000"/>
+              </a:lnSpc>
+              <a:spcBef>
+                <a:spcPts val="479"/>
+              </a:spcBef>
+              <a:buClr>
+                <a:srgbClr val="000000"/>
+              </a:buClr>
+              <a:buFont typeface="Arial"/>
+              <a:buChar char="•"/>
+              <a:tabLst>
+                <a:tab pos="0" algn="l"/>
+              </a:tabLst>
+            </a:pPr>
+            <a:r>
+              <a:rPr lang="en-US" sz="2400" b="0" u="none" strike="noStrike">
+                <a:solidFill>
+                  <a:schemeClr val="dk1"/>
+                </a:solidFill>
+                <a:effectLst/>
+                <a:uFillTx/>
+                <a:latin typeface="Calibri"/>
+              </a:rPr>
+              <a:t>Click to edit Master text styles</a:t>
+            </a:r>
+            <a:endParaRPr lang="en-US" sz="2400" b="0" u="none" strike="noStrike">
+              <a:solidFill>
+                <a:schemeClr val="dk1"/>
+              </a:solidFill>
+              <a:effectLst/>
+              <a:uFillTx/>
+              <a:latin typeface="Calibri"/>
+            </a:endParaRPr>
+          </a:p>
+          <a:p>
+            <a:pPr marL="743040" lvl="1" indent="-285840" algn="l" defTabSz="457200">
+              <a:lnSpc>
+                <a:spcPct val="100000"/>
+              </a:lnSpc>
+              <a:spcBef>
+                <a:spcPts val="400"/>
+              </a:spcBef>
+              <a:buClr>
+                <a:srgbClr val="000000"/>
+              </a:buClr>
+              <a:buFont typeface="Arial"/>
+              <a:buChar char="–"/>
+              <a:tabLst>
+                <a:tab pos="0" algn="l"/>
+              </a:tabLst>
+            </a:pPr>
+            <a:r>
+              <a:rPr lang="en-US" sz="2000" b="0" u="none" strike="noStrike">
+                <a:solidFill>
+                  <a:schemeClr val="dk1"/>
+                </a:solidFill>
+                <a:effectLst/>
+                <a:uFillTx/>
+                <a:latin typeface="Calibri"/>
+              </a:rPr>
+              <a:t>Second level</a:t>
+            </a:r>
+            <a:endParaRPr lang="en-US" sz="2000" b="0" u="none" strike="noStrike">
+              <a:solidFill>
+                <a:schemeClr val="dk1"/>
+              </a:solidFill>
+              <a:effectLst/>
+              <a:uFillTx/>
+              <a:latin typeface="Calibri"/>
+            </a:endParaRPr>
+          </a:p>
+          <a:p>
+            <a:pPr marL="1143000" lvl="2" indent="-228600" algn="l" defTabSz="457200">
+              <a:lnSpc>
+                <a:spcPct val="100000"/>
+              </a:lnSpc>
+              <a:spcBef>
+                <a:spcPts val="360"/>
+              </a:spcBef>
+              <a:buClr>
+                <a:srgbClr val="000000"/>
+              </a:buClr>
+              <a:buFont typeface="Arial"/>
+              <a:buChar char="•"/>
+              <a:tabLst>
+                <a:tab pos="0" algn="l"/>
+              </a:tabLst>
+            </a:pPr>
+            <a:r>
+              <a:rPr lang="en-US" sz="1800" b="0" u="none" strike="noStrike">
+                <a:solidFill>
+                  <a:schemeClr val="dk1"/>
+                </a:solidFill>
+                <a:effectLst/>
+                <a:uFillTx/>
+                <a:latin typeface="Calibri"/>
+              </a:rPr>
+              <a:t>Third level</a:t>
+            </a:r>
+            <a:endParaRPr lang="en-US" sz="1800" b="0" u="none" strike="noStrike">
+              <a:solidFill>
+                <a:schemeClr val="dk1"/>
+              </a:solidFill>
+              <a:effectLst/>
+              <a:uFillTx/>
+              <a:latin typeface="Calibri"/>
+            </a:endParaRPr>
+          </a:p>
+          <a:p>
+            <a:pPr marL="1600200" lvl="3" indent="-228600" algn="l" defTabSz="457200">
+              <a:lnSpc>
+                <a:spcPct val="100000"/>
+              </a:lnSpc>
+              <a:spcBef>
+                <a:spcPts val="320"/>
+              </a:spcBef>
+              <a:buClr>
+                <a:srgbClr val="000000"/>
+              </a:buClr>
+              <a:buFont typeface="Arial"/>
+              <a:buChar char="–"/>
+              <a:tabLst>
+                <a:tab pos="0" algn="l"/>
+              </a:tabLst>
+            </a:pPr>
+            <a:r>
+              <a:rPr lang="en-US" sz="1600" b="0" u="none" strike="noStrike">
+                <a:solidFill>
+                  <a:schemeClr val="dk1"/>
+                </a:solidFill>
+                <a:effectLst/>
+                <a:uFillTx/>
+                <a:latin typeface="Calibri"/>
+              </a:rPr>
+              <a:t>Fourth level</a:t>
+            </a:r>
+            <a:endParaRPr lang="en-US" sz="1600" b="0" u="none" strike="noStrike">
+              <a:solidFill>
+                <a:schemeClr val="dk1"/>
+              </a:solidFill>
+              <a:effectLst/>
+              <a:uFillTx/>
+              <a:latin typeface="Calibri"/>
+            </a:endParaRPr>
+          </a:p>
+          <a:p>
+            <a:pPr marL="2057400" lvl="4" indent="-228600" algn="l" defTabSz="457200">
+              <a:lnSpc>
+                <a:spcPct val="100000"/>
+              </a:lnSpc>
+              <a:spcBef>
+                <a:spcPts val="320"/>
+              </a:spcBef>
+              <a:buClr>
+                <a:srgbClr val="000000"/>
+              </a:buClr>
+              <a:buFont typeface="Arial"/>
+              <a:buChar char="»"/>
+              <a:tabLst>
+                <a:tab pos="0" algn="l"/>
+              </a:tabLst>
+            </a:pPr>
+            <a:r>
+              <a:rPr lang="en-US" sz="1600" b="0" u="none" strike="noStrike">
+                <a:solidFill>
+                  <a:schemeClr val="dk1"/>
+                </a:solidFill>
+                <a:effectLst/>
+                <a:uFillTx/>
+                <a:latin typeface="Calibri"/>
+              </a:rPr>
+              <a:t>Fifth level</a:t>
+            </a:r>
+            <a:endParaRPr lang="en-US" sz="1600" b="0" u="none" strike="noStrike">
+              <a:solidFill>
+                <a:schemeClr val="dk1"/>
+              </a:solidFill>
+              <a:effectLst/>
+              <a:uFillTx/>
+              <a:latin typeface="Calibri"/>
+            </a:endParaRPr>
+          </a:p>
+        </p:txBody>
+      </p:sp>
+      <p:sp>
+        <p:nvSpPr>
+          <p:cNvPr id="54" name="PlaceHolder 6"/>
+          <p:cNvSpPr>
+            <a:spLocks noGrp="1"/>
+          </p:cNvSpPr>
+          <p:nvPr>
+            <p:ph type="dt" idx="28"/>
+          </p:nvPr>
+        </p:nvSpPr>
+        <p:spPr>
+          <a:xfrm>
+            <a:off x="457200" y="6356520"/>
+            <a:ext cx="2133000" cy="364320"/>
+          </a:xfrm>
+          <a:prstGeom prst="rect">
+            <a:avLst/>
+          </a:prstGeom>
+          <a:noFill/>
+          <a:ln w="0">
+            <a:noFill/>
+          </a:ln>
+        </p:spPr>
+        <p:txBody>
+          <a:bodyPr lIns="91440" tIns="45720" rIns="91440" bIns="45720" anchor="ctr">
+            <a:noAutofit/>
+          </a:bodyPr>
+          <a:lstStyle>
+            <a:lvl1pPr indent="0" algn="l" defTabSz="457200">
+              <a:lnSpc>
+                <a:spcPct val="100000"/>
+              </a:lnSpc>
+              <a:buNone/>
+              <a:tabLst>
+                <a:tab pos="0" algn="l"/>
+              </a:tabLst>
+              <a:defRPr lang="en-US" sz="1200" b="0" u="none" strike="noStrike">
+                <a:solidFill>
+                  <a:schemeClr val="dk1">
+                    <a:tint val="75000"/>
+                  </a:schemeClr>
+                </a:solidFill>
+                <a:effectLst/>
+                <a:uFillTx/>
+                <a:latin typeface="Calibri"/>
+              </a:defRPr>
+            </a:lvl1pPr>
+          </a:lstStyle>
+          <a:p>
+            <a:pPr indent="0" algn="l" defTabSz="457200">
+              <a:lnSpc>
+                <a:spcPct val="100000"/>
+              </a:lnSpc>
+              <a:buNone/>
+              <a:tabLst>
+                <a:tab pos="0" algn="l"/>
+              </a:tabLst>
+            </a:pPr>
+            <a:r>
+              <a:rPr lang="en-US" sz="1200" b="0" u="none" strike="noStrike">
+                <a:solidFill>
+                  <a:schemeClr val="dk1">
+                    <a:tint val="75000"/>
+                  </a:schemeClr>
+                </a:solidFill>
+                <a:effectLst/>
+                <a:uFillTx/>
+                <a:latin typeface="Calibri"/>
+              </a:rPr>
+              <a:t>&lt;date/time&gt;</a:t>
+            </a:r>
+            <a:endParaRPr lang="en-US" sz="1200" b="0" u="none" strike="noStrike">
+              <a:solidFill>
+                <a:srgbClr val="000000"/>
+              </a:solidFill>
+              <a:effectLst/>
+              <a:uFillTx/>
+              <a:latin typeface="Times New Roman"/>
+            </a:endParaRPr>
+          </a:p>
+        </p:txBody>
+      </p:sp>
+      <p:sp>
+        <p:nvSpPr>
+          <p:cNvPr id="55" name="PlaceHolder 7"/>
+          <p:cNvSpPr>
+            <a:spLocks noGrp="1"/>
+          </p:cNvSpPr>
+          <p:nvPr>
+            <p:ph type="ftr" idx="29"/>
+          </p:nvPr>
+        </p:nvSpPr>
+        <p:spPr>
+          <a:xfrm>
+            <a:off x="3124080" y="6356520"/>
+            <a:ext cx="2894760" cy="364320"/>
+          </a:xfrm>
+          <a:prstGeom prst="rect">
+            <a:avLst/>
+          </a:prstGeom>
+          <a:noFill/>
+          <a:ln w="0">
+            <a:noFill/>
+          </a:ln>
+        </p:spPr>
+        <p:txBody>
+          <a:bodyPr lIns="91440" tIns="45720" rIns="91440" bIns="45720" anchor="ctr">
+            <a:noAutofit/>
+          </a:bodyPr>
+          <a:lstStyle>
+            <a:lvl1pPr indent="0" algn="ctr">
+              <a:lnSpc>
+                <a:spcPct val="100000"/>
+              </a:lnSpc>
+              <a:buNone/>
+              <a:tabLst>
+                <a:tab pos="0" algn="l"/>
+              </a:tabLst>
+              <a:defRPr lang="en-US" sz="1400" b="0" u="none" strike="noStrike">
+                <a:solidFill>
+                  <a:srgbClr val="000000"/>
+                </a:solidFill>
+                <a:effectLst/>
+                <a:uFillTx/>
+                <a:latin typeface="Times New Roman"/>
+              </a:defRPr>
+            </a:lvl1pPr>
+          </a:lstStyle>
+          <a:p>
+            <a:pPr indent="0" algn="ctr">
+              <a:lnSpc>
+                <a:spcPct val="100000"/>
+              </a:lnSpc>
+              <a:buNone/>
+              <a:tabLst>
+                <a:tab pos="0" algn="l"/>
+              </a:tabLst>
+            </a:pPr>
+            <a:r>
+              <a:rPr lang="en-US" sz="1400" b="0" u="none" strike="noStrike">
+                <a:solidFill>
+                  <a:srgbClr val="000000"/>
+                </a:solidFill>
+                <a:effectLst/>
+                <a:uFillTx/>
+                <a:latin typeface="Times New Roman"/>
+              </a:rPr>
+              <a:t>&lt;footer&gt;</a:t>
+            </a:r>
+            <a:endParaRPr lang="en-US" sz="1400" b="0" u="none" strike="noStrike">
+              <a:solidFill>
+                <a:srgbClr val="000000"/>
+              </a:solidFill>
+              <a:effectLst/>
+              <a:uFillTx/>
+              <a:latin typeface="Times New Roman"/>
+            </a:endParaRPr>
+          </a:p>
+        </p:txBody>
+      </p:sp>
+      <p:sp>
+        <p:nvSpPr>
+          <p:cNvPr id="56" name="PlaceHolder 8"/>
+          <p:cNvSpPr>
+            <a:spLocks noGrp="1"/>
+          </p:cNvSpPr>
+          <p:nvPr>
+            <p:ph type="sldNum" idx="30"/>
+          </p:nvPr>
+        </p:nvSpPr>
+        <p:spPr>
+          <a:xfrm>
+            <a:off x="6553080" y="6356520"/>
+            <a:ext cx="2133000" cy="364320"/>
+          </a:xfrm>
+          <a:prstGeom prst="rect">
+            <a:avLst/>
+          </a:prstGeom>
+          <a:noFill/>
+          <a:ln w="0">
+            <a:noFill/>
+          </a:ln>
+        </p:spPr>
+        <p:txBody>
+          <a:bodyPr lIns="91440" tIns="45720" rIns="91440" bIns="45720" anchor="ctr">
+            <a:noAutofit/>
+          </a:bodyPr>
+          <a:lstStyle>
+            <a:lvl1pPr indent="0" algn="r" defTabSz="457200">
+              <a:lnSpc>
+                <a:spcPct val="100000"/>
+              </a:lnSpc>
+              <a:buNone/>
+              <a:tabLst>
+                <a:tab pos="0" algn="l"/>
+              </a:tabLst>
+              <a:defRPr lang="en-US" sz="1200" b="0" u="none" strike="noStrike">
+                <a:solidFill>
+                  <a:schemeClr val="dk1">
+                    <a:tint val="75000"/>
+                  </a:schemeClr>
+                </a:solidFill>
+                <a:effectLst/>
+                <a:uFillTx/>
+                <a:latin typeface="Calibri"/>
+              </a:defRPr>
+            </a:lvl1pPr>
+          </a:lstStyle>
+          <a:p>
+            <a:pPr indent="0" algn="r" defTabSz="457200">
+              <a:lnSpc>
+                <a:spcPct val="100000"/>
+              </a:lnSpc>
+              <a:buNone/>
+              <a:tabLst>
+                <a:tab pos="0" algn="l"/>
+              </a:tabLst>
+            </a:pPr>
+            <a:fld id="{E3B4CADE-2EAD-4D4E-9066-C9B4C4E5B180}" type="slidenum">
+              <a:rPr lang="en-US" sz="1200" b="0" u="none" strike="noStrike">
+                <a:solidFill>
+                  <a:schemeClr val="dk1">
+                    <a:tint val="75000"/>
+                  </a:schemeClr>
+                </a:solidFill>
+                <a:effectLst/>
+                <a:uFillTx/>
+                <a:latin typeface="Calibri"/>
+              </a:rPr>
+              <a:t>&lt;number&gt;</a:t>
+            </a:fld>
+            <a:endParaRPr lang="en-US" sz="1200" b="0" u="none" strike="noStrike">
+              <a:solidFill>
+                <a:srgbClr val="000000"/>
+              </a:solidFill>
+              <a:effectLst/>
+              <a:uFillTx/>
+              <a:latin typeface="Times New Roman"/>
+            </a:endParaRPr>
+          </a:p>
+        </p:txBody>
+      </p:sp>
+    </p:spTree>
+  </p:cSld>
+</p:sldLayout>
+</file>
+
+<file path=ppt/slideLayouts/slideLayout11.xml><?xml version="1.0" encoding="utf-8"?>
+<p:sldLayout xmlns:a="http://schemas.openxmlformats.org/drawingml/2006/main" xmlns:p="http://schemas.openxmlformats.org/presentationml/2006/main" xmlns:r="http://schemas.openxmlformats.org/officeDocument/2006/relationships" xmlns:p14="http://schemas.microsoft.com/office/powerpoint/2010/main" xmlns:p15="http://schemas.microsoft.com/office/powerpoint/2012/main" xmlns:mc="http://schemas.openxmlformats.org/markup-compatibility/2006" type="titleOnly" preserve="1">
+  <p:cSld name="Title Only">
+    <p:bg>
+      <p:bgPr>
+        <a:solidFill>
+          <a:srgbClr val="FFFFFF"/>
+        </a:solidFill>
+      </p:bgPr>
+    </p:bg>
+    <p:spTree>
+      <p:nvGrpSpPr>
+        <p:cNvPr id="1" name=""/>
+        <p:cNvGrpSpPr/>
+        <p:nvPr/>
+      </p:nvGrpSpPr>
+      <p:grpSpPr>
+        <a:xfrm>
+          <a:off x="0" y="0"/>
+          <a:ext cx="0" cy="0"/>
+          <a:chOff x="0" y="0"/>
+          <a:chExt cx="0" cy="0"/>
+        </a:xfrm>
+      </p:grpSpPr>
+      <p:sp>
+        <p:nvSpPr>
+          <p:cNvPr id="57" name="PlaceHolder 1"/>
+          <p:cNvSpPr>
+            <a:spLocks noGrp="1"/>
+          </p:cNvSpPr>
+          <p:nvPr>
+            <p:ph type="title"/>
+          </p:nvPr>
+        </p:nvSpPr>
+        <p:spPr>
+          <a:xfrm>
+            <a:off x="457200" y="274680"/>
+            <a:ext cx="8228880" cy="1142280"/>
+          </a:xfrm>
+          <a:prstGeom prst="rect">
+            <a:avLst/>
+          </a:prstGeom>
+          <a:noFill/>
+          <a:ln w="0">
+            <a:noFill/>
+          </a:ln>
+        </p:spPr>
+        <p:txBody>
+          <a:bodyPr lIns="91440" tIns="45720" rIns="91440" bIns="45720" anchor="ctr">
+            <a:noAutofit/>
+          </a:bodyPr>
+          <a:lstStyle>
+            <a:lvl1pPr indent="0" algn="ctr" defTabSz="457200">
+              <a:lnSpc>
+                <a:spcPct val="100000"/>
+              </a:lnSpc>
+              <a:buNone/>
+              <a:tabLst>
+                <a:tab pos="0" algn="l"/>
+              </a:tabLst>
+              <a:defRPr lang="en-US" sz="4400" b="0" u="none" strike="noStrike">
+                <a:solidFill>
+                  <a:schemeClr val="dk1"/>
+                </a:solidFill>
+                <a:effectLst/>
+                <a:uFillTx/>
+                <a:latin typeface="Calibri"/>
+              </a:defRPr>
+            </a:lvl1pPr>
+          </a:lstStyle>
+          <a:p>
+            <a:pPr indent="0" algn="ctr" defTabSz="457200">
+              <a:lnSpc>
+                <a:spcPct val="100000"/>
+              </a:lnSpc>
+              <a:buNone/>
+              <a:tabLst>
+                <a:tab pos="0" algn="l"/>
+              </a:tabLst>
+            </a:pPr>
+            <a:r>
+              <a:rPr lang="en-US" sz="4400" b="0" u="none" strike="noStrike">
+                <a:solidFill>
+                  <a:schemeClr val="dk1"/>
+                </a:solidFill>
+                <a:effectLst/>
+                <a:uFillTx/>
+                <a:latin typeface="Calibri"/>
+              </a:rPr>
+              <a:t>Click to edit Master title style</a:t>
+            </a:r>
+            <a:endParaRPr lang="en-US" sz="4400" b="0" u="none" strike="noStrike">
+              <a:solidFill>
+                <a:schemeClr val="dk1"/>
+              </a:solidFill>
+              <a:effectLst/>
+              <a:uFillTx/>
+              <a:latin typeface="Calibri"/>
+            </a:endParaRPr>
+          </a:p>
+        </p:txBody>
+      </p:sp>
+      <p:sp>
+        <p:nvSpPr>
+          <p:cNvPr id="58" name="PlaceHolder 2"/>
+          <p:cNvSpPr>
+            <a:spLocks noGrp="1"/>
+          </p:cNvSpPr>
+          <p:nvPr>
+            <p:ph type="dt" idx="31"/>
+          </p:nvPr>
+        </p:nvSpPr>
+        <p:spPr>
+          <a:xfrm>
+            <a:off x="457200" y="6356520"/>
+            <a:ext cx="2133000" cy="364320"/>
+          </a:xfrm>
+          <a:prstGeom prst="rect">
+            <a:avLst/>
+          </a:prstGeom>
+          <a:noFill/>
+          <a:ln w="0">
+            <a:noFill/>
+          </a:ln>
+        </p:spPr>
+        <p:txBody>
+          <a:bodyPr lIns="91440" tIns="45720" rIns="91440" bIns="45720" anchor="ctr">
+            <a:noAutofit/>
+          </a:bodyPr>
+          <a:lstStyle>
+            <a:lvl1pPr indent="0" algn="l" defTabSz="457200">
+              <a:lnSpc>
+                <a:spcPct val="100000"/>
+              </a:lnSpc>
+              <a:buNone/>
+              <a:tabLst>
+                <a:tab pos="0" algn="l"/>
+              </a:tabLst>
+              <a:defRPr lang="en-US" sz="1200" b="0" u="none" strike="noStrike">
+                <a:solidFill>
+                  <a:schemeClr val="dk1">
+                    <a:tint val="75000"/>
+                  </a:schemeClr>
+                </a:solidFill>
+                <a:effectLst/>
+                <a:uFillTx/>
+                <a:latin typeface="Calibri"/>
+              </a:defRPr>
+            </a:lvl1pPr>
+          </a:lstStyle>
+          <a:p>
+            <a:pPr indent="0" algn="l" defTabSz="457200">
+              <a:lnSpc>
+                <a:spcPct val="100000"/>
+              </a:lnSpc>
+              <a:buNone/>
+              <a:tabLst>
+                <a:tab pos="0" algn="l"/>
+              </a:tabLst>
+            </a:pPr>
+            <a:r>
+              <a:rPr lang="en-US" sz="1200" b="0" u="none" strike="noStrike">
+                <a:solidFill>
+                  <a:schemeClr val="dk1">
+                    <a:tint val="75000"/>
+                  </a:schemeClr>
+                </a:solidFill>
+                <a:effectLst/>
+                <a:uFillTx/>
+                <a:latin typeface="Calibri"/>
+              </a:rPr>
+              <a:t>&lt;date/time&gt;</a:t>
+            </a:r>
+            <a:endParaRPr lang="en-US" sz="1200" b="0" u="none" strike="noStrike">
+              <a:solidFill>
+                <a:srgbClr val="000000"/>
+              </a:solidFill>
+              <a:effectLst/>
+              <a:uFillTx/>
+              <a:latin typeface="Times New Roman"/>
+            </a:endParaRPr>
+          </a:p>
+        </p:txBody>
+      </p:sp>
+      <p:sp>
+        <p:nvSpPr>
+          <p:cNvPr id="59" name="PlaceHolder 3"/>
+          <p:cNvSpPr>
+            <a:spLocks noGrp="1"/>
+          </p:cNvSpPr>
+          <p:nvPr>
+            <p:ph type="ftr" idx="32"/>
+          </p:nvPr>
+        </p:nvSpPr>
+        <p:spPr>
+          <a:xfrm>
+            <a:off x="3124080" y="6356520"/>
+            <a:ext cx="2894760" cy="364320"/>
+          </a:xfrm>
+          <a:prstGeom prst="rect">
+            <a:avLst/>
+          </a:prstGeom>
+          <a:noFill/>
+          <a:ln w="0">
+            <a:noFill/>
+          </a:ln>
+        </p:spPr>
+        <p:txBody>
+          <a:bodyPr lIns="91440" tIns="45720" rIns="91440" bIns="45720" anchor="ctr">
+            <a:noAutofit/>
+          </a:bodyPr>
+          <a:lstStyle>
+            <a:lvl1pPr indent="0" algn="ctr">
+              <a:lnSpc>
+                <a:spcPct val="100000"/>
+              </a:lnSpc>
+              <a:buNone/>
+              <a:tabLst>
+                <a:tab pos="0" algn="l"/>
+              </a:tabLst>
+              <a:defRPr lang="en-US" sz="1400" b="0" u="none" strike="noStrike">
+                <a:solidFill>
+                  <a:srgbClr val="000000"/>
+                </a:solidFill>
+                <a:effectLst/>
+                <a:uFillTx/>
+                <a:latin typeface="Times New Roman"/>
+              </a:defRPr>
+            </a:lvl1pPr>
+          </a:lstStyle>
+          <a:p>
+            <a:pPr indent="0" algn="ctr">
+              <a:lnSpc>
+                <a:spcPct val="100000"/>
+              </a:lnSpc>
+              <a:buNone/>
+              <a:tabLst>
+                <a:tab pos="0" algn="l"/>
+              </a:tabLst>
+            </a:pPr>
+            <a:r>
+              <a:rPr lang="en-US" sz="1400" b="0" u="none" strike="noStrike">
+                <a:solidFill>
+                  <a:srgbClr val="000000"/>
+                </a:solidFill>
+                <a:effectLst/>
+                <a:uFillTx/>
+                <a:latin typeface="Times New Roman"/>
+              </a:rPr>
+              <a:t>&lt;footer&gt;</a:t>
+            </a:r>
+            <a:endParaRPr lang="en-US" sz="1400" b="0" u="none" strike="noStrike">
+              <a:solidFill>
+                <a:srgbClr val="000000"/>
+              </a:solidFill>
+              <a:effectLst/>
+              <a:uFillTx/>
+              <a:latin typeface="Times New Roman"/>
+            </a:endParaRPr>
+          </a:p>
+        </p:txBody>
+      </p:sp>
+      <p:sp>
+        <p:nvSpPr>
+          <p:cNvPr id="60" name="PlaceHolder 4"/>
+          <p:cNvSpPr>
+            <a:spLocks noGrp="1"/>
+          </p:cNvSpPr>
+          <p:nvPr>
+            <p:ph type="sldNum" idx="33"/>
+          </p:nvPr>
+        </p:nvSpPr>
+        <p:spPr>
+          <a:xfrm>
+            <a:off x="6553080" y="6356520"/>
+            <a:ext cx="2133000" cy="364320"/>
+          </a:xfrm>
+          <a:prstGeom prst="rect">
+            <a:avLst/>
+          </a:prstGeom>
+          <a:noFill/>
+          <a:ln w="0">
+            <a:noFill/>
+          </a:ln>
+        </p:spPr>
+        <p:txBody>
+          <a:bodyPr lIns="91440" tIns="45720" rIns="91440" bIns="45720" anchor="ctr">
+            <a:noAutofit/>
+          </a:bodyPr>
+          <a:lstStyle>
+            <a:lvl1pPr indent="0" algn="r" defTabSz="457200">
+              <a:lnSpc>
+                <a:spcPct val="100000"/>
+              </a:lnSpc>
+              <a:buNone/>
+              <a:tabLst>
+                <a:tab pos="0" algn="l"/>
+              </a:tabLst>
+              <a:defRPr lang="en-US" sz="1200" b="0" u="none" strike="noStrike">
+                <a:solidFill>
+                  <a:schemeClr val="dk1">
+                    <a:tint val="75000"/>
+                  </a:schemeClr>
+                </a:solidFill>
+                <a:effectLst/>
+                <a:uFillTx/>
+                <a:latin typeface="Calibri"/>
+              </a:defRPr>
+            </a:lvl1pPr>
+          </a:lstStyle>
+          <a:p>
+            <a:pPr indent="0" algn="r" defTabSz="457200">
+              <a:lnSpc>
+                <a:spcPct val="100000"/>
+              </a:lnSpc>
+              <a:buNone/>
+              <a:tabLst>
+                <a:tab pos="0" algn="l"/>
+              </a:tabLst>
+            </a:pPr>
+            <a:fld id="{07D3982A-7E27-43D2-8CEF-30174B067181}" type="slidenum">
+              <a:rPr lang="en-US" sz="1200" b="0" u="none" strike="noStrike">
+                <a:solidFill>
+                  <a:schemeClr val="dk1">
+                    <a:tint val="75000"/>
+                  </a:schemeClr>
+                </a:solidFill>
+                <a:effectLst/>
+                <a:uFillTx/>
+                <a:latin typeface="Calibri"/>
+              </a:rPr>
+              <a:t>&lt;number&gt;</a:t>
+            </a:fld>
+            <a:endParaRPr lang="en-US" sz="1200" b="0" u="none" strike="noStrike">
+              <a:solidFill>
+                <a:srgbClr val="000000"/>
+              </a:solidFill>
+              <a:effectLst/>
+              <a:uFillTx/>
+              <a:latin typeface="Times New Roman"/>
+            </a:endParaRPr>
+          </a:p>
+        </p:txBody>
+      </p:sp>
+    </p:spTree>
+  </p:cSld>
+</p:sldLayout>
+</file>
+
+<file path=ppt/slideLayouts/slideLayout2.xml><?xml version="1.0" encoding="utf-8"?>
+<p:sldLayout xmlns:a="http://schemas.openxmlformats.org/drawingml/2006/main" xmlns:p="http://schemas.openxmlformats.org/presentationml/2006/main" xmlns:r="http://schemas.openxmlformats.org/officeDocument/2006/relationships" xmlns:p14="http://schemas.microsoft.com/office/powerpoint/2010/main" xmlns:p15="http://schemas.microsoft.com/office/powerpoint/2012/main" xmlns:mc="http://schemas.openxmlformats.org/markup-compatibility/2006" type="blank" preserve="1">
+  <p:cSld name="Content with Caption">
+    <p:bg>
+      <p:bgPr>
+        <a:solidFill>
+          <a:srgbClr val="FFFFFF"/>
+        </a:solidFill>
+      </p:bgPr>
+    </p:bg>
+    <p:spTree>
+      <p:nvGrpSpPr>
+        <p:cNvPr id="1" name=""/>
+        <p:cNvGrpSpPr/>
+        <p:nvPr/>
+      </p:nvGrpSpPr>
+      <p:grpSpPr>
+        <a:xfrm>
+          <a:off x="0" y="0"/>
+          <a:ext cx="0" cy="0"/>
+          <a:chOff x="0" y="0"/>
+          <a:chExt cx="0" cy="0"/>
+        </a:xfrm>
+      </p:grpSpPr>
+      <p:sp>
+        <p:nvSpPr>
+          <p:cNvPr id="7" name="PlaceHolder 1"/>
+          <p:cNvSpPr>
+            <a:spLocks noGrp="1"/>
+          </p:cNvSpPr>
+          <p:nvPr>
+            <p:ph type="title"/>
+          </p:nvPr>
+        </p:nvSpPr>
+        <p:spPr>
+          <a:xfrm>
+            <a:off x="457200" y="272880"/>
+            <a:ext cx="3007440" cy="1161360"/>
+          </a:xfrm>
+          <a:prstGeom prst="rect">
+            <a:avLst/>
+          </a:prstGeom>
+          <a:noFill/>
+          <a:ln w="0">
+            <a:noFill/>
+          </a:ln>
+        </p:spPr>
+        <p:txBody>
+          <a:bodyPr lIns="91440" tIns="45720" rIns="91440" bIns="45720" anchor="b">
+            <a:noAutofit/>
+          </a:bodyPr>
+          <a:lstStyle>
+            <a:lvl1pPr indent="0" algn="l" defTabSz="457200">
+              <a:lnSpc>
+                <a:spcPct val="100000"/>
+              </a:lnSpc>
+              <a:buNone/>
+              <a:tabLst>
+                <a:tab pos="0" algn="l"/>
+              </a:tabLst>
+              <a:defRPr lang="en-US" sz="2000" b="1" u="none" strike="noStrike">
+                <a:solidFill>
+                  <a:schemeClr val="dk1"/>
+                </a:solidFill>
+                <a:effectLst/>
+                <a:uFillTx/>
+                <a:latin typeface="Calibri"/>
+              </a:defRPr>
+            </a:lvl1pPr>
+          </a:lstStyle>
+          <a:p>
+            <a:pPr indent="0" algn="l" defTabSz="457200">
+              <a:lnSpc>
+                <a:spcPct val="100000"/>
+              </a:lnSpc>
+              <a:buNone/>
+              <a:tabLst>
+                <a:tab pos="0" algn="l"/>
+              </a:tabLst>
+            </a:pPr>
+            <a:r>
+              <a:rPr lang="en-US" sz="2000" b="1" u="none" strike="noStrike">
+                <a:solidFill>
+                  <a:schemeClr val="dk1"/>
+                </a:solidFill>
+                <a:effectLst/>
+                <a:uFillTx/>
+                <a:latin typeface="Calibri"/>
+              </a:rPr>
+              <a:t>Click to edit Master title style</a:t>
+            </a:r>
+            <a:endParaRPr lang="en-US" sz="2000" b="1" u="none" strike="noStrike">
+              <a:solidFill>
+                <a:schemeClr val="dk1"/>
+              </a:solidFill>
+              <a:effectLst/>
+              <a:uFillTx/>
+              <a:latin typeface="Calibri"/>
+            </a:endParaRPr>
+          </a:p>
+        </p:txBody>
+      </p:sp>
+      <p:sp>
+        <p:nvSpPr>
+          <p:cNvPr id="8" name="PlaceHolder 2"/>
+          <p:cNvSpPr>
+            <a:spLocks noGrp="1"/>
+          </p:cNvSpPr>
+          <p:nvPr>
+            <p:ph type="body"/>
+          </p:nvPr>
+        </p:nvSpPr>
+        <p:spPr>
+          <a:xfrm>
+            <a:off x="3575160" y="272880"/>
+            <a:ext cx="5110920" cy="5852520"/>
+          </a:xfrm>
+          <a:prstGeom prst="rect">
+            <a:avLst/>
+          </a:prstGeom>
+          <a:noFill/>
+          <a:ln w="0">
+            <a:noFill/>
+          </a:ln>
+        </p:spPr>
+        <p:txBody>
+          <a:bodyPr lIns="91440" tIns="45720" rIns="91440" bIns="45720" anchor="t">
+            <a:noAutofit/>
+          </a:bodyPr>
+          <a:lstStyle>
+            <a:lvl1pPr algn="l" defTabSz="457200">
+              <a:lnSpc>
+                <a:spcPct val="100000"/>
+              </a:lnSpc>
+              <a:spcBef>
                 <a:spcPts val="641"/>
               </a:spcBef>
               <a:buClr>
@@ -749,7 +2753,7 @@
       </p:sp>
       <p:sp>
         <p:nvSpPr>
-          <p:cNvPr id="51" name="PlaceHolder 3"/>
+          <p:cNvPr id="9" name="PlaceHolder 3"/>
           <p:cNvSpPr>
             <a:spLocks noGrp="1"/>
           </p:cNvSpPr>
@@ -760,7 +2764,7 @@
         <p:spPr>
           <a:xfrm>
             <a:off x="457200" y="1434960"/>
-            <a:ext cx="3007800" cy="4690800"/>
+            <a:ext cx="3007440" cy="4690440"/>
           </a:xfrm>
           <a:prstGeom prst="rect">
             <a:avLst/>
@@ -833,18 +2837,18 @@
       </p:sp>
       <p:sp>
         <p:nvSpPr>
-          <p:cNvPr id="52" name="PlaceHolder 4"/>
+          <p:cNvPr id="10" name="PlaceHolder 4"/>
           <p:cNvSpPr>
             <a:spLocks noGrp="1"/>
           </p:cNvSpPr>
           <p:nvPr>
-            <p:ph type="dt" idx="28"/>
+            <p:ph type="dt" idx="4"/>
           </p:nvPr>
         </p:nvSpPr>
         <p:spPr>
           <a:xfrm>
             <a:off x="457200" y="6356520"/>
-            <a:ext cx="2133360" cy="364680"/>
+            <a:ext cx="2133000" cy="364320"/>
           </a:xfrm>
           <a:prstGeom prst="rect">
             <a:avLst/>
@@ -864,6 +2868,9 @@
                 <a:spcPct val="100000"/>
               </a:lnSpc>
               <a:buNone/>
+              <a:tabLst>
+                <a:tab pos="0" algn="l"/>
+              </a:tabLst>
               <a:defRPr lang="en-US" sz="1200" b="0" u="none" strike="noStrike">
                 <a:solidFill>
                   <a:schemeClr val="dk1">
@@ -882,6 +2889,9 @@
                 <a:spcPct val="100000"/>
               </a:lnSpc>
               <a:buNone/>
+              <a:tabLst>
+                <a:tab pos="0" algn="l"/>
+              </a:tabLst>
             </a:pPr>
             <a:r>
               <a:rPr lang="en-US" sz="1200" b="0" u="none" strike="noStrike">
@@ -909,18 +2919,18 @@
       </p:sp>
       <p:sp>
         <p:nvSpPr>
-          <p:cNvPr id="53" name="PlaceHolder 5"/>
+          <p:cNvPr id="11" name="PlaceHolder 5"/>
           <p:cNvSpPr>
             <a:spLocks noGrp="1"/>
           </p:cNvSpPr>
           <p:nvPr>
-            <p:ph type="ftr" idx="29"/>
+            <p:ph type="ftr" idx="5"/>
           </p:nvPr>
         </p:nvSpPr>
         <p:spPr>
           <a:xfrm>
             <a:off x="3124080" y="6356520"/>
-            <a:ext cx="2895120" cy="364680"/>
+            <a:ext cx="2894760" cy="364320"/>
           </a:xfrm>
           <a:prstGeom prst="rect">
             <a:avLst/>
@@ -936,7 +2946,13 @@
           </a:bodyPr>
           <a:lstStyle>
             <a:lvl1pPr indent="0" algn="ctr">
+              <a:lnSpc>
+                <a:spcPct val="100000"/>
+              </a:lnSpc>
               <a:buNone/>
+              <a:tabLst>
+                <a:tab pos="0" algn="l"/>
+              </a:tabLst>
               <a:defRPr lang="en-US" sz="1400" b="0" u="none" strike="noStrike">
                 <a:solidFill>
                   <a:srgbClr val="000000"/>
@@ -949,7 +2965,13 @@
           </a:lstStyle>
           <a:p>
             <a:pPr indent="0" algn="ctr">
+              <a:lnSpc>
+                <a:spcPct val="100000"/>
+              </a:lnSpc>
               <a:buNone/>
+              <a:tabLst>
+                <a:tab pos="0" algn="l"/>
+              </a:tabLst>
             </a:pPr>
             <a:r>
               <a:rPr lang="en-US" sz="1400" b="0" u="none" strike="noStrike">
@@ -975,18 +2997,18 @@
       </p:sp>
       <p:sp>
         <p:nvSpPr>
-          <p:cNvPr id="54" name="PlaceHolder 6"/>
+          <p:cNvPr id="12" name="PlaceHolder 6"/>
           <p:cNvSpPr>
             <a:spLocks noGrp="1"/>
           </p:cNvSpPr>
           <p:nvPr>
-            <p:ph type="sldNum" idx="30"/>
+            <p:ph type="sldNum" idx="6"/>
           </p:nvPr>
         </p:nvSpPr>
         <p:spPr>
           <a:xfrm>
             <a:off x="6553080" y="6356520"/>
-            <a:ext cx="2133360" cy="364680"/>
+            <a:ext cx="2133000" cy="364320"/>
           </a:xfrm>
           <a:prstGeom prst="rect">
             <a:avLst/>
@@ -1006,6 +3028,9 @@
                 <a:spcPct val="100000"/>
               </a:lnSpc>
               <a:buNone/>
+              <a:tabLst>
+                <a:tab pos="0" algn="l"/>
+              </a:tabLst>
               <a:defRPr lang="en-US" sz="1200" b="0" u="none" strike="noStrike">
                 <a:solidFill>
                   <a:schemeClr val="dk1">
@@ -1024,8 +3049,11 @@
                 <a:spcPct val="100000"/>
               </a:lnSpc>
               <a:buNone/>
-            </a:pPr>
-            <a:fld id="{84C07046-77BE-4B3A-A31A-684CC7D3CC3D}" type="slidenum">
+              <a:tabLst>
+                <a:tab pos="0" algn="l"/>
+              </a:tabLst>
+            </a:pPr>
+            <a:fld id="{93F52540-CD83-4701-9AD9-DEF1E7D4D9C4}" type="slidenum">
               <a:rPr lang="en-US" sz="1200" b="0" u="none" strike="noStrike">
                 <a:solidFill>
                   <a:schemeClr val="dk1">
@@ -1054,7 +3082,7 @@
 </p:sldLayout>
 </file>
 
-<file path=ppt/slideLayouts/slideLayout11.xml><?xml version="1.0" encoding="utf-8"?>
+<file path=ppt/slideLayouts/slideLayout3.xml><?xml version="1.0" encoding="utf-8"?>
 <p:sldLayout xmlns:a="http://schemas.openxmlformats.org/drawingml/2006/main" xmlns:p="http://schemas.openxmlformats.org/presentationml/2006/main" xmlns:r="http://schemas.openxmlformats.org/officeDocument/2006/relationships" xmlns:p14="http://schemas.microsoft.com/office/powerpoint/2010/main" xmlns:p15="http://schemas.microsoft.com/office/powerpoint/2012/main" xmlns:mc="http://schemas.openxmlformats.org/markup-compatibility/2006" type="blank" preserve="1">
   <p:cSld name="Picture with Caption">
     <p:bg>
@@ -1080,7 +3108,7 @@
       </p:grpSpPr>
       <p:sp>
         <p:nvSpPr>
-          <p:cNvPr id="55" name="PlaceHolder 1"/>
+          <p:cNvPr id="13" name="PlaceHolder 1"/>
           <p:cNvSpPr>
             <a:spLocks noGrp="1"/>
           </p:cNvSpPr>
@@ -1091,7 +3119,7 @@
         <p:spPr>
           <a:xfrm>
             <a:off x="1792440" y="4800600"/>
-            <a:ext cx="5486040" cy="566280"/>
+            <a:ext cx="5485680" cy="565920"/>
           </a:xfrm>
           <a:prstGeom prst="rect">
             <a:avLst/>
@@ -1111,6 +3139,9 @@
                 <a:spcPct val="100000"/>
               </a:lnSpc>
               <a:buNone/>
+              <a:tabLst>
+                <a:tab pos="0" algn="l"/>
+              </a:tabLst>
               <a:defRPr lang="en-US" sz="2000" b="1" u="none" strike="noStrike">
                 <a:solidFill>
                   <a:schemeClr val="dk1"/>
@@ -1127,6 +3158,9 @@
                 <a:spcPct val="100000"/>
               </a:lnSpc>
               <a:buNone/>
+              <a:tabLst>
+                <a:tab pos="0" algn="l"/>
+              </a:tabLst>
             </a:pPr>
             <a:r>
               <a:rPr lang="en-US" sz="2000" b="1" u="none" strike="noStrike">
@@ -1152,7 +3186,7 @@
       </p:sp>
       <p:sp>
         <p:nvSpPr>
-          <p:cNvPr id="56" name="PlaceHolder 2"/>
+          <p:cNvPr id="14" name="PlaceHolder 2"/>
           <p:cNvSpPr>
             <a:spLocks noGrp="1"/>
           </p:cNvSpPr>
@@ -1163,7 +3197,7 @@
         <p:spPr>
           <a:xfrm>
             <a:off x="1792440" y="612720"/>
-            <a:ext cx="5486040" cy="4114440"/>
+            <a:ext cx="5485680" cy="4114080"/>
           </a:xfrm>
           <a:prstGeom prst="rect">
             <a:avLst/>
@@ -1179,6 +3213,9 @@
           </a:bodyPr>
           <a:lstStyle>
             <a:lvl1pPr algn="l" defTabSz="457200">
+              <a:lnSpc>
+                <a:spcPct val="100000"/>
+              </a:lnSpc>
               <a:spcBef>
                 <a:spcPts val="281"/>
               </a:spcBef>
@@ -1201,6 +3238,9 @@
               </a:defRPr>
             </a:lvl1pPr>
             <a:lvl2pPr lvl="1" algn="l" defTabSz="457200">
+              <a:lnSpc>
+                <a:spcPct val="100000"/>
+              </a:lnSpc>
               <a:spcBef>
                 <a:spcPts val="1134"/>
               </a:spcBef>
@@ -1223,6 +3263,9 @@
               </a:defRPr>
             </a:lvl2pPr>
             <a:lvl3pPr lvl="2" algn="l" defTabSz="457200">
+              <a:lnSpc>
+                <a:spcPct val="100000"/>
+              </a:lnSpc>
               <a:spcBef>
                 <a:spcPts val="850"/>
               </a:spcBef>
@@ -1245,6 +3288,9 @@
               </a:defRPr>
             </a:lvl3pPr>
             <a:lvl4pPr lvl="3" algn="l" defTabSz="457200">
+              <a:lnSpc>
+                <a:spcPct val="100000"/>
+              </a:lnSpc>
               <a:spcBef>
                 <a:spcPts val="567"/>
               </a:spcBef>
@@ -1267,6 +3313,9 @@
               </a:defRPr>
             </a:lvl4pPr>
             <a:lvl5pPr lvl="4" algn="l" defTabSz="457200">
+              <a:lnSpc>
+                <a:spcPct val="100000"/>
+              </a:lnSpc>
               <a:spcBef>
                 <a:spcPts val="283"/>
               </a:spcBef>
@@ -1289,6 +3338,9 @@
               </a:defRPr>
             </a:lvl5pPr>
             <a:lvl6pPr lvl="5" algn="l" defTabSz="457200">
+              <a:lnSpc>
+                <a:spcPct val="100000"/>
+              </a:lnSpc>
               <a:spcBef>
                 <a:spcPts val="283"/>
               </a:spcBef>
@@ -1311,6 +3363,9 @@
               </a:defRPr>
             </a:lvl6pPr>
             <a:lvl7pPr lvl="6" algn="l" defTabSz="457200">
+              <a:lnSpc>
+                <a:spcPct val="100000"/>
+              </a:lnSpc>
               <a:spcBef>
                 <a:spcPts val="283"/>
               </a:spcBef>
@@ -1334,7 +3389,10 @@
             </a:lvl7pPr>
           </a:lstStyle>
           <a:p>
-            <a:pPr algn="l" defTabSz="457200">
+            <a:pPr marL="432000" indent="-324000" algn="l" defTabSz="457200">
+              <a:lnSpc>
+                <a:spcPct val="100000"/>
+              </a:lnSpc>
               <a:spcBef>
                 <a:spcPts val="281"/>
               </a:spcBef>
@@ -1369,7 +3427,10 @@
             </a:endParaRPr>
           </a:p>
           <a:p>
-            <a:pPr marL="457200" lvl="1" algn="l" defTabSz="457200">
+            <a:pPr marL="457200" lvl="1" indent="-324000" algn="l" defTabSz="457200">
+              <a:lnSpc>
+                <a:spcPct val="100000"/>
+              </a:lnSpc>
               <a:spcBef>
                 <a:spcPts val="1134"/>
               </a:spcBef>
@@ -1404,7 +3465,10 @@
             </a:endParaRPr>
           </a:p>
           <a:p>
-            <a:pPr marL="914400" lvl="2" algn="l" defTabSz="457200">
+            <a:pPr marL="914400" lvl="2" indent="-288000" algn="l" defTabSz="457200">
+              <a:lnSpc>
+                <a:spcPct val="100000"/>
+              </a:lnSpc>
               <a:spcBef>
                 <a:spcPts val="850"/>
               </a:spcBef>
@@ -1439,7 +3503,10 @@
             </a:endParaRPr>
           </a:p>
           <a:p>
-            <a:pPr marL="1371600" lvl="3" algn="l" defTabSz="457200">
+            <a:pPr marL="1371600" lvl="3" indent="-216000" algn="l" defTabSz="457200">
+              <a:lnSpc>
+                <a:spcPct val="100000"/>
+              </a:lnSpc>
               <a:spcBef>
                 <a:spcPts val="567"/>
               </a:spcBef>
@@ -1474,7 +3541,10 @@
             </a:endParaRPr>
           </a:p>
           <a:p>
-            <a:pPr marL="1828800" lvl="4" algn="l" defTabSz="457200">
+            <a:pPr marL="1828800" lvl="4" indent="-216000" algn="l" defTabSz="457200">
+              <a:lnSpc>
+                <a:spcPct val="100000"/>
+              </a:lnSpc>
               <a:spcBef>
                 <a:spcPts val="283"/>
               </a:spcBef>
@@ -1509,7 +3579,10 @@
             </a:endParaRPr>
           </a:p>
           <a:p>
-            <a:pPr marL="2286000" lvl="5" algn="l" defTabSz="457200">
+            <a:pPr marL="2286000" lvl="5" indent="-216000" algn="l" defTabSz="457200">
+              <a:lnSpc>
+                <a:spcPct val="100000"/>
+              </a:lnSpc>
               <a:spcBef>
                 <a:spcPts val="283"/>
               </a:spcBef>
@@ -1544,7 +3617,10 @@
             </a:endParaRPr>
           </a:p>
           <a:p>
-            <a:pPr marL="2743200" lvl="6" algn="l" defTabSz="457200">
+            <a:pPr marL="2743200" lvl="6" indent="-216000" algn="l" defTabSz="457200">
+              <a:lnSpc>
+                <a:spcPct val="100000"/>
+              </a:lnSpc>
               <a:spcBef>
                 <a:spcPts val="283"/>
               </a:spcBef>
@@ -1582,7 +3658,7 @@
       </p:sp>
       <p:sp>
         <p:nvSpPr>
-          <p:cNvPr id="57" name="PlaceHolder 3"/>
+          <p:cNvPr id="15" name="PlaceHolder 3"/>
           <p:cNvSpPr>
             <a:spLocks noGrp="1"/>
           </p:cNvSpPr>
@@ -1593,7 +3669,7 @@
         <p:spPr>
           <a:xfrm>
             <a:off x="1792440" y="5367240"/>
-            <a:ext cx="5486040" cy="804600"/>
+            <a:ext cx="5485680" cy="804240"/>
           </a:xfrm>
           <a:prstGeom prst="rect">
             <a:avLst/>
@@ -1666,18 +3742,18 @@
       </p:sp>
       <p:sp>
         <p:nvSpPr>
-          <p:cNvPr id="58" name="PlaceHolder 4"/>
+          <p:cNvPr id="16" name="PlaceHolder 4"/>
           <p:cNvSpPr>
             <a:spLocks noGrp="1"/>
           </p:cNvSpPr>
           <p:nvPr>
-            <p:ph type="dt" idx="31"/>
+            <p:ph type="dt" idx="7"/>
           </p:nvPr>
         </p:nvSpPr>
         <p:spPr>
           <a:xfrm>
             <a:off x="457200" y="6356520"/>
-            <a:ext cx="2133360" cy="364680"/>
+            <a:ext cx="2133000" cy="364320"/>
           </a:xfrm>
           <a:prstGeom prst="rect">
             <a:avLst/>
@@ -1697,6 +3773,9 @@
                 <a:spcPct val="100000"/>
               </a:lnSpc>
               <a:buNone/>
+              <a:tabLst>
+                <a:tab pos="0" algn="l"/>
+              </a:tabLst>
               <a:defRPr lang="en-US" sz="1200" b="0" u="none" strike="noStrike">
                 <a:solidFill>
                   <a:schemeClr val="dk1">
@@ -1715,6 +3794,9 @@
                 <a:spcPct val="100000"/>
               </a:lnSpc>
               <a:buNone/>
+              <a:tabLst>
+                <a:tab pos="0" algn="l"/>
+              </a:tabLst>
             </a:pPr>
             <a:r>
               <a:rPr lang="en-US" sz="1200" b="0" u="none" strike="noStrike">
@@ -1742,18 +3824,18 @@
       </p:sp>
       <p:sp>
         <p:nvSpPr>
-          <p:cNvPr id="59" name="PlaceHolder 5"/>
+          <p:cNvPr id="17" name="PlaceHolder 5"/>
           <p:cNvSpPr>
             <a:spLocks noGrp="1"/>
           </p:cNvSpPr>
           <p:nvPr>
-            <p:ph type="ftr" idx="32"/>
+            <p:ph type="ftr" idx="8"/>
           </p:nvPr>
         </p:nvSpPr>
         <p:spPr>
           <a:xfrm>
             <a:off x="3124080" y="6356520"/>
-            <a:ext cx="2895120" cy="364680"/>
+            <a:ext cx="2894760" cy="364320"/>
           </a:xfrm>
           <a:prstGeom prst="rect">
             <a:avLst/>
@@ -1769,7 +3851,13 @@
           </a:bodyPr>
           <a:lstStyle>
             <a:lvl1pPr indent="0" algn="ctr">
+              <a:lnSpc>
+                <a:spcPct val="100000"/>
+              </a:lnSpc>
               <a:buNone/>
+              <a:tabLst>
+                <a:tab pos="0" algn="l"/>
+              </a:tabLst>
               <a:defRPr lang="en-US" sz="1400" b="0" u="none" strike="noStrike">
                 <a:solidFill>
                   <a:srgbClr val="000000"/>
@@ -1782,7 +3870,13 @@
           </a:lstStyle>
           <a:p>
             <a:pPr indent="0" algn="ctr">
+              <a:lnSpc>
+                <a:spcPct val="100000"/>
+              </a:lnSpc>
               <a:buNone/>
+              <a:tabLst>
+                <a:tab pos="0" algn="l"/>
+              </a:tabLst>
             </a:pPr>
             <a:r>
               <a:rPr lang="en-US" sz="1400" b="0" u="none" strike="noStrike">
@@ -1808,18 +3902,18 @@
       </p:sp>
       <p:sp>
         <p:nvSpPr>
-          <p:cNvPr id="60" name="PlaceHolder 6"/>
+          <p:cNvPr id="18" name="PlaceHolder 6"/>
           <p:cNvSpPr>
             <a:spLocks noGrp="1"/>
           </p:cNvSpPr>
           <p:nvPr>
-            <p:ph type="sldNum" idx="33"/>
+            <p:ph type="sldNum" idx="9"/>
           </p:nvPr>
         </p:nvSpPr>
         <p:spPr>
           <a:xfrm>
             <a:off x="6553080" y="6356520"/>
-            <a:ext cx="2133360" cy="364680"/>
+            <a:ext cx="2133000" cy="364320"/>
           </a:xfrm>
           <a:prstGeom prst="rect">
             <a:avLst/>
@@ -1839,6 +3933,9 @@
                 <a:spcPct val="100000"/>
               </a:lnSpc>
               <a:buNone/>
+              <a:tabLst>
+                <a:tab pos="0" algn="l"/>
+              </a:tabLst>
               <a:defRPr lang="en-US" sz="1200" b="0" u="none" strike="noStrike">
                 <a:solidFill>
                   <a:schemeClr val="dk1">
@@ -1857,8 +3954,11 @@
                 <a:spcPct val="100000"/>
               </a:lnSpc>
               <a:buNone/>
-            </a:pPr>
-            <a:fld id="{9016B51C-A4F7-449B-84BE-D1E5A24516CD}" type="slidenum">
+              <a:tabLst>
+                <a:tab pos="0" algn="l"/>
+              </a:tabLst>
+            </a:pPr>
+            <a:fld id="{D0A3E309-C5D6-4EE0-832B-5EFDB862C2D1}" type="slidenum">
               <a:rPr lang="en-US" sz="1200" b="0" u="none" strike="noStrike">
                 <a:solidFill>
                   <a:schemeClr val="dk1">
@@ -1887,7 +3987,356 @@
 </p:sldLayout>
 </file>
 
-<file path=ppt/slideLayouts/slideLayout2.xml><?xml version="1.0" encoding="utf-8"?>
+<file path=ppt/slideLayouts/slideLayout4.xml><?xml version="1.0" encoding="utf-8"?>
+<p:sldLayout xmlns:a="http://schemas.openxmlformats.org/drawingml/2006/main" xmlns:p="http://schemas.openxmlformats.org/presentationml/2006/main" xmlns:r="http://schemas.openxmlformats.org/officeDocument/2006/relationships" xmlns:p14="http://schemas.microsoft.com/office/powerpoint/2010/main" xmlns:p15="http://schemas.microsoft.com/office/powerpoint/2012/main" xmlns:mc="http://schemas.openxmlformats.org/markup-compatibility/2006" type="title" preserve="1">
+  <p:cSld name="Title Slide">
+    <p:bg>
+      <p:bgPr>
+        <a:solidFill>
+          <a:srgbClr val="FFFFFF"/>
+        </a:solidFill>
+      </p:bgPr>
+    </p:bg>
+    <p:spTree>
+      <p:nvGrpSpPr>
+        <p:cNvPr id="1" name=""/>
+        <p:cNvGrpSpPr/>
+        <p:nvPr/>
+      </p:nvGrpSpPr>
+      <p:grpSpPr>
+        <a:xfrm>
+          <a:off x="0" y="0"/>
+          <a:ext cx="0" cy="0"/>
+          <a:chOff x="0" y="0"/>
+          <a:chExt cx="0" cy="0"/>
+        </a:xfrm>
+      </p:grpSpPr>
+      <p:sp>
+        <p:nvSpPr>
+          <p:cNvPr id="19" name="PlaceHolder 1"/>
+          <p:cNvSpPr>
+            <a:spLocks noGrp="1"/>
+          </p:cNvSpPr>
+          <p:nvPr>
+            <p:ph type="title"/>
+          </p:nvPr>
+        </p:nvSpPr>
+        <p:spPr>
+          <a:xfrm>
+            <a:off x="685800" y="2130480"/>
+            <a:ext cx="7771680" cy="1469160"/>
+          </a:xfrm>
+          <a:prstGeom prst="rect">
+            <a:avLst/>
+          </a:prstGeom>
+          <a:noFill/>
+          <a:ln w="0">
+            <a:noFill/>
+          </a:ln>
+        </p:spPr>
+        <p:txBody>
+          <a:bodyPr lIns="91440" tIns="45720" rIns="91440" bIns="45720" anchor="ctr">
+            <a:noAutofit/>
+          </a:bodyPr>
+          <a:lstStyle>
+            <a:lvl1pPr indent="0" algn="ctr" defTabSz="457200">
+              <a:lnSpc>
+                <a:spcPct val="100000"/>
+              </a:lnSpc>
+              <a:buNone/>
+              <a:tabLst>
+                <a:tab pos="0" algn="l"/>
+              </a:tabLst>
+              <a:defRPr lang="en-US" sz="4400" b="0" u="none" strike="noStrike">
+                <a:solidFill>
+                  <a:schemeClr val="dk1"/>
+                </a:solidFill>
+                <a:effectLst/>
+                <a:uFillTx/>
+                <a:latin typeface="Calibri"/>
+              </a:defRPr>
+            </a:lvl1pPr>
+          </a:lstStyle>
+          <a:p>
+            <a:pPr indent="0" algn="ctr" defTabSz="457200">
+              <a:lnSpc>
+                <a:spcPct val="100000"/>
+              </a:lnSpc>
+              <a:buNone/>
+              <a:tabLst>
+                <a:tab pos="0" algn="l"/>
+              </a:tabLst>
+            </a:pPr>
+            <a:r>
+              <a:rPr lang="en-US" sz="4400" b="0" u="none" strike="noStrike">
+                <a:solidFill>
+                  <a:schemeClr val="dk1"/>
+                </a:solidFill>
+                <a:effectLst/>
+                <a:uFillTx/>
+                <a:latin typeface="Calibri"/>
+              </a:rPr>
+              <a:t>Click to edit Master title style</a:t>
+            </a:r>
+            <a:endParaRPr lang="en-US" sz="4400" b="0" u="none" strike="noStrike">
+              <a:solidFill>
+                <a:schemeClr val="dk1"/>
+              </a:solidFill>
+              <a:effectLst/>
+              <a:uFillTx/>
+              <a:latin typeface="Calibri"/>
+            </a:endParaRPr>
+          </a:p>
+        </p:txBody>
+      </p:sp>
+      <p:sp>
+        <p:nvSpPr>
+          <p:cNvPr id="20" name="PlaceHolder 2"/>
+          <p:cNvSpPr>
+            <a:spLocks noGrp="1"/>
+          </p:cNvSpPr>
+          <p:nvPr>
+            <p:ph type="dt" idx="10"/>
+          </p:nvPr>
+        </p:nvSpPr>
+        <p:spPr>
+          <a:xfrm>
+            <a:off x="457200" y="6356520"/>
+            <a:ext cx="2133000" cy="364320"/>
+          </a:xfrm>
+          <a:prstGeom prst="rect">
+            <a:avLst/>
+          </a:prstGeom>
+          <a:noFill/>
+          <a:ln w="0">
+            <a:noFill/>
+          </a:ln>
+        </p:spPr>
+        <p:txBody>
+          <a:bodyPr lIns="91440" tIns="45720" rIns="91440" bIns="45720" anchor="ctr">
+            <a:noAutofit/>
+          </a:bodyPr>
+          <a:lstStyle>
+            <a:lvl1pPr indent="0" algn="l" defTabSz="457200">
+              <a:lnSpc>
+                <a:spcPct val="100000"/>
+              </a:lnSpc>
+              <a:buNone/>
+              <a:tabLst>
+                <a:tab pos="0" algn="l"/>
+              </a:tabLst>
+              <a:defRPr lang="en-US" sz="1200" b="0" u="none" strike="noStrike">
+                <a:solidFill>
+                  <a:schemeClr val="dk1">
+                    <a:tint val="75000"/>
+                  </a:schemeClr>
+                </a:solidFill>
+                <a:effectLst/>
+                <a:uFillTx/>
+                <a:latin typeface="Calibri"/>
+              </a:defRPr>
+            </a:lvl1pPr>
+          </a:lstStyle>
+          <a:p>
+            <a:pPr indent="0" algn="l" defTabSz="457200">
+              <a:lnSpc>
+                <a:spcPct val="100000"/>
+              </a:lnSpc>
+              <a:buNone/>
+              <a:tabLst>
+                <a:tab pos="0" algn="l"/>
+              </a:tabLst>
+            </a:pPr>
+            <a:r>
+              <a:rPr lang="en-US" sz="1200" b="0" u="none" strike="noStrike">
+                <a:solidFill>
+                  <a:schemeClr val="dk1">
+                    <a:tint val="75000"/>
+                  </a:schemeClr>
+                </a:solidFill>
+                <a:effectLst/>
+                <a:uFillTx/>
+                <a:latin typeface="Calibri"/>
+              </a:rPr>
+              <a:t>&lt;date/time&gt;</a:t>
+            </a:r>
+            <a:endParaRPr lang="en-US" sz="1200" b="0" u="none" strike="noStrike">
+              <a:solidFill>
+                <a:srgbClr val="000000"/>
+              </a:solidFill>
+              <a:effectLst/>
+              <a:uFillTx/>
+              <a:latin typeface="Times New Roman"/>
+            </a:endParaRPr>
+          </a:p>
+        </p:txBody>
+      </p:sp>
+      <p:sp>
+        <p:nvSpPr>
+          <p:cNvPr id="21" name="PlaceHolder 3"/>
+          <p:cNvSpPr>
+            <a:spLocks noGrp="1"/>
+          </p:cNvSpPr>
+          <p:nvPr>
+            <p:ph type="ftr" idx="11"/>
+          </p:nvPr>
+        </p:nvSpPr>
+        <p:spPr>
+          <a:xfrm>
+            <a:off x="3124080" y="6356520"/>
+            <a:ext cx="2894760" cy="364320"/>
+          </a:xfrm>
+          <a:prstGeom prst="rect">
+            <a:avLst/>
+          </a:prstGeom>
+          <a:noFill/>
+          <a:ln w="0">
+            <a:noFill/>
+          </a:ln>
+        </p:spPr>
+        <p:txBody>
+          <a:bodyPr lIns="91440" tIns="45720" rIns="91440" bIns="45720" anchor="ctr">
+            <a:noAutofit/>
+          </a:bodyPr>
+          <a:lstStyle>
+            <a:lvl1pPr indent="0" algn="ctr">
+              <a:lnSpc>
+                <a:spcPct val="100000"/>
+              </a:lnSpc>
+              <a:buNone/>
+              <a:tabLst>
+                <a:tab pos="0" algn="l"/>
+              </a:tabLst>
+              <a:defRPr lang="en-US" sz="1400" b="0" u="none" strike="noStrike">
+                <a:solidFill>
+                  <a:srgbClr val="000000"/>
+                </a:solidFill>
+                <a:effectLst/>
+                <a:uFillTx/>
+                <a:latin typeface="Times New Roman"/>
+              </a:defRPr>
+            </a:lvl1pPr>
+          </a:lstStyle>
+          <a:p>
+            <a:pPr indent="0" algn="ctr">
+              <a:lnSpc>
+                <a:spcPct val="100000"/>
+              </a:lnSpc>
+              <a:buNone/>
+              <a:tabLst>
+                <a:tab pos="0" algn="l"/>
+              </a:tabLst>
+            </a:pPr>
+            <a:r>
+              <a:rPr lang="en-US" sz="1400" b="0" u="none" strike="noStrike">
+                <a:solidFill>
+                  <a:srgbClr val="000000"/>
+                </a:solidFill>
+                <a:effectLst/>
+                <a:uFillTx/>
+                <a:latin typeface="Times New Roman"/>
+              </a:rPr>
+              <a:t>&lt;footer&gt;</a:t>
+            </a:r>
+            <a:endParaRPr lang="en-US" sz="1400" b="0" u="none" strike="noStrike">
+              <a:solidFill>
+                <a:srgbClr val="000000"/>
+              </a:solidFill>
+              <a:effectLst/>
+              <a:uFillTx/>
+              <a:latin typeface="Times New Roman"/>
+            </a:endParaRPr>
+          </a:p>
+        </p:txBody>
+      </p:sp>
+      <p:sp>
+        <p:nvSpPr>
+          <p:cNvPr id="22" name="PlaceHolder 4"/>
+          <p:cNvSpPr>
+            <a:spLocks noGrp="1"/>
+          </p:cNvSpPr>
+          <p:nvPr>
+            <p:ph type="sldNum" idx="12"/>
+          </p:nvPr>
+        </p:nvSpPr>
+        <p:spPr>
+          <a:xfrm>
+            <a:off x="6553080" y="6356520"/>
+            <a:ext cx="2133000" cy="364320"/>
+          </a:xfrm>
+          <a:prstGeom prst="rect">
+            <a:avLst/>
+          </a:prstGeom>
+          <a:noFill/>
+          <a:ln w="0">
+            <a:noFill/>
+          </a:ln>
+        </p:spPr>
+        <p:txBody>
+          <a:bodyPr lIns="91440" tIns="45720" rIns="91440" bIns="45720" anchor="ctr">
+            <a:noAutofit/>
+          </a:bodyPr>
+          <a:lstStyle>
+            <a:lvl1pPr indent="0" algn="r" defTabSz="457200">
+              <a:lnSpc>
+                <a:spcPct val="100000"/>
+              </a:lnSpc>
+              <a:buNone/>
+              <a:tabLst>
+                <a:tab pos="0" algn="l"/>
+              </a:tabLst>
+              <a:defRPr lang="en-US" sz="1200" b="0" u="none" strike="noStrike">
+                <a:solidFill>
+                  <a:schemeClr val="dk1">
+                    <a:tint val="75000"/>
+                  </a:schemeClr>
+                </a:solidFill>
+                <a:effectLst/>
+                <a:uFillTx/>
+                <a:latin typeface="Calibri"/>
+              </a:defRPr>
+            </a:lvl1pPr>
+          </a:lstStyle>
+          <a:p>
+            <a:pPr indent="0" algn="r" defTabSz="457200">
+              <a:lnSpc>
+                <a:spcPct val="100000"/>
+              </a:lnSpc>
+              <a:buNone/>
+              <a:tabLst>
+                <a:tab pos="0" algn="l"/>
+              </a:tabLst>
+            </a:pPr>
+            <a:fld id="{A4AC5594-ABD2-4241-A502-EBE365334DBB}" type="slidenum">
+              <a:rPr lang="en-US" sz="1200" b="0" u="none" strike="noStrike">
+                <a:solidFill>
+                  <a:schemeClr val="dk1">
+                    <a:tint val="75000"/>
+                  </a:schemeClr>
+                </a:solidFill>
+                <a:effectLst/>
+                <a:uFillTx/>
+                <a:latin typeface="Calibri"/>
+              </a:rPr>
+              <a:t>&lt;number&gt;</a:t>
+            </a:fld>
+            <a:endParaRPr lang="en-US" sz="1200" b="0" u="none" strike="noStrike">
+              <a:solidFill>
+                <a:srgbClr val="000000"/>
+              </a:solidFill>
+              <a:effectLst/>
+              <a:uFillTx/>
+              <a:latin typeface="Times New Roman"/>
+            </a:endParaRPr>
+          </a:p>
+        </p:txBody>
+      </p:sp>
+    </p:spTree>
+  </p:cSld>
+</p:sldLayout>
+</file>
+
+<file path=ppt/slideLayouts/slideLayout5.xml><?xml version="1.0" encoding="utf-8"?>
 <p:sldLayout xmlns:a="http://schemas.openxmlformats.org/drawingml/2006/main" xmlns:p="http://schemas.openxmlformats.org/presentationml/2006/main" xmlns:r="http://schemas.openxmlformats.org/officeDocument/2006/relationships" xmlns:p14="http://schemas.microsoft.com/office/powerpoint/2010/main" xmlns:p15="http://schemas.microsoft.com/office/powerpoint/2012/main" xmlns:mc="http://schemas.openxmlformats.org/markup-compatibility/2006" type="vertTx" preserve="1">
   <p:cSld name="Title and Vertical Text">
     <p:bg>
@@ -1913,7 +4362,7 @@
       </p:grpSpPr>
       <p:sp>
         <p:nvSpPr>
-          <p:cNvPr id="6" name="PlaceHolder 1"/>
+          <p:cNvPr id="23" name="PlaceHolder 1"/>
           <p:cNvSpPr>
             <a:spLocks noGrp="1"/>
           </p:cNvSpPr>
@@ -1924,7 +4373,7 @@
         <p:spPr>
           <a:xfrm>
             <a:off x="457200" y="274680"/>
-            <a:ext cx="8229240" cy="1142640"/>
+            <a:ext cx="8228880" cy="1142280"/>
           </a:xfrm>
           <a:prstGeom prst="rect">
             <a:avLst/>
@@ -1944,6 +4393,9 @@
                 <a:spcPct val="100000"/>
               </a:lnSpc>
               <a:buNone/>
+              <a:tabLst>
+                <a:tab pos="0" algn="l"/>
+              </a:tabLst>
               <a:defRPr lang="en-US" sz="4400" b="0" u="none" strike="noStrike">
                 <a:solidFill>
                   <a:schemeClr val="dk1"/>
@@ -1960,6 +4412,9 @@
                 <a:spcPct val="100000"/>
               </a:lnSpc>
               <a:buNone/>
+              <a:tabLst>
+                <a:tab pos="0" algn="l"/>
+              </a:tabLst>
             </a:pPr>
             <a:r>
               <a:rPr lang="en-US" sz="4400" b="0" u="none" strike="noStrike">
@@ -1985,7 +4440,7 @@
       </p:sp>
       <p:sp>
         <p:nvSpPr>
-          <p:cNvPr id="7" name="PlaceHolder 2"/>
+          <p:cNvPr id="24" name="PlaceHolder 2"/>
           <p:cNvSpPr>
             <a:spLocks noGrp="1"/>
           </p:cNvSpPr>
@@ -1996,7 +4451,7 @@
         <p:spPr>
           <a:xfrm>
             <a:off x="457200" y="1600200"/>
-            <a:ext cx="8229240" cy="4525560"/>
+            <a:ext cx="8228880" cy="4525200"/>
           </a:xfrm>
           <a:prstGeom prst="rect">
             <a:avLst/>
@@ -2291,18 +4746,18 @@
       </p:sp>
       <p:sp>
         <p:nvSpPr>
-          <p:cNvPr id="8" name="PlaceHolder 3"/>
+          <p:cNvPr id="25" name="PlaceHolder 3"/>
           <p:cNvSpPr>
             <a:spLocks noGrp="1"/>
           </p:cNvSpPr>
           <p:nvPr>
-            <p:ph type="dt" idx="4"/>
+            <p:ph type="dt" idx="13"/>
           </p:nvPr>
         </p:nvSpPr>
         <p:spPr>
           <a:xfrm>
             <a:off x="457200" y="6356520"/>
-            <a:ext cx="2133360" cy="364680"/>
+            <a:ext cx="2133000" cy="364320"/>
           </a:xfrm>
           <a:prstGeom prst="rect">
             <a:avLst/>
@@ -2322,6 +4777,9 @@
                 <a:spcPct val="100000"/>
               </a:lnSpc>
               <a:buNone/>
+              <a:tabLst>
+                <a:tab pos="0" algn="l"/>
+              </a:tabLst>
               <a:defRPr lang="en-US" sz="1200" b="0" u="none" strike="noStrike">
                 <a:solidFill>
                   <a:schemeClr val="dk1">
@@ -2340,6 +4798,9 @@
                 <a:spcPct val="100000"/>
               </a:lnSpc>
               <a:buNone/>
+              <a:tabLst>
+                <a:tab pos="0" algn="l"/>
+              </a:tabLst>
             </a:pPr>
             <a:r>
               <a:rPr lang="en-US" sz="1200" b="0" u="none" strike="noStrike">
@@ -2367,18 +4828,18 @@
       </p:sp>
       <p:sp>
         <p:nvSpPr>
-          <p:cNvPr id="9" name="PlaceHolder 4"/>
+          <p:cNvPr id="26" name="PlaceHolder 4"/>
           <p:cNvSpPr>
             <a:spLocks noGrp="1"/>
           </p:cNvSpPr>
           <p:nvPr>
-            <p:ph type="ftr" idx="5"/>
+            <p:ph type="ftr" idx="14"/>
           </p:nvPr>
         </p:nvSpPr>
         <p:spPr>
           <a:xfrm>
             <a:off x="3124080" y="6356520"/>
-            <a:ext cx="2895120" cy="364680"/>
+            <a:ext cx="2894760" cy="364320"/>
           </a:xfrm>
           <a:prstGeom prst="rect">
             <a:avLst/>
@@ -2394,7 +4855,13 @@
           </a:bodyPr>
           <a:lstStyle>
             <a:lvl1pPr indent="0" algn="ctr">
+              <a:lnSpc>
+                <a:spcPct val="100000"/>
+              </a:lnSpc>
               <a:buNone/>
+              <a:tabLst>
+                <a:tab pos="0" algn="l"/>
+              </a:tabLst>
               <a:defRPr lang="en-US" sz="1400" b="0" u="none" strike="noStrike">
                 <a:solidFill>
                   <a:srgbClr val="000000"/>
@@ -2407,7 +4874,13 @@
           </a:lstStyle>
           <a:p>
             <a:pPr indent="0" algn="ctr">
+              <a:lnSpc>
+                <a:spcPct val="100000"/>
+              </a:lnSpc>
               <a:buNone/>
+              <a:tabLst>
+                <a:tab pos="0" algn="l"/>
+              </a:tabLst>
             </a:pPr>
             <a:r>
               <a:rPr lang="en-US" sz="1400" b="0" u="none" strike="noStrike">
@@ -2433,18 +4906,18 @@
       </p:sp>
       <p:sp>
         <p:nvSpPr>
-          <p:cNvPr id="10" name="PlaceHolder 5"/>
+          <p:cNvPr id="27" name="PlaceHolder 5"/>
           <p:cNvSpPr>
             <a:spLocks noGrp="1"/>
           </p:cNvSpPr>
           <p:nvPr>
-            <p:ph type="sldNum" idx="6"/>
+            <p:ph type="sldNum" idx="15"/>
           </p:nvPr>
         </p:nvSpPr>
         <p:spPr>
           <a:xfrm>
             <a:off x="6553080" y="6356520"/>
-            <a:ext cx="2133360" cy="364680"/>
+            <a:ext cx="2133000" cy="364320"/>
           </a:xfrm>
           <a:prstGeom prst="rect">
             <a:avLst/>
@@ -2464,6 +4937,9 @@
                 <a:spcPct val="100000"/>
               </a:lnSpc>
               <a:buNone/>
+              <a:tabLst>
+                <a:tab pos="0" algn="l"/>
+              </a:tabLst>
               <a:defRPr lang="en-US" sz="1200" b="0" u="none" strike="noStrike">
                 <a:solidFill>
                   <a:schemeClr val="dk1">
@@ -2482,8 +4958,11 @@
                 <a:spcPct val="100000"/>
               </a:lnSpc>
               <a:buNone/>
-            </a:pPr>
-            <a:fld id="{CF087380-459F-43CF-9D60-C7EDC68DF6B3}" type="slidenum">
+              <a:tabLst>
+                <a:tab pos="0" algn="l"/>
+              </a:tabLst>
+            </a:pPr>
+            <a:fld id="{E5CA70BC-2920-433E-AF43-FCD7FF72106F}" type="slidenum">
               <a:rPr lang="en-US" sz="1200" b="0" u="none" strike="noStrike">
                 <a:solidFill>
                   <a:schemeClr val="dk1">
@@ -2512,7 +4991,7 @@
 </p:sldLayout>
 </file>
 
-<file path=ppt/slideLayouts/slideLayout3.xml><?xml version="1.0" encoding="utf-8"?>
+<file path=ppt/slideLayouts/slideLayout6.xml><?xml version="1.0" encoding="utf-8"?>
 <p:sldLayout xmlns:a="http://schemas.openxmlformats.org/drawingml/2006/main" xmlns:p="http://schemas.openxmlformats.org/presentationml/2006/main" xmlns:r="http://schemas.openxmlformats.org/officeDocument/2006/relationships" xmlns:p14="http://schemas.microsoft.com/office/powerpoint/2010/main" xmlns:p15="http://schemas.microsoft.com/office/powerpoint/2012/main" xmlns:mc="http://schemas.openxmlformats.org/markup-compatibility/2006" type="vertTitleAndTx" preserve="1">
   <p:cSld name="Vertical Title and Text">
     <p:bg>
@@ -2538,7 +5017,7 @@
       </p:grpSpPr>
       <p:sp>
         <p:nvSpPr>
-          <p:cNvPr id="11" name="PlaceHolder 1"/>
+          <p:cNvPr id="28" name="PlaceHolder 1"/>
           <p:cNvSpPr>
             <a:spLocks noGrp="1"/>
           </p:cNvSpPr>
@@ -2549,7 +5028,7 @@
         <p:spPr>
           <a:xfrm>
             <a:off x="6629400" y="274680"/>
-            <a:ext cx="2057040" cy="5851080"/>
+            <a:ext cx="2056680" cy="5850720"/>
           </a:xfrm>
           <a:prstGeom prst="rect">
             <a:avLst/>
@@ -2569,6 +5048,9 @@
                 <a:spcPct val="100000"/>
               </a:lnSpc>
               <a:buNone/>
+              <a:tabLst>
+                <a:tab pos="0" algn="l"/>
+              </a:tabLst>
               <a:defRPr lang="en-US" sz="4400" b="0" u="none" strike="noStrike">
                 <a:solidFill>
                   <a:schemeClr val="dk1"/>
@@ -2585,6 +5067,9 @@
                 <a:spcPct val="100000"/>
               </a:lnSpc>
               <a:buNone/>
+              <a:tabLst>
+                <a:tab pos="0" algn="l"/>
+              </a:tabLst>
             </a:pPr>
             <a:r>
               <a:rPr lang="en-US" sz="4400" b="0" u="none" strike="noStrike">
@@ -2610,7 +5095,7 @@
       </p:sp>
       <p:sp>
         <p:nvSpPr>
-          <p:cNvPr id="12" name="PlaceHolder 2"/>
+          <p:cNvPr id="29" name="PlaceHolder 2"/>
           <p:cNvSpPr>
             <a:spLocks noGrp="1"/>
           </p:cNvSpPr>
@@ -2621,7 +5106,7 @@
         <p:spPr>
           <a:xfrm>
             <a:off x="457200" y="274680"/>
-            <a:ext cx="6019560" cy="5851080"/>
+            <a:ext cx="6019200" cy="5850720"/>
           </a:xfrm>
           <a:prstGeom prst="rect">
             <a:avLst/>
@@ -2916,18 +5401,18 @@
       </p:sp>
       <p:sp>
         <p:nvSpPr>
-          <p:cNvPr id="13" name="PlaceHolder 3"/>
+          <p:cNvPr id="30" name="PlaceHolder 3"/>
           <p:cNvSpPr>
             <a:spLocks noGrp="1"/>
           </p:cNvSpPr>
           <p:nvPr>
-            <p:ph type="dt" idx="7"/>
+            <p:ph type="dt" idx="16"/>
           </p:nvPr>
         </p:nvSpPr>
         <p:spPr>
           <a:xfrm>
             <a:off x="457200" y="6356520"/>
-            <a:ext cx="2133360" cy="364680"/>
+            <a:ext cx="2133000" cy="364320"/>
           </a:xfrm>
           <a:prstGeom prst="rect">
             <a:avLst/>
@@ -2947,6 +5432,9 @@
                 <a:spcPct val="100000"/>
               </a:lnSpc>
               <a:buNone/>
+              <a:tabLst>
+                <a:tab pos="0" algn="l"/>
+              </a:tabLst>
               <a:defRPr lang="en-US" sz="1200" b="0" u="none" strike="noStrike">
                 <a:solidFill>
                   <a:schemeClr val="dk1">
@@ -2965,6 +5453,9 @@
                 <a:spcPct val="100000"/>
               </a:lnSpc>
               <a:buNone/>
+              <a:tabLst>
+                <a:tab pos="0" algn="l"/>
+              </a:tabLst>
             </a:pPr>
             <a:r>
               <a:rPr lang="en-US" sz="1200" b="0" u="none" strike="noStrike">
@@ -2992,18 +5483,18 @@
       </p:sp>
       <p:sp>
         <p:nvSpPr>
-          <p:cNvPr id="14" name="PlaceHolder 4"/>
+          <p:cNvPr id="31" name="PlaceHolder 4"/>
           <p:cNvSpPr>
             <a:spLocks noGrp="1"/>
           </p:cNvSpPr>
           <p:nvPr>
-            <p:ph type="ftr" idx="8"/>
+            <p:ph type="ftr" idx="17"/>
           </p:nvPr>
         </p:nvSpPr>
         <p:spPr>
           <a:xfrm>
             <a:off x="3124080" y="6356520"/>
-            <a:ext cx="2895120" cy="364680"/>
+            <a:ext cx="2894760" cy="364320"/>
           </a:xfrm>
           <a:prstGeom prst="rect">
             <a:avLst/>
@@ -3019,7 +5510,13 @@
           </a:bodyPr>
           <a:lstStyle>
             <a:lvl1pPr indent="0" algn="ctr">
+              <a:lnSpc>
+                <a:spcPct val="100000"/>
+              </a:lnSpc>
               <a:buNone/>
+              <a:tabLst>
+                <a:tab pos="0" algn="l"/>
+              </a:tabLst>
               <a:defRPr lang="en-US" sz="1400" b="0" u="none" strike="noStrike">
                 <a:solidFill>
                   <a:srgbClr val="000000"/>
@@ -3032,7 +5529,13 @@
           </a:lstStyle>
           <a:p>
             <a:pPr indent="0" algn="ctr">
+              <a:lnSpc>
+                <a:spcPct val="100000"/>
+              </a:lnSpc>
               <a:buNone/>
+              <a:tabLst>
+                <a:tab pos="0" algn="l"/>
+              </a:tabLst>
             </a:pPr>
             <a:r>
               <a:rPr lang="en-US" sz="1400" b="0" u="none" strike="noStrike">
@@ -3058,18 +5561,18 @@
       </p:sp>
       <p:sp>
         <p:nvSpPr>
-          <p:cNvPr id="15" name="PlaceHolder 5"/>
+          <p:cNvPr id="32" name="PlaceHolder 5"/>
           <p:cNvSpPr>
             <a:spLocks noGrp="1"/>
           </p:cNvSpPr>
           <p:nvPr>
-            <p:ph type="sldNum" idx="9"/>
+            <p:ph type="sldNum" idx="18"/>
           </p:nvPr>
         </p:nvSpPr>
         <p:spPr>
           <a:xfrm>
             <a:off x="6553080" y="6356520"/>
-            <a:ext cx="2133360" cy="364680"/>
+            <a:ext cx="2133000" cy="364320"/>
           </a:xfrm>
           <a:prstGeom prst="rect">
             <a:avLst/>
@@ -3089,6 +5592,9 @@
                 <a:spcPct val="100000"/>
               </a:lnSpc>
               <a:buNone/>
+              <a:tabLst>
+                <a:tab pos="0" algn="l"/>
+              </a:tabLst>
               <a:defRPr lang="en-US" sz="1200" b="0" u="none" strike="noStrike">
                 <a:solidFill>
                   <a:schemeClr val="dk1">
@@ -3107,8 +5613,11 @@
                 <a:spcPct val="100000"/>
               </a:lnSpc>
               <a:buNone/>
-            </a:pPr>
-            <a:fld id="{F6B85238-9FCE-4001-ABCC-968A4AFB8FCB}" type="slidenum">
+              <a:tabLst>
+                <a:tab pos="0" algn="l"/>
+              </a:tabLst>
+            </a:pPr>
+            <a:fld id="{D95247D6-622B-4095-8B03-94BF7DE59F55}" type="slidenum">
               <a:rPr lang="en-US" sz="1200" b="0" u="none" strike="noStrike">
                 <a:solidFill>
                   <a:schemeClr val="dk1">
@@ -3137,7 +5646,7 @@
 </p:sldLayout>
 </file>
 
-<file path=ppt/slideLayouts/slideLayout4.xml><?xml version="1.0" encoding="utf-8"?>
+<file path=ppt/slideLayouts/slideLayout7.xml><?xml version="1.0" encoding="utf-8"?>
 <p:sldLayout xmlns:a="http://schemas.openxmlformats.org/drawingml/2006/main" xmlns:p="http://schemas.openxmlformats.org/presentationml/2006/main" xmlns:r="http://schemas.openxmlformats.org/officeDocument/2006/relationships" xmlns:p14="http://schemas.microsoft.com/office/powerpoint/2010/main" xmlns:p15="http://schemas.microsoft.com/office/powerpoint/2012/main" xmlns:mc="http://schemas.openxmlformats.org/markup-compatibility/2006" type="obj" preserve="1">
   <p:cSld name="Title and Content">
     <p:bg>
@@ -3163,7 +5672,7 @@
       </p:grpSpPr>
       <p:sp>
         <p:nvSpPr>
-          <p:cNvPr id="16" name="PlaceHolder 1"/>
+          <p:cNvPr id="33" name="PlaceHolder 1"/>
           <p:cNvSpPr>
             <a:spLocks noGrp="1"/>
           </p:cNvSpPr>
@@ -3174,7 +5683,7 @@
         <p:spPr>
           <a:xfrm>
             <a:off x="457200" y="274680"/>
-            <a:ext cx="8229240" cy="1142640"/>
+            <a:ext cx="8228880" cy="1142280"/>
           </a:xfrm>
           <a:prstGeom prst="rect">
             <a:avLst/>
@@ -3194,6 +5703,9 @@
                 <a:spcPct val="100000"/>
               </a:lnSpc>
               <a:buNone/>
+              <a:tabLst>
+                <a:tab pos="0" algn="l"/>
+              </a:tabLst>
               <a:defRPr lang="en-US" sz="4400" b="0" u="none" strike="noStrike">
                 <a:solidFill>
                   <a:schemeClr val="dk1"/>
@@ -3210,6 +5722,9 @@
                 <a:spcPct val="100000"/>
               </a:lnSpc>
               <a:buNone/>
+              <a:tabLst>
+                <a:tab pos="0" algn="l"/>
+              </a:tabLst>
             </a:pPr>
             <a:r>
               <a:rPr lang="en-US" sz="4400" b="0" u="none" strike="noStrike">
@@ -3235,7 +5750,7 @@
       </p:sp>
       <p:sp>
         <p:nvSpPr>
-          <p:cNvPr id="17" name="PlaceHolder 2"/>
+          <p:cNvPr id="34" name="PlaceHolder 2"/>
           <p:cNvSpPr>
             <a:spLocks noGrp="1"/>
           </p:cNvSpPr>
@@ -3246,7 +5761,7 @@
         <p:spPr>
           <a:xfrm>
             <a:off x="457200" y="1600200"/>
-            <a:ext cx="8229240" cy="4525560"/>
+            <a:ext cx="8228880" cy="4525200"/>
           </a:xfrm>
           <a:prstGeom prst="rect">
             <a:avLst/>
@@ -3541,18 +6056,18 @@
       </p:sp>
       <p:sp>
         <p:nvSpPr>
-          <p:cNvPr id="18" name="PlaceHolder 3"/>
+          <p:cNvPr id="35" name="PlaceHolder 3"/>
           <p:cNvSpPr>
             <a:spLocks noGrp="1"/>
           </p:cNvSpPr>
           <p:nvPr>
-            <p:ph type="dt" idx="10"/>
+            <p:ph type="dt" idx="19"/>
           </p:nvPr>
         </p:nvSpPr>
         <p:spPr>
           <a:xfrm>
             <a:off x="457200" y="6356520"/>
-            <a:ext cx="2133360" cy="364680"/>
+            <a:ext cx="2133000" cy="364320"/>
           </a:xfrm>
           <a:prstGeom prst="rect">
             <a:avLst/>
@@ -3572,6 +6087,9 @@
                 <a:spcPct val="100000"/>
               </a:lnSpc>
               <a:buNone/>
+              <a:tabLst>
+                <a:tab pos="0" algn="l"/>
+              </a:tabLst>
               <a:defRPr lang="en-US" sz="1200" b="0" u="none" strike="noStrike">
                 <a:solidFill>
                   <a:schemeClr val="dk1">
@@ -3590,6 +6108,9 @@
                 <a:spcPct val="100000"/>
               </a:lnSpc>
               <a:buNone/>
+              <a:tabLst>
+                <a:tab pos="0" algn="l"/>
+              </a:tabLst>
             </a:pPr>
             <a:r>
               <a:rPr lang="en-US" sz="1200" b="0" u="none" strike="noStrike">
@@ -3617,18 +6138,18 @@
       </p:sp>
       <p:sp>
         <p:nvSpPr>
-          <p:cNvPr id="19" name="PlaceHolder 4"/>
+          <p:cNvPr id="36" name="PlaceHolder 4"/>
           <p:cNvSpPr>
             <a:spLocks noGrp="1"/>
           </p:cNvSpPr>
           <p:nvPr>
-            <p:ph type="ftr" idx="11"/>
+            <p:ph type="ftr" idx="20"/>
           </p:nvPr>
         </p:nvSpPr>
         <p:spPr>
           <a:xfrm>
             <a:off x="3124080" y="6356520"/>
-            <a:ext cx="2895120" cy="364680"/>
+            <a:ext cx="2894760" cy="364320"/>
           </a:xfrm>
           <a:prstGeom prst="rect">
             <a:avLst/>
@@ -3644,7 +6165,13 @@
           </a:bodyPr>
           <a:lstStyle>
             <a:lvl1pPr indent="0" algn="ctr">
+              <a:lnSpc>
+                <a:spcPct val="100000"/>
+              </a:lnSpc>
               <a:buNone/>
+              <a:tabLst>
+                <a:tab pos="0" algn="l"/>
+              </a:tabLst>
               <a:defRPr lang="en-US" sz="1400" b="0" u="none" strike="noStrike">
                 <a:solidFill>
                   <a:srgbClr val="000000"/>
@@ -3657,7 +6184,13 @@
           </a:lstStyle>
           <a:p>
             <a:pPr indent="0" algn="ctr">
+              <a:lnSpc>
+                <a:spcPct val="100000"/>
+              </a:lnSpc>
               <a:buNone/>
+              <a:tabLst>
+                <a:tab pos="0" algn="l"/>
+              </a:tabLst>
             </a:pPr>
             <a:r>
               <a:rPr lang="en-US" sz="1400" b="0" u="none" strike="noStrike">
@@ -3683,18 +6216,18 @@
       </p:sp>
       <p:sp>
         <p:nvSpPr>
-          <p:cNvPr id="20" name="PlaceHolder 5"/>
+          <p:cNvPr id="37" name="PlaceHolder 5"/>
           <p:cNvSpPr>
             <a:spLocks noGrp="1"/>
           </p:cNvSpPr>
           <p:nvPr>
-            <p:ph type="sldNum" idx="12"/>
+            <p:ph type="sldNum" idx="21"/>
           </p:nvPr>
         </p:nvSpPr>
         <p:spPr>
           <a:xfrm>
             <a:off x="6553080" y="6356520"/>
-            <a:ext cx="2133360" cy="364680"/>
+            <a:ext cx="2133000" cy="364320"/>
           </a:xfrm>
           <a:prstGeom prst="rect">
             <a:avLst/>
@@ -3714,6 +6247,9 @@
                 <a:spcPct val="100000"/>
               </a:lnSpc>
               <a:buNone/>
+              <a:tabLst>
+                <a:tab pos="0" algn="l"/>
+              </a:tabLst>
               <a:defRPr lang="en-US" sz="1200" b="0" u="none" strike="noStrike">
                 <a:solidFill>
                   <a:schemeClr val="dk1">
@@ -3732,8 +6268,11 @@
                 <a:spcPct val="100000"/>
               </a:lnSpc>
               <a:buNone/>
-            </a:pPr>
-            <a:fld id="{0B02CF1A-F0FD-4D75-8C81-3E9CF1D00D7E}" type="slidenum">
+              <a:tabLst>
+                <a:tab pos="0" algn="l"/>
+              </a:tabLst>
+            </a:pPr>
+            <a:fld id="{E208D441-F236-4F75-A292-F3E1CB7214E1}" type="slidenum">
               <a:rPr lang="en-US" sz="1200" b="0" u="none" strike="noStrike">
                 <a:solidFill>
                   <a:schemeClr val="dk1">
@@ -3762,7 +6301,7 @@
 </p:sldLayout>
 </file>
 
-<file path=ppt/slideLayouts/slideLayout5.xml><?xml version="1.0" encoding="utf-8"?>
+<file path=ppt/slideLayouts/slideLayout8.xml><?xml version="1.0" encoding="utf-8"?>
 <p:sldLayout xmlns:a="http://schemas.openxmlformats.org/drawingml/2006/main" xmlns:p="http://schemas.openxmlformats.org/presentationml/2006/main" xmlns:r="http://schemas.openxmlformats.org/officeDocument/2006/relationships" xmlns:p14="http://schemas.microsoft.com/office/powerpoint/2010/main" xmlns:p15="http://schemas.microsoft.com/office/powerpoint/2012/main" xmlns:mc="http://schemas.openxmlformats.org/markup-compatibility/2006" type="blank" preserve="1">
   <p:cSld name="Section Header">
     <p:bg>
@@ -3788,7 +6327,7 @@
       </p:grpSpPr>
       <p:sp>
         <p:nvSpPr>
-          <p:cNvPr id="21" name="PlaceHolder 1"/>
+          <p:cNvPr id="38" name="PlaceHolder 1"/>
           <p:cNvSpPr>
             <a:spLocks noGrp="1"/>
           </p:cNvSpPr>
@@ -3799,7 +6338,7 @@
         <p:spPr>
           <a:xfrm>
             <a:off x="722160" y="4406760"/>
-            <a:ext cx="7772040" cy="1361880"/>
+            <a:ext cx="7771680" cy="1361520"/>
           </a:xfrm>
           <a:prstGeom prst="rect">
             <a:avLst/>
@@ -3819,6 +6358,9 @@
                 <a:spcPct val="100000"/>
               </a:lnSpc>
               <a:buNone/>
+              <a:tabLst>
+                <a:tab pos="0" algn="l"/>
+              </a:tabLst>
               <a:defRPr lang="en-US" sz="4000" b="1" u="none" strike="noStrike" cap="all">
                 <a:solidFill>
                   <a:schemeClr val="dk1"/>
@@ -3835,6 +6377,9 @@
                 <a:spcPct val="100000"/>
               </a:lnSpc>
               <a:buNone/>
+              <a:tabLst>
+                <a:tab pos="0" algn="l"/>
+              </a:tabLst>
             </a:pPr>
             <a:r>
               <a:rPr lang="en-US" sz="4000" b="1" u="none" strike="noStrike" cap="all">
@@ -3860,7 +6405,7 @@
       </p:sp>
       <p:sp>
         <p:nvSpPr>
-          <p:cNvPr id="22" name="PlaceHolder 2"/>
+          <p:cNvPr id="39" name="PlaceHolder 2"/>
           <p:cNvSpPr>
             <a:spLocks noGrp="1"/>
           </p:cNvSpPr>
@@ -3871,7 +6416,7 @@
         <p:spPr>
           <a:xfrm>
             <a:off x="722160" y="2906640"/>
-            <a:ext cx="7772040" cy="1499760"/>
+            <a:ext cx="7771680" cy="1499400"/>
           </a:xfrm>
           <a:prstGeom prst="rect">
             <a:avLst/>
@@ -3950,18 +6495,18 @@
       </p:sp>
       <p:sp>
         <p:nvSpPr>
-          <p:cNvPr id="23" name="PlaceHolder 3"/>
+          <p:cNvPr id="40" name="PlaceHolder 3"/>
           <p:cNvSpPr>
             <a:spLocks noGrp="1"/>
           </p:cNvSpPr>
           <p:nvPr>
-            <p:ph type="dt" idx="13"/>
+            <p:ph type="dt" idx="22"/>
           </p:nvPr>
         </p:nvSpPr>
         <p:spPr>
           <a:xfrm>
             <a:off x="457200" y="6356520"/>
-            <a:ext cx="2133360" cy="364680"/>
+            <a:ext cx="2133000" cy="364320"/>
           </a:xfrm>
           <a:prstGeom prst="rect">
             <a:avLst/>
@@ -3981,6 +6526,9 @@
                 <a:spcPct val="100000"/>
               </a:lnSpc>
               <a:buNone/>
+              <a:tabLst>
+                <a:tab pos="0" algn="l"/>
+              </a:tabLst>
               <a:defRPr lang="en-US" sz="1200" b="0" u="none" strike="noStrike">
                 <a:solidFill>
                   <a:schemeClr val="dk1">
@@ -3999,6 +6547,9 @@
                 <a:spcPct val="100000"/>
               </a:lnSpc>
               <a:buNone/>
+              <a:tabLst>
+                <a:tab pos="0" algn="l"/>
+              </a:tabLst>
             </a:pPr>
             <a:r>
               <a:rPr lang="en-US" sz="1200" b="0" u="none" strike="noStrike">
@@ -4026,18 +6577,18 @@
       </p:sp>
       <p:sp>
         <p:nvSpPr>
-          <p:cNvPr id="24" name="PlaceHolder 4"/>
+          <p:cNvPr id="41" name="PlaceHolder 4"/>
           <p:cNvSpPr>
             <a:spLocks noGrp="1"/>
           </p:cNvSpPr>
           <p:nvPr>
-            <p:ph type="ftr" idx="14"/>
+            <p:ph type="ftr" idx="23"/>
           </p:nvPr>
         </p:nvSpPr>
         <p:spPr>
           <a:xfrm>
             <a:off x="3124080" y="6356520"/>
-            <a:ext cx="2895120" cy="364680"/>
+            <a:ext cx="2894760" cy="364320"/>
           </a:xfrm>
           <a:prstGeom prst="rect">
             <a:avLst/>
@@ -4053,7 +6604,13 @@
           </a:bodyPr>
           <a:lstStyle>
             <a:lvl1pPr indent="0" algn="ctr">
+              <a:lnSpc>
+                <a:spcPct val="100000"/>
+              </a:lnSpc>
               <a:buNone/>
+              <a:tabLst>
+                <a:tab pos="0" algn="l"/>
+              </a:tabLst>
               <a:defRPr lang="en-US" sz="1400" b="0" u="none" strike="noStrike">
                 <a:solidFill>
                   <a:srgbClr val="000000"/>
@@ -4066,7 +6623,13 @@
           </a:lstStyle>
           <a:p>
             <a:pPr indent="0" algn="ctr">
+              <a:lnSpc>
+                <a:spcPct val="100000"/>
+              </a:lnSpc>
               <a:buNone/>
+              <a:tabLst>
+                <a:tab pos="0" algn="l"/>
+              </a:tabLst>
             </a:pPr>
             <a:r>
               <a:rPr lang="en-US" sz="1400" b="0" u="none" strike="noStrike">
@@ -4092,18 +6655,18 @@
       </p:sp>
       <p:sp>
         <p:nvSpPr>
-          <p:cNvPr id="25" name="PlaceHolder 5"/>
+          <p:cNvPr id="42" name="PlaceHolder 5"/>
           <p:cNvSpPr>
             <a:spLocks noGrp="1"/>
           </p:cNvSpPr>
           <p:nvPr>
-            <p:ph type="sldNum" idx="15"/>
+            <p:ph type="sldNum" idx="24"/>
           </p:nvPr>
         </p:nvSpPr>
         <p:spPr>
           <a:xfrm>
             <a:off x="6553080" y="6356520"/>
-            <a:ext cx="2133360" cy="364680"/>
+            <a:ext cx="2133000" cy="364320"/>
           </a:xfrm>
           <a:prstGeom prst="rect">
             <a:avLst/>
@@ -4123,6 +6686,9 @@
                 <a:spcPct val="100000"/>
               </a:lnSpc>
               <a:buNone/>
+              <a:tabLst>
+                <a:tab pos="0" algn="l"/>
+              </a:tabLst>
               <a:defRPr lang="en-US" sz="1200" b="0" u="none" strike="noStrike">
                 <a:solidFill>
                   <a:schemeClr val="dk1">
@@ -4141,8 +6707,11 @@
                 <a:spcPct val="100000"/>
               </a:lnSpc>
               <a:buNone/>
-            </a:pPr>
-            <a:fld id="{106FEB46-FD56-4C85-AEAB-6074D941A4B9}" type="slidenum">
+              <a:tabLst>
+                <a:tab pos="0" algn="l"/>
+              </a:tabLst>
+            </a:pPr>
+            <a:fld id="{4A7FB789-937D-410E-9044-3F2081C0F7B0}" type="slidenum">
               <a:rPr lang="en-US" sz="1200" b="0" u="none" strike="noStrike">
                 <a:solidFill>
                   <a:schemeClr val="dk1">
@@ -4171,7 +6740,7 @@
 </p:sldLayout>
 </file>
 
-<file path=ppt/slideLayouts/slideLayout6.xml><?xml version="1.0" encoding="utf-8"?>
+<file path=ppt/slideLayouts/slideLayout9.xml><?xml version="1.0" encoding="utf-8"?>
 <p:sldLayout xmlns:a="http://schemas.openxmlformats.org/drawingml/2006/main" xmlns:p="http://schemas.openxmlformats.org/presentationml/2006/main" xmlns:r="http://schemas.openxmlformats.org/officeDocument/2006/relationships" xmlns:p14="http://schemas.microsoft.com/office/powerpoint/2010/main" xmlns:p15="http://schemas.microsoft.com/office/powerpoint/2012/main" xmlns:mc="http://schemas.openxmlformats.org/markup-compatibility/2006" type="twoObj" preserve="1">
   <p:cSld name="Two Content">
     <p:bg>
@@ -4197,7 +6766,7 @@
       </p:grpSpPr>
       <p:sp>
         <p:nvSpPr>
-          <p:cNvPr id="26" name="PlaceHolder 1"/>
+          <p:cNvPr id="43" name="PlaceHolder 1"/>
           <p:cNvSpPr>
             <a:spLocks noGrp="1"/>
           </p:cNvSpPr>
@@ -4208,7 +6777,7 @@
         <p:spPr>
           <a:xfrm>
             <a:off x="457200" y="274680"/>
-            <a:ext cx="8229240" cy="1142640"/>
+            <a:ext cx="8228880" cy="1142280"/>
           </a:xfrm>
           <a:prstGeom prst="rect">
             <a:avLst/>
@@ -4228,6 +6797,9 @@
                 <a:spcPct val="100000"/>
               </a:lnSpc>
               <a:buNone/>
+              <a:tabLst>
+                <a:tab pos="0" algn="l"/>
+              </a:tabLst>
               <a:defRPr lang="en-US" sz="4400" b="0" u="none" strike="noStrike">
                 <a:solidFill>
                   <a:schemeClr val="dk1"/>
@@ -4244,6 +6816,9 @@
                 <a:spcPct val="100000"/>
               </a:lnSpc>
               <a:buNone/>
+              <a:tabLst>
+                <a:tab pos="0" algn="l"/>
+              </a:tabLst>
             </a:pPr>
             <a:r>
               <a:rPr lang="en-US" sz="4400" b="0" u="none" strike="noStrike">
@@ -4269,7 +6844,7 @@
       </p:sp>
       <p:sp>
         <p:nvSpPr>
-          <p:cNvPr id="27" name="PlaceHolder 2"/>
+          <p:cNvPr id="44" name="PlaceHolder 2"/>
           <p:cNvSpPr>
             <a:spLocks noGrp="1"/>
           </p:cNvSpPr>
@@ -4280,7 +6855,7 @@
         <p:spPr>
           <a:xfrm>
             <a:off x="457200" y="1600200"/>
-            <a:ext cx="4038120" cy="4525560"/>
+            <a:ext cx="4037760" cy="4525200"/>
           </a:xfrm>
           <a:prstGeom prst="rect">
             <a:avLst/>
@@ -4575,7 +7150,7 @@
       </p:sp>
       <p:sp>
         <p:nvSpPr>
-          <p:cNvPr id="28" name="PlaceHolder 3"/>
+          <p:cNvPr id="45" name="PlaceHolder 3"/>
           <p:cNvSpPr>
             <a:spLocks noGrp="1"/>
           </p:cNvSpPr>
@@ -4586,7 +7161,7 @@
         <p:spPr>
           <a:xfrm>
             <a:off x="4648320" y="1600200"/>
-            <a:ext cx="4038120" cy="4525560"/>
+            <a:ext cx="4037760" cy="4525200"/>
           </a:xfrm>
           <a:prstGeom prst="rect">
             <a:avLst/>
@@ -4881,18 +7456,18 @@
       </p:sp>
       <p:sp>
         <p:nvSpPr>
-          <p:cNvPr id="29" name="PlaceHolder 4"/>
+          <p:cNvPr id="46" name="PlaceHolder 4"/>
           <p:cNvSpPr>
             <a:spLocks noGrp="1"/>
           </p:cNvSpPr>
           <p:nvPr>
-            <p:ph type="dt" idx="16"/>
+            <p:ph type="dt" idx="25"/>
           </p:nvPr>
         </p:nvSpPr>
         <p:spPr>
           <a:xfrm>
             <a:off x="457200" y="6356520"/>
-            <a:ext cx="2133360" cy="364680"/>
+            <a:ext cx="2133000" cy="364320"/>
           </a:xfrm>
           <a:prstGeom prst="rect">
             <a:avLst/>
@@ -4912,6 +7487,9 @@
                 <a:spcPct val="100000"/>
               </a:lnSpc>
               <a:buNone/>
+              <a:tabLst>
+                <a:tab pos="0" algn="l"/>
+              </a:tabLst>
               <a:defRPr lang="en-US" sz="1200" b="0" u="none" strike="noStrike">
                 <a:solidFill>
                   <a:schemeClr val="dk1">
@@ -4930,6 +7508,9 @@
                 <a:spcPct val="100000"/>
               </a:lnSpc>
               <a:buNone/>
+              <a:tabLst>
+                <a:tab pos="0" algn="l"/>
+              </a:tabLst>
             </a:pPr>
             <a:r>
               <a:rPr lang="en-US" sz="1200" b="0" u="none" strike="noStrike">
@@ -4957,18 +7538,18 @@
       </p:sp>
       <p:sp>
         <p:nvSpPr>
-          <p:cNvPr id="30" name="PlaceHolder 5"/>
+          <p:cNvPr id="47" name="PlaceHolder 5"/>
           <p:cNvSpPr>
             <a:spLocks noGrp="1"/>
           </p:cNvSpPr>
           <p:nvPr>
-            <p:ph type="ftr" idx="17"/>
+            <p:ph type="ftr" idx="26"/>
           </p:nvPr>
         </p:nvSpPr>
         <p:spPr>
           <a:xfrm>
             <a:off x="3124080" y="6356520"/>
-            <a:ext cx="2895120" cy="364680"/>
+            <a:ext cx="2894760" cy="364320"/>
           </a:xfrm>
           <a:prstGeom prst="rect">
             <a:avLst/>
@@ -4984,7 +7565,13 @@
           </a:bodyPr>
           <a:lstStyle>
             <a:lvl1pPr indent="0" algn="ctr">
+              <a:lnSpc>
+                <a:spcPct val="100000"/>
+              </a:lnSpc>
               <a:buNone/>
+              <a:tabLst>
+                <a:tab pos="0" algn="l"/>
+              </a:tabLst>
               <a:defRPr lang="en-US" sz="1400" b="0" u="none" strike="noStrike">
                 <a:solidFill>
                   <a:srgbClr val="000000"/>
@@ -4997,7 +7584,13 @@
           </a:lstStyle>
           <a:p>
             <a:pPr indent="0" algn="ctr">
+              <a:lnSpc>
+                <a:spcPct val="100000"/>
+              </a:lnSpc>
               <a:buNone/>
+              <a:tabLst>
+                <a:tab pos="0" algn="l"/>
+              </a:tabLst>
             </a:pPr>
             <a:r>
               <a:rPr lang="en-US" sz="1400" b="0" u="none" strike="noStrike">
@@ -5023,18 +7616,18 @@
       </p:sp>
       <p:sp>
         <p:nvSpPr>
-          <p:cNvPr id="31" name="PlaceHolder 6"/>
+          <p:cNvPr id="48" name="PlaceHolder 6"/>
           <p:cNvSpPr>
             <a:spLocks noGrp="1"/>
           </p:cNvSpPr>
           <p:nvPr>
-            <p:ph type="sldNum" idx="18"/>
+            <p:ph type="sldNum" idx="27"/>
           </p:nvPr>
         </p:nvSpPr>
         <p:spPr>
           <a:xfrm>
             <a:off x="6553080" y="6356520"/>
-            <a:ext cx="2133360" cy="364680"/>
+            <a:ext cx="2133000" cy="364320"/>
           </a:xfrm>
           <a:prstGeom prst="rect">
             <a:avLst/>
@@ -5054,6 +7647,9 @@
                 <a:spcPct val="100000"/>
               </a:lnSpc>
               <a:buNone/>
+              <a:tabLst>
+                <a:tab pos="0" algn="l"/>
+              </a:tabLst>
               <a:defRPr lang="en-US" sz="1200" b="0" u="none" strike="noStrike">
                 <a:solidFill>
                   <a:schemeClr val="dk1">
@@ -5071,1007 +7667,13 @@
               <a:lnSpc>
                 <a:spcPct val="100000"/>
               </a:lnSpc>
-              <a:buNone/>
-            </a:pPr>
-            <a:fld id="{39A5057B-51D9-4786-998B-24F90DB14F2D}" type="slidenum">
-              <a:rPr lang="en-US" sz="1200" b="0" u="none" strike="noStrike">
-                <a:solidFill>
-                  <a:schemeClr val="dk1">
-                    <a:tint val="75000"/>
-                  </a:schemeClr>
-                </a:solidFill>
-                <a:effectLst/>
-                <a:uFillTx/>
-                <a:latin typeface="Calibri"/>
-              </a:rPr>
-              <a:t>&lt;number&gt;</a:t>
-            </a:fld>
-            <a:endParaRPr lang="en-US" sz="1200" b="0" u="none" strike="noStrike">
-              <a:solidFill>
-                <a:srgbClr val="000000"/>
-              </a:solidFill>
-              <a:effectLst/>
-              <a:uFillTx/>
-              <a:latin typeface="Times New Roman"/>
-            </a:endParaRPr>
-          </a:p>
-        </p:txBody>
-      </p:sp>
-    </p:spTree>
-  </p:cSld>
-</p:sldLayout>
-</file>
-
-<file path=ppt/slideLayouts/slideLayout7.xml><?xml version="1.0" encoding="utf-8"?>
-<p:sldLayout xmlns:a="http://schemas.openxmlformats.org/drawingml/2006/main" xmlns:p="http://schemas.openxmlformats.org/presentationml/2006/main" xmlns:r="http://schemas.openxmlformats.org/officeDocument/2006/relationships" xmlns:p14="http://schemas.microsoft.com/office/powerpoint/2010/main" xmlns:p15="http://schemas.microsoft.com/office/powerpoint/2012/main" xmlns:mc="http://schemas.openxmlformats.org/markup-compatibility/2006" type="blank" preserve="1">
-  <p:cSld name="Comparison">
-    <p:bg>
-      <p:bgPr>
-        <a:solidFill>
-          <a:srgbClr val="FFFFFF"/>
-        </a:solidFill>
-      </p:bgPr>
-    </p:bg>
-    <p:spTree>
-      <p:nvGrpSpPr>
-        <p:cNvPr id="1" name=""/>
-        <p:cNvGrpSpPr/>
-        <p:nvPr/>
-      </p:nvGrpSpPr>
-      <p:grpSpPr>
-        <a:xfrm>
-          <a:off x="0" y="0"/>
-          <a:ext cx="0" cy="0"/>
-          <a:chOff x="0" y="0"/>
-          <a:chExt cx="0" cy="0"/>
-        </a:xfrm>
-      </p:grpSpPr>
-      <p:sp>
-        <p:nvSpPr>
-          <p:cNvPr id="32" name="PlaceHolder 1"/>
-          <p:cNvSpPr>
-            <a:spLocks noGrp="1"/>
-          </p:cNvSpPr>
-          <p:nvPr>
-            <p:ph type="title"/>
-          </p:nvPr>
-        </p:nvSpPr>
-        <p:spPr>
-          <a:xfrm>
-            <a:off x="457200" y="274680"/>
-            <a:ext cx="8229240" cy="1142640"/>
-          </a:xfrm>
-          <a:prstGeom prst="rect">
-            <a:avLst/>
-          </a:prstGeom>
-          <a:noFill/>
-          <a:ln w="0">
-            <a:noFill/>
-          </a:ln>
-        </p:spPr>
-        <p:txBody>
-          <a:bodyPr lIns="91440" tIns="45720" rIns="91440" bIns="45720" anchor="ctr">
-            <a:noAutofit/>
-          </a:bodyPr>
-          <a:lstStyle>
-            <a:lvl1pPr indent="0" algn="ctr" defTabSz="457200">
-              <a:lnSpc>
-                <a:spcPct val="100000"/>
-              </a:lnSpc>
-              <a:buNone/>
-              <a:defRPr lang="en-US" sz="4400" b="0" u="none" strike="noStrike">
-                <a:solidFill>
-                  <a:schemeClr val="dk1"/>
-                </a:solidFill>
-                <a:effectLst/>
-                <a:uFillTx/>
-                <a:latin typeface="Calibri"/>
-              </a:defRPr>
-            </a:lvl1pPr>
-          </a:lstStyle>
-          <a:p>
-            <a:pPr indent="0" algn="ctr" defTabSz="457200">
-              <a:lnSpc>
-                <a:spcPct val="100000"/>
-              </a:lnSpc>
-              <a:buNone/>
-            </a:pPr>
-            <a:r>
-              <a:rPr lang="en-US" sz="4400" b="0" u="none" strike="noStrike">
-                <a:solidFill>
-                  <a:schemeClr val="dk1"/>
-                </a:solidFill>
-                <a:effectLst/>
-                <a:uFillTx/>
-                <a:latin typeface="Calibri"/>
-              </a:rPr>
-              <a:t>Click to edit Master title style</a:t>
-            </a:r>
-            <a:endParaRPr lang="en-US" sz="4400" b="0" u="none" strike="noStrike">
-              <a:solidFill>
-                <a:schemeClr val="dk1"/>
-              </a:solidFill>
-              <a:effectLst/>
-              <a:uFillTx/>
-              <a:latin typeface="Calibri"/>
-            </a:endParaRPr>
-          </a:p>
-        </p:txBody>
-      </p:sp>
-      <p:sp>
-        <p:nvSpPr>
-          <p:cNvPr id="33" name="PlaceHolder 2"/>
-          <p:cNvSpPr>
-            <a:spLocks noGrp="1"/>
-          </p:cNvSpPr>
-          <p:nvPr>
-            <p:ph type="body"/>
-          </p:nvPr>
-        </p:nvSpPr>
-        <p:spPr>
-          <a:xfrm>
-            <a:off x="457200" y="1535040"/>
-            <a:ext cx="4039920" cy="639360"/>
-          </a:xfrm>
-          <a:prstGeom prst="rect">
-            <a:avLst/>
-          </a:prstGeom>
-          <a:noFill/>
-          <a:ln w="0">
-            <a:noFill/>
-          </a:ln>
-        </p:spPr>
-        <p:txBody>
-          <a:bodyPr lIns="91440" tIns="45720" rIns="91440" bIns="45720" anchor="b">
-            <a:noAutofit/>
-          </a:bodyPr>
-          <a:lstStyle>
-            <a:lvl1pPr indent="0" algn="l" defTabSz="457200">
-              <a:lnSpc>
-                <a:spcPct val="100000"/>
-              </a:lnSpc>
-              <a:spcBef>
-                <a:spcPts val="479"/>
-              </a:spcBef>
               <a:buNone/>
               <a:tabLst>
                 <a:tab pos="0" algn="l"/>
               </a:tabLst>
-              <a:defRPr lang="en-US" sz="2400" b="1" u="none" strike="noStrike">
-                <a:solidFill>
-                  <a:schemeClr val="dk1"/>
-                </a:solidFill>
-                <a:effectLst/>
-                <a:uFillTx/>
-                <a:latin typeface="Calibri"/>
-              </a:defRPr>
-            </a:lvl1pPr>
-          </a:lstStyle>
-          <a:p>
-            <a:pPr indent="0" algn="l" defTabSz="457200">
-              <a:lnSpc>
-                <a:spcPct val="100000"/>
-              </a:lnSpc>
-              <a:spcBef>
-                <a:spcPts val="479"/>
-              </a:spcBef>
-              <a:buNone/>
-              <a:tabLst>
-                <a:tab pos="0" algn="l"/>
-              </a:tabLst>
-            </a:pPr>
-            <a:r>
-              <a:rPr lang="en-US" sz="2400" b="1" u="none" strike="noStrike">
-                <a:solidFill>
-                  <a:schemeClr val="dk1"/>
-                </a:solidFill>
-                <a:effectLst/>
-                <a:uFillTx/>
-                <a:latin typeface="Calibri"/>
-              </a:rPr>
-              <a:t>Click to edit Master text styles</a:t>
-            </a:r>
-            <a:endParaRPr lang="en-US" sz="2400" b="0" u="none" strike="noStrike">
-              <a:solidFill>
-                <a:schemeClr val="dk1"/>
-              </a:solidFill>
-              <a:effectLst/>
-              <a:uFillTx/>
-              <a:latin typeface="Calibri"/>
-            </a:endParaRPr>
-          </a:p>
-        </p:txBody>
-      </p:sp>
-      <p:sp>
-        <p:nvSpPr>
-          <p:cNvPr id="34" name="PlaceHolder 3"/>
-          <p:cNvSpPr>
-            <a:spLocks noGrp="1"/>
-          </p:cNvSpPr>
-          <p:nvPr>
-            <p:ph type="body"/>
-          </p:nvPr>
-        </p:nvSpPr>
-        <p:spPr>
-          <a:xfrm>
-            <a:off x="457200" y="2174760"/>
-            <a:ext cx="4039920" cy="3951000"/>
-          </a:xfrm>
-          <a:prstGeom prst="rect">
-            <a:avLst/>
-          </a:prstGeom>
-          <a:noFill/>
-          <a:ln w="0">
-            <a:noFill/>
-          </a:ln>
-        </p:spPr>
-        <p:txBody>
-          <a:bodyPr lIns="91440" tIns="45720" rIns="91440" bIns="45720" anchor="t">
-            <a:noAutofit/>
-          </a:bodyPr>
-          <a:lstStyle>
-            <a:lvl1pPr algn="l" defTabSz="457200">
-              <a:lnSpc>
-                <a:spcPct val="100000"/>
-              </a:lnSpc>
-              <a:spcBef>
-                <a:spcPts val="479"/>
-              </a:spcBef>
-              <a:buClr>
-                <a:srgbClr val="000000"/>
-              </a:buClr>
-              <a:buFont typeface="Arial"/>
-              <a:buChar char="•"/>
-              <a:tabLst>
-                <a:tab pos="0" algn="l"/>
-              </a:tabLst>
-              <a:defRPr lang="en-US" sz="2400" b="0" u="none" strike="noStrike">
-                <a:solidFill>
-                  <a:schemeClr val="dk1"/>
-                </a:solidFill>
-                <a:effectLst/>
-                <a:uFillTx/>
-                <a:latin typeface="Calibri"/>
-              </a:defRPr>
-            </a:lvl1pPr>
-            <a:lvl2pPr lvl="1" algn="l" defTabSz="457200">
-              <a:lnSpc>
-                <a:spcPct val="100000"/>
-              </a:lnSpc>
-              <a:spcBef>
-                <a:spcPts val="400"/>
-              </a:spcBef>
-              <a:buClr>
-                <a:srgbClr val="000000"/>
-              </a:buClr>
-              <a:buFont typeface="Arial"/>
-              <a:buChar char="–"/>
-              <a:tabLst>
-                <a:tab pos="0" algn="l"/>
-              </a:tabLst>
-              <a:defRPr lang="en-US" sz="2000" b="0" u="none" strike="noStrike">
-                <a:solidFill>
-                  <a:schemeClr val="dk1"/>
-                </a:solidFill>
-                <a:effectLst/>
-                <a:uFillTx/>
-                <a:latin typeface="Calibri"/>
-              </a:defRPr>
-            </a:lvl2pPr>
-            <a:lvl3pPr lvl="2" algn="l" defTabSz="457200">
-              <a:lnSpc>
-                <a:spcPct val="100000"/>
-              </a:lnSpc>
-              <a:spcBef>
-                <a:spcPts val="360"/>
-              </a:spcBef>
-              <a:buClr>
-                <a:srgbClr val="000000"/>
-              </a:buClr>
-              <a:buFont typeface="Arial"/>
-              <a:buChar char="•"/>
-              <a:tabLst>
-                <a:tab pos="0" algn="l"/>
-              </a:tabLst>
-              <a:defRPr lang="en-US" sz="1800" b="0" u="none" strike="noStrike">
-                <a:solidFill>
-                  <a:schemeClr val="dk1"/>
-                </a:solidFill>
-                <a:effectLst/>
-                <a:uFillTx/>
-                <a:latin typeface="Calibri"/>
-              </a:defRPr>
-            </a:lvl3pPr>
-            <a:lvl4pPr lvl="3" algn="l" defTabSz="457200">
-              <a:lnSpc>
-                <a:spcPct val="100000"/>
-              </a:lnSpc>
-              <a:spcBef>
-                <a:spcPts val="320"/>
-              </a:spcBef>
-              <a:buClr>
-                <a:srgbClr val="000000"/>
-              </a:buClr>
-              <a:buFont typeface="Arial"/>
-              <a:buChar char="–"/>
-              <a:tabLst>
-                <a:tab pos="0" algn="l"/>
-              </a:tabLst>
-              <a:defRPr lang="en-US" sz="1600" b="0" u="none" strike="noStrike">
-                <a:solidFill>
-                  <a:schemeClr val="dk1"/>
-                </a:solidFill>
-                <a:effectLst/>
-                <a:uFillTx/>
-                <a:latin typeface="Calibri"/>
-              </a:defRPr>
-            </a:lvl4pPr>
-            <a:lvl5pPr lvl="4" algn="l" defTabSz="457200">
-              <a:lnSpc>
-                <a:spcPct val="100000"/>
-              </a:lnSpc>
-              <a:spcBef>
-                <a:spcPts val="320"/>
-              </a:spcBef>
-              <a:buClr>
-                <a:srgbClr val="000000"/>
-              </a:buClr>
-              <a:buFont typeface="Arial"/>
-              <a:buChar char="»"/>
-              <a:tabLst>
-                <a:tab pos="0" algn="l"/>
-              </a:tabLst>
-              <a:defRPr lang="en-US" sz="1600" b="0" u="none" strike="noStrike">
-                <a:solidFill>
-                  <a:schemeClr val="dk1"/>
-                </a:solidFill>
-                <a:effectLst/>
-                <a:uFillTx/>
-                <a:latin typeface="Calibri"/>
-              </a:defRPr>
-            </a:lvl5pPr>
-          </a:lstStyle>
-          <a:p>
-            <a:pPr marL="343080" indent="-343080" algn="l" defTabSz="457200">
-              <a:lnSpc>
-                <a:spcPct val="100000"/>
-              </a:lnSpc>
-              <a:spcBef>
-                <a:spcPts val="479"/>
-              </a:spcBef>
-              <a:buClr>
-                <a:srgbClr val="000000"/>
-              </a:buClr>
-              <a:buFont typeface="Arial"/>
-              <a:buChar char="•"/>
-              <a:tabLst>
-                <a:tab pos="0" algn="l"/>
-              </a:tabLst>
-            </a:pPr>
-            <a:r>
-              <a:rPr lang="en-US" sz="2400" b="0" u="none" strike="noStrike">
-                <a:solidFill>
-                  <a:schemeClr val="dk1"/>
-                </a:solidFill>
-                <a:effectLst/>
-                <a:uFillTx/>
-                <a:latin typeface="Calibri"/>
-              </a:rPr>
-              <a:t>Click to edit Master text styles</a:t>
-            </a:r>
-            <a:endParaRPr lang="en-US" sz="2400" b="0" u="none" strike="noStrike">
-              <a:solidFill>
-                <a:schemeClr val="dk1"/>
-              </a:solidFill>
-              <a:effectLst/>
-              <a:uFillTx/>
-              <a:latin typeface="Calibri"/>
-            </a:endParaRPr>
-          </a:p>
-          <a:p>
-            <a:pPr marL="743040" lvl="1" indent="-285840" algn="l" defTabSz="457200">
-              <a:lnSpc>
-                <a:spcPct val="100000"/>
-              </a:lnSpc>
-              <a:spcBef>
-                <a:spcPts val="400"/>
-              </a:spcBef>
-              <a:buClr>
-                <a:srgbClr val="000000"/>
-              </a:buClr>
-              <a:buFont typeface="Arial"/>
-              <a:buChar char="–"/>
-              <a:tabLst>
-                <a:tab pos="0" algn="l"/>
-              </a:tabLst>
-            </a:pPr>
-            <a:r>
-              <a:rPr lang="en-US" sz="2000" b="0" u="none" strike="noStrike">
-                <a:solidFill>
-                  <a:schemeClr val="dk1"/>
-                </a:solidFill>
-                <a:effectLst/>
-                <a:uFillTx/>
-                <a:latin typeface="Calibri"/>
-              </a:rPr>
-              <a:t>Second level</a:t>
-            </a:r>
-            <a:endParaRPr lang="en-US" sz="2000" b="0" u="none" strike="noStrike">
-              <a:solidFill>
-                <a:schemeClr val="dk1"/>
-              </a:solidFill>
-              <a:effectLst/>
-              <a:uFillTx/>
-              <a:latin typeface="Calibri"/>
-            </a:endParaRPr>
-          </a:p>
-          <a:p>
-            <a:pPr marL="1143000" lvl="2" indent="-228600" algn="l" defTabSz="457200">
-              <a:lnSpc>
-                <a:spcPct val="100000"/>
-              </a:lnSpc>
-              <a:spcBef>
-                <a:spcPts val="360"/>
-              </a:spcBef>
-              <a:buClr>
-                <a:srgbClr val="000000"/>
-              </a:buClr>
-              <a:buFont typeface="Arial"/>
-              <a:buChar char="•"/>
-              <a:tabLst>
-                <a:tab pos="0" algn="l"/>
-              </a:tabLst>
-            </a:pPr>
-            <a:r>
-              <a:rPr lang="en-US" sz="1800" b="0" u="none" strike="noStrike">
-                <a:solidFill>
-                  <a:schemeClr val="dk1"/>
-                </a:solidFill>
-                <a:effectLst/>
-                <a:uFillTx/>
-                <a:latin typeface="Calibri"/>
-              </a:rPr>
-              <a:t>Third level</a:t>
-            </a:r>
-            <a:endParaRPr lang="en-US" sz="1800" b="0" u="none" strike="noStrike">
-              <a:solidFill>
-                <a:schemeClr val="dk1"/>
-              </a:solidFill>
-              <a:effectLst/>
-              <a:uFillTx/>
-              <a:latin typeface="Calibri"/>
-            </a:endParaRPr>
-          </a:p>
-          <a:p>
-            <a:pPr marL="1600200" lvl="3" indent="-228600" algn="l" defTabSz="457200">
-              <a:lnSpc>
-                <a:spcPct val="100000"/>
-              </a:lnSpc>
-              <a:spcBef>
-                <a:spcPts val="320"/>
-              </a:spcBef>
-              <a:buClr>
-                <a:srgbClr val="000000"/>
-              </a:buClr>
-              <a:buFont typeface="Arial"/>
-              <a:buChar char="–"/>
-              <a:tabLst>
-                <a:tab pos="0" algn="l"/>
-              </a:tabLst>
-            </a:pPr>
-            <a:r>
-              <a:rPr lang="en-US" sz="1600" b="0" u="none" strike="noStrike">
-                <a:solidFill>
-                  <a:schemeClr val="dk1"/>
-                </a:solidFill>
-                <a:effectLst/>
-                <a:uFillTx/>
-                <a:latin typeface="Calibri"/>
-              </a:rPr>
-              <a:t>Fourth level</a:t>
-            </a:r>
-            <a:endParaRPr lang="en-US" sz="1600" b="0" u="none" strike="noStrike">
-              <a:solidFill>
-                <a:schemeClr val="dk1"/>
-              </a:solidFill>
-              <a:effectLst/>
-              <a:uFillTx/>
-              <a:latin typeface="Calibri"/>
-            </a:endParaRPr>
-          </a:p>
-          <a:p>
-            <a:pPr marL="2057400" lvl="4" indent="-228600" algn="l" defTabSz="457200">
-              <a:lnSpc>
-                <a:spcPct val="100000"/>
-              </a:lnSpc>
-              <a:spcBef>
-                <a:spcPts val="320"/>
-              </a:spcBef>
-              <a:buClr>
-                <a:srgbClr val="000000"/>
-              </a:buClr>
-              <a:buFont typeface="Arial"/>
-              <a:buChar char="»"/>
-              <a:tabLst>
-                <a:tab pos="0" algn="l"/>
-              </a:tabLst>
-            </a:pPr>
-            <a:r>
-              <a:rPr lang="en-US" sz="1600" b="0" u="none" strike="noStrike">
-                <a:solidFill>
-                  <a:schemeClr val="dk1"/>
-                </a:solidFill>
-                <a:effectLst/>
-                <a:uFillTx/>
-                <a:latin typeface="Calibri"/>
-              </a:rPr>
-              <a:t>Fifth level</a:t>
-            </a:r>
-            <a:endParaRPr lang="en-US" sz="1600" b="0" u="none" strike="noStrike">
-              <a:solidFill>
-                <a:schemeClr val="dk1"/>
-              </a:solidFill>
-              <a:effectLst/>
-              <a:uFillTx/>
-              <a:latin typeface="Calibri"/>
-            </a:endParaRPr>
-          </a:p>
-        </p:txBody>
-      </p:sp>
-      <p:sp>
-        <p:nvSpPr>
-          <p:cNvPr id="35" name="PlaceHolder 4"/>
-          <p:cNvSpPr>
-            <a:spLocks noGrp="1"/>
-          </p:cNvSpPr>
-          <p:nvPr>
-            <p:ph type="body"/>
-          </p:nvPr>
-        </p:nvSpPr>
-        <p:spPr>
-          <a:xfrm>
-            <a:off x="4645080" y="1535040"/>
-            <a:ext cx="4041360" cy="639360"/>
-          </a:xfrm>
-          <a:prstGeom prst="rect">
-            <a:avLst/>
-          </a:prstGeom>
-          <a:noFill/>
-          <a:ln w="0">
-            <a:noFill/>
-          </a:ln>
-        </p:spPr>
-        <p:txBody>
-          <a:bodyPr lIns="91440" tIns="45720" rIns="91440" bIns="45720" anchor="b">
-            <a:noAutofit/>
-          </a:bodyPr>
-          <a:lstStyle>
-            <a:lvl1pPr indent="0" algn="l" defTabSz="457200">
-              <a:lnSpc>
-                <a:spcPct val="100000"/>
-              </a:lnSpc>
-              <a:spcBef>
-                <a:spcPts val="479"/>
-              </a:spcBef>
-              <a:buNone/>
-              <a:tabLst>
-                <a:tab pos="0" algn="l"/>
-              </a:tabLst>
-              <a:defRPr lang="en-US" sz="2400" b="1" u="none" strike="noStrike">
-                <a:solidFill>
-                  <a:schemeClr val="dk1"/>
-                </a:solidFill>
-                <a:effectLst/>
-                <a:uFillTx/>
-                <a:latin typeface="Calibri"/>
-              </a:defRPr>
-            </a:lvl1pPr>
-          </a:lstStyle>
-          <a:p>
-            <a:pPr indent="0" algn="l" defTabSz="457200">
-              <a:lnSpc>
-                <a:spcPct val="100000"/>
-              </a:lnSpc>
-              <a:spcBef>
-                <a:spcPts val="479"/>
-              </a:spcBef>
-              <a:buNone/>
-              <a:tabLst>
-                <a:tab pos="0" algn="l"/>
-              </a:tabLst>
-            </a:pPr>
-            <a:r>
-              <a:rPr lang="en-US" sz="2400" b="1" u="none" strike="noStrike">
-                <a:solidFill>
-                  <a:schemeClr val="dk1"/>
-                </a:solidFill>
-                <a:effectLst/>
-                <a:uFillTx/>
-                <a:latin typeface="Calibri"/>
-              </a:rPr>
-              <a:t>Click to edit Master text styles</a:t>
-            </a:r>
-            <a:endParaRPr lang="en-US" sz="2400" b="0" u="none" strike="noStrike">
-              <a:solidFill>
-                <a:schemeClr val="dk1"/>
-              </a:solidFill>
-              <a:effectLst/>
-              <a:uFillTx/>
-              <a:latin typeface="Calibri"/>
-            </a:endParaRPr>
-          </a:p>
-        </p:txBody>
-      </p:sp>
-      <p:sp>
-        <p:nvSpPr>
-          <p:cNvPr id="36" name="PlaceHolder 5"/>
-          <p:cNvSpPr>
-            <a:spLocks noGrp="1"/>
-          </p:cNvSpPr>
-          <p:nvPr>
-            <p:ph type="body"/>
-          </p:nvPr>
-        </p:nvSpPr>
-        <p:spPr>
-          <a:xfrm>
-            <a:off x="4645080" y="2174760"/>
-            <a:ext cx="4041360" cy="3951000"/>
-          </a:xfrm>
-          <a:prstGeom prst="rect">
-            <a:avLst/>
-          </a:prstGeom>
-          <a:noFill/>
-          <a:ln w="0">
-            <a:noFill/>
-          </a:ln>
-        </p:spPr>
-        <p:txBody>
-          <a:bodyPr lIns="91440" tIns="45720" rIns="91440" bIns="45720" anchor="t">
-            <a:noAutofit/>
-          </a:bodyPr>
-          <a:lstStyle>
-            <a:lvl1pPr algn="l" defTabSz="457200">
-              <a:lnSpc>
-                <a:spcPct val="100000"/>
-              </a:lnSpc>
-              <a:spcBef>
-                <a:spcPts val="479"/>
-              </a:spcBef>
-              <a:buClr>
-                <a:srgbClr val="000000"/>
-              </a:buClr>
-              <a:buFont typeface="Arial"/>
-              <a:buChar char="•"/>
-              <a:tabLst>
-                <a:tab pos="0" algn="l"/>
-              </a:tabLst>
-              <a:defRPr lang="en-US" sz="2400" b="0" u="none" strike="noStrike">
-                <a:solidFill>
-                  <a:schemeClr val="dk1"/>
-                </a:solidFill>
-                <a:effectLst/>
-                <a:uFillTx/>
-                <a:latin typeface="Calibri"/>
-              </a:defRPr>
-            </a:lvl1pPr>
-            <a:lvl2pPr lvl="1" algn="l" defTabSz="457200">
-              <a:lnSpc>
-                <a:spcPct val="100000"/>
-              </a:lnSpc>
-              <a:spcBef>
-                <a:spcPts val="400"/>
-              </a:spcBef>
-              <a:buClr>
-                <a:srgbClr val="000000"/>
-              </a:buClr>
-              <a:buFont typeface="Arial"/>
-              <a:buChar char="–"/>
-              <a:tabLst>
-                <a:tab pos="0" algn="l"/>
-              </a:tabLst>
-              <a:defRPr lang="en-US" sz="2000" b="0" u="none" strike="noStrike">
-                <a:solidFill>
-                  <a:schemeClr val="dk1"/>
-                </a:solidFill>
-                <a:effectLst/>
-                <a:uFillTx/>
-                <a:latin typeface="Calibri"/>
-              </a:defRPr>
-            </a:lvl2pPr>
-            <a:lvl3pPr lvl="2" algn="l" defTabSz="457200">
-              <a:lnSpc>
-                <a:spcPct val="100000"/>
-              </a:lnSpc>
-              <a:spcBef>
-                <a:spcPts val="360"/>
-              </a:spcBef>
-              <a:buClr>
-                <a:srgbClr val="000000"/>
-              </a:buClr>
-              <a:buFont typeface="Arial"/>
-              <a:buChar char="•"/>
-              <a:tabLst>
-                <a:tab pos="0" algn="l"/>
-              </a:tabLst>
-              <a:defRPr lang="en-US" sz="1800" b="0" u="none" strike="noStrike">
-                <a:solidFill>
-                  <a:schemeClr val="dk1"/>
-                </a:solidFill>
-                <a:effectLst/>
-                <a:uFillTx/>
-                <a:latin typeface="Calibri"/>
-              </a:defRPr>
-            </a:lvl3pPr>
-            <a:lvl4pPr lvl="3" algn="l" defTabSz="457200">
-              <a:lnSpc>
-                <a:spcPct val="100000"/>
-              </a:lnSpc>
-              <a:spcBef>
-                <a:spcPts val="320"/>
-              </a:spcBef>
-              <a:buClr>
-                <a:srgbClr val="000000"/>
-              </a:buClr>
-              <a:buFont typeface="Arial"/>
-              <a:buChar char="–"/>
-              <a:tabLst>
-                <a:tab pos="0" algn="l"/>
-              </a:tabLst>
-              <a:defRPr lang="en-US" sz="1600" b="0" u="none" strike="noStrike">
-                <a:solidFill>
-                  <a:schemeClr val="dk1"/>
-                </a:solidFill>
-                <a:effectLst/>
-                <a:uFillTx/>
-                <a:latin typeface="Calibri"/>
-              </a:defRPr>
-            </a:lvl4pPr>
-            <a:lvl5pPr lvl="4" algn="l" defTabSz="457200">
-              <a:lnSpc>
-                <a:spcPct val="100000"/>
-              </a:lnSpc>
-              <a:spcBef>
-                <a:spcPts val="320"/>
-              </a:spcBef>
-              <a:buClr>
-                <a:srgbClr val="000000"/>
-              </a:buClr>
-              <a:buFont typeface="Arial"/>
-              <a:buChar char="»"/>
-              <a:tabLst>
-                <a:tab pos="0" algn="l"/>
-              </a:tabLst>
-              <a:defRPr lang="en-US" sz="1600" b="0" u="none" strike="noStrike">
-                <a:solidFill>
-                  <a:schemeClr val="dk1"/>
-                </a:solidFill>
-                <a:effectLst/>
-                <a:uFillTx/>
-                <a:latin typeface="Calibri"/>
-              </a:defRPr>
-            </a:lvl5pPr>
-          </a:lstStyle>
-          <a:p>
-            <a:pPr marL="343080" indent="-343080" algn="l" defTabSz="457200">
-              <a:lnSpc>
-                <a:spcPct val="100000"/>
-              </a:lnSpc>
-              <a:spcBef>
-                <a:spcPts val="479"/>
-              </a:spcBef>
-              <a:buClr>
-                <a:srgbClr val="000000"/>
-              </a:buClr>
-              <a:buFont typeface="Arial"/>
-              <a:buChar char="•"/>
-              <a:tabLst>
-                <a:tab pos="0" algn="l"/>
-              </a:tabLst>
-            </a:pPr>
-            <a:r>
-              <a:rPr lang="en-US" sz="2400" b="0" u="none" strike="noStrike">
-                <a:solidFill>
-                  <a:schemeClr val="dk1"/>
-                </a:solidFill>
-                <a:effectLst/>
-                <a:uFillTx/>
-                <a:latin typeface="Calibri"/>
-              </a:rPr>
-              <a:t>Click to edit Master text styles</a:t>
-            </a:r>
-            <a:endParaRPr lang="en-US" sz="2400" b="0" u="none" strike="noStrike">
-              <a:solidFill>
-                <a:schemeClr val="dk1"/>
-              </a:solidFill>
-              <a:effectLst/>
-              <a:uFillTx/>
-              <a:latin typeface="Calibri"/>
-            </a:endParaRPr>
-          </a:p>
-          <a:p>
-            <a:pPr marL="743040" lvl="1" indent="-285840" algn="l" defTabSz="457200">
-              <a:lnSpc>
-                <a:spcPct val="100000"/>
-              </a:lnSpc>
-              <a:spcBef>
-                <a:spcPts val="400"/>
-              </a:spcBef>
-              <a:buClr>
-                <a:srgbClr val="000000"/>
-              </a:buClr>
-              <a:buFont typeface="Arial"/>
-              <a:buChar char="–"/>
-              <a:tabLst>
-                <a:tab pos="0" algn="l"/>
-              </a:tabLst>
-            </a:pPr>
-            <a:r>
-              <a:rPr lang="en-US" sz="2000" b="0" u="none" strike="noStrike">
-                <a:solidFill>
-                  <a:schemeClr val="dk1"/>
-                </a:solidFill>
-                <a:effectLst/>
-                <a:uFillTx/>
-                <a:latin typeface="Calibri"/>
-              </a:rPr>
-              <a:t>Second level</a:t>
-            </a:r>
-            <a:endParaRPr lang="en-US" sz="2000" b="0" u="none" strike="noStrike">
-              <a:solidFill>
-                <a:schemeClr val="dk1"/>
-              </a:solidFill>
-              <a:effectLst/>
-              <a:uFillTx/>
-              <a:latin typeface="Calibri"/>
-            </a:endParaRPr>
-          </a:p>
-          <a:p>
-            <a:pPr marL="1143000" lvl="2" indent="-228600" algn="l" defTabSz="457200">
-              <a:lnSpc>
-                <a:spcPct val="100000"/>
-              </a:lnSpc>
-              <a:spcBef>
-                <a:spcPts val="360"/>
-              </a:spcBef>
-              <a:buClr>
-                <a:srgbClr val="000000"/>
-              </a:buClr>
-              <a:buFont typeface="Arial"/>
-              <a:buChar char="•"/>
-              <a:tabLst>
-                <a:tab pos="0" algn="l"/>
-              </a:tabLst>
-            </a:pPr>
-            <a:r>
-              <a:rPr lang="en-US" sz="1800" b="0" u="none" strike="noStrike">
-                <a:solidFill>
-                  <a:schemeClr val="dk1"/>
-                </a:solidFill>
-                <a:effectLst/>
-                <a:uFillTx/>
-                <a:latin typeface="Calibri"/>
-              </a:rPr>
-              <a:t>Third level</a:t>
-            </a:r>
-            <a:endParaRPr lang="en-US" sz="1800" b="0" u="none" strike="noStrike">
-              <a:solidFill>
-                <a:schemeClr val="dk1"/>
-              </a:solidFill>
-              <a:effectLst/>
-              <a:uFillTx/>
-              <a:latin typeface="Calibri"/>
-            </a:endParaRPr>
-          </a:p>
-          <a:p>
-            <a:pPr marL="1600200" lvl="3" indent="-228600" algn="l" defTabSz="457200">
-              <a:lnSpc>
-                <a:spcPct val="100000"/>
-              </a:lnSpc>
-              <a:spcBef>
-                <a:spcPts val="320"/>
-              </a:spcBef>
-              <a:buClr>
-                <a:srgbClr val="000000"/>
-              </a:buClr>
-              <a:buFont typeface="Arial"/>
-              <a:buChar char="–"/>
-              <a:tabLst>
-                <a:tab pos="0" algn="l"/>
-              </a:tabLst>
-            </a:pPr>
-            <a:r>
-              <a:rPr lang="en-US" sz="1600" b="0" u="none" strike="noStrike">
-                <a:solidFill>
-                  <a:schemeClr val="dk1"/>
-                </a:solidFill>
-                <a:effectLst/>
-                <a:uFillTx/>
-                <a:latin typeface="Calibri"/>
-              </a:rPr>
-              <a:t>Fourth level</a:t>
-            </a:r>
-            <a:endParaRPr lang="en-US" sz="1600" b="0" u="none" strike="noStrike">
-              <a:solidFill>
-                <a:schemeClr val="dk1"/>
-              </a:solidFill>
-              <a:effectLst/>
-              <a:uFillTx/>
-              <a:latin typeface="Calibri"/>
-            </a:endParaRPr>
-          </a:p>
-          <a:p>
-            <a:pPr marL="2057400" lvl="4" indent="-228600" algn="l" defTabSz="457200">
-              <a:lnSpc>
-                <a:spcPct val="100000"/>
-              </a:lnSpc>
-              <a:spcBef>
-                <a:spcPts val="320"/>
-              </a:spcBef>
-              <a:buClr>
-                <a:srgbClr val="000000"/>
-              </a:buClr>
-              <a:buFont typeface="Arial"/>
-              <a:buChar char="»"/>
-              <a:tabLst>
-                <a:tab pos="0" algn="l"/>
-              </a:tabLst>
-            </a:pPr>
-            <a:r>
-              <a:rPr lang="en-US" sz="1600" b="0" u="none" strike="noStrike">
-                <a:solidFill>
-                  <a:schemeClr val="dk1"/>
-                </a:solidFill>
-                <a:effectLst/>
-                <a:uFillTx/>
-                <a:latin typeface="Calibri"/>
-              </a:rPr>
-              <a:t>Fifth level</a:t>
-            </a:r>
-            <a:endParaRPr lang="en-US" sz="1600" b="0" u="none" strike="noStrike">
-              <a:solidFill>
-                <a:schemeClr val="dk1"/>
-              </a:solidFill>
-              <a:effectLst/>
-              <a:uFillTx/>
-              <a:latin typeface="Calibri"/>
-            </a:endParaRPr>
-          </a:p>
-        </p:txBody>
-      </p:sp>
-      <p:sp>
-        <p:nvSpPr>
-          <p:cNvPr id="37" name="PlaceHolder 6"/>
-          <p:cNvSpPr>
-            <a:spLocks noGrp="1"/>
-          </p:cNvSpPr>
-          <p:nvPr>
-            <p:ph type="dt" idx="19"/>
-          </p:nvPr>
-        </p:nvSpPr>
-        <p:spPr>
-          <a:xfrm>
-            <a:off x="457200" y="6356520"/>
-            <a:ext cx="2133360" cy="364680"/>
-          </a:xfrm>
-          <a:prstGeom prst="rect">
-            <a:avLst/>
-          </a:prstGeom>
-          <a:noFill/>
-          <a:ln w="0">
-            <a:noFill/>
-          </a:ln>
-        </p:spPr>
-        <p:txBody>
-          <a:bodyPr lIns="91440" tIns="45720" rIns="91440" bIns="45720" anchor="ctr">
-            <a:noAutofit/>
-          </a:bodyPr>
-          <a:lstStyle>
-            <a:lvl1pPr indent="0" algn="l" defTabSz="457200">
-              <a:lnSpc>
-                <a:spcPct val="100000"/>
-              </a:lnSpc>
-              <a:buNone/>
-              <a:defRPr lang="en-US" sz="1200" b="0" u="none" strike="noStrike">
+            </a:pPr>
+            <a:fld id="{27287251-5416-4565-BB0D-52148F26153A}" type="slidenum">
+              <a:rPr lang="en-US" sz="1200" b="0" u="none" strike="noStrike">
                 <a:solidFill>
                   <a:schemeClr val="dk1">
                     <a:tint val="75000"/>
@@ -6080,168 +7682,6 @@
                 <a:effectLst/>
                 <a:uFillTx/>
                 <a:latin typeface="Calibri"/>
-              </a:defRPr>
-            </a:lvl1pPr>
-          </a:lstStyle>
-          <a:p>
-            <a:pPr indent="0" algn="l" defTabSz="457200">
-              <a:lnSpc>
-                <a:spcPct val="100000"/>
-              </a:lnSpc>
-              <a:buNone/>
-            </a:pPr>
-            <a:r>
-              <a:rPr lang="en-US" sz="1200" b="0" u="none" strike="noStrike">
-                <a:solidFill>
-                  <a:schemeClr val="dk1">
-                    <a:tint val="75000"/>
-                  </a:schemeClr>
-                </a:solidFill>
-                <a:effectLst/>
-                <a:uFillTx/>
-                <a:latin typeface="Calibri"/>
-              </a:rPr>
-              <a:t>&lt;date/time&gt;</a:t>
-            </a:r>
-            <a:endParaRPr lang="en-US" sz="1200" b="0" u="none" strike="noStrike">
-              <a:solidFill>
-                <a:srgbClr val="000000"/>
-              </a:solidFill>
-              <a:effectLst/>
-              <a:uFillTx/>
-              <a:latin typeface="Times New Roman"/>
-            </a:endParaRPr>
-          </a:p>
-        </p:txBody>
-      </p:sp>
-      <p:sp>
-        <p:nvSpPr>
-          <p:cNvPr id="38" name="PlaceHolder 7"/>
-          <p:cNvSpPr>
-            <a:spLocks noGrp="1"/>
-          </p:cNvSpPr>
-          <p:nvPr>
-            <p:ph type="ftr" idx="20"/>
-          </p:nvPr>
-        </p:nvSpPr>
-        <p:spPr>
-          <a:xfrm>
-            <a:off x="3124080" y="6356520"/>
-            <a:ext cx="2895120" cy="364680"/>
-          </a:xfrm>
-          <a:prstGeom prst="rect">
-            <a:avLst/>
-          </a:prstGeom>
-          <a:noFill/>
-          <a:ln w="0">
-            <a:noFill/>
-          </a:ln>
-        </p:spPr>
-        <p:txBody>
-          <a:bodyPr lIns="91440" tIns="45720" rIns="91440" bIns="45720" anchor="ctr">
-            <a:noAutofit/>
-          </a:bodyPr>
-          <a:lstStyle>
-            <a:lvl1pPr indent="0" algn="ctr">
-              <a:buNone/>
-              <a:defRPr lang="en-US" sz="1400" b="0" u="none" strike="noStrike">
-                <a:solidFill>
-                  <a:srgbClr val="000000"/>
-                </a:solidFill>
-                <a:effectLst/>
-                <a:uFillTx/>
-                <a:latin typeface="Times New Roman"/>
-              </a:defRPr>
-            </a:lvl1pPr>
-          </a:lstStyle>
-          <a:p>
-            <a:pPr indent="0" algn="ctr">
-              <a:buNone/>
-            </a:pPr>
-            <a:r>
-              <a:rPr lang="en-US" sz="1400" b="0" u="none" strike="noStrike">
-                <a:solidFill>
-                  <a:srgbClr val="000000"/>
-                </a:solidFill>
-                <a:effectLst/>
-                <a:uFillTx/>
-                <a:latin typeface="Times New Roman"/>
-              </a:rPr>
-              <a:t>&lt;footer&gt;</a:t>
-            </a:r>
-            <a:endParaRPr lang="en-US" sz="1400" b="0" u="none" strike="noStrike">
-              <a:solidFill>
-                <a:srgbClr val="000000"/>
-              </a:solidFill>
-              <a:effectLst/>
-              <a:uFillTx/>
-              <a:latin typeface="Times New Roman"/>
-            </a:endParaRPr>
-          </a:p>
-        </p:txBody>
-      </p:sp>
-      <p:sp>
-        <p:nvSpPr>
-          <p:cNvPr id="39" name="PlaceHolder 8"/>
-          <p:cNvSpPr>
-            <a:spLocks noGrp="1"/>
-          </p:cNvSpPr>
-          <p:nvPr>
-            <p:ph type="sldNum" idx="21"/>
-          </p:nvPr>
-        </p:nvSpPr>
-        <p:spPr>
-          <a:xfrm>
-            <a:off x="6553080" y="6356520"/>
-            <a:ext cx="2133360" cy="364680"/>
-          </a:xfrm>
-          <a:prstGeom prst="rect">
-            <a:avLst/>
-          </a:prstGeom>
-          <a:noFill/>
-          <a:ln w="0">
-            <a:noFill/>
-          </a:ln>
-        </p:spPr>
-        <p:txBody>
-          <a:bodyPr lIns="91440" tIns="45720" rIns="91440" bIns="45720" anchor="ctr">
-            <a:noAutofit/>
-          </a:bodyPr>
-          <a:lstStyle>
-            <a:lvl1pPr indent="0" algn="r" defTabSz="457200">
-              <a:lnSpc>
-                <a:spcPct val="100000"/>
-              </a:lnSpc>
-              <a:buNone/>
-              <a:defRPr lang="en-US" sz="1200" b="0" u="none" strike="noStrike">
-                <a:solidFill>
-                  <a:schemeClr val="dk1">
-                    <a:tint val="75000"/>
-                  </a:schemeClr>
-                </a:solidFill>
-                <a:effectLst/>
-                <a:uFillTx/>
-                <a:latin typeface="Calibri"/>
-              </a:defRPr>
-            </a:lvl1pPr>
-          </a:lstStyle>
-          <a:p>
-            <a:pPr indent="0" algn="r" defTabSz="457200">
-              <a:lnSpc>
-                <a:spcPct val="100000"/>
-              </a:lnSpc>
-              <a:buNone/>
-            </a:pPr>
-            <a:fld id="{A4138EA8-3D64-4178-AA27-AC56CCC6713A}" type="slidenum">
-              <a:rPr lang="en-US" sz="1200" b="0" u="none" strike="noStrike">
-                <a:solidFill>
-                  <a:schemeClr val="dk1">
-                    <a:tint val="75000"/>
-                  </a:schemeClr>
-                </a:solidFill>
-                <a:effectLst/>
-                <a:uFillTx/>
-                <a:latin typeface="Calibri"/>
               </a:rPr>
               <a:t>&lt;number&gt;</a:t>
             </a:fld>
@@ -6252,1026 +7692,6 @@
               <a:effectLst/>
               <a:uFillTx/>
               <a:latin typeface="Times New Roman"/>
-            </a:endParaRPr>
-          </a:p>
-        </p:txBody>
-      </p:sp>
-    </p:spTree>
-  </p:cSld>
-</p:sldLayout>
-</file>
-
-<file path=ppt/slideLayouts/slideLayout8.xml><?xml version="1.0" encoding="utf-8"?>
-<p:sldLayout xmlns:a="http://schemas.openxmlformats.org/drawingml/2006/main" xmlns:p="http://schemas.openxmlformats.org/presentationml/2006/main" xmlns:r="http://schemas.openxmlformats.org/officeDocument/2006/relationships" xmlns:p14="http://schemas.microsoft.com/office/powerpoint/2010/main" xmlns:p15="http://schemas.microsoft.com/office/powerpoint/2012/main" xmlns:mc="http://schemas.openxmlformats.org/markup-compatibility/2006" type="titleOnly" preserve="1">
-  <p:cSld name="Title Only">
-    <p:bg>
-      <p:bgPr>
-        <a:solidFill>
-          <a:srgbClr val="FFFFFF"/>
-        </a:solidFill>
-      </p:bgPr>
-    </p:bg>
-    <p:spTree>
-      <p:nvGrpSpPr>
-        <p:cNvPr id="1" name=""/>
-        <p:cNvGrpSpPr/>
-        <p:nvPr/>
-      </p:nvGrpSpPr>
-      <p:grpSpPr>
-        <a:xfrm>
-          <a:off x="0" y="0"/>
-          <a:ext cx="0" cy="0"/>
-          <a:chOff x="0" y="0"/>
-          <a:chExt cx="0" cy="0"/>
-        </a:xfrm>
-      </p:grpSpPr>
-      <p:sp>
-        <p:nvSpPr>
-          <p:cNvPr id="40" name="PlaceHolder 1"/>
-          <p:cNvSpPr>
-            <a:spLocks noGrp="1"/>
-          </p:cNvSpPr>
-          <p:nvPr>
-            <p:ph type="title"/>
-          </p:nvPr>
-        </p:nvSpPr>
-        <p:spPr>
-          <a:xfrm>
-            <a:off x="457200" y="274680"/>
-            <a:ext cx="8229240" cy="1142640"/>
-          </a:xfrm>
-          <a:prstGeom prst="rect">
-            <a:avLst/>
-          </a:prstGeom>
-          <a:noFill/>
-          <a:ln w="0">
-            <a:noFill/>
-          </a:ln>
-        </p:spPr>
-        <p:txBody>
-          <a:bodyPr lIns="91440" tIns="45720" rIns="91440" bIns="45720" anchor="ctr">
-            <a:noAutofit/>
-          </a:bodyPr>
-          <a:lstStyle>
-            <a:lvl1pPr indent="0" algn="ctr" defTabSz="457200">
-              <a:lnSpc>
-                <a:spcPct val="100000"/>
-              </a:lnSpc>
-              <a:buNone/>
-              <a:defRPr lang="en-US" sz="4400" b="0" u="none" strike="noStrike">
-                <a:solidFill>
-                  <a:schemeClr val="dk1"/>
-                </a:solidFill>
-                <a:effectLst/>
-                <a:uFillTx/>
-                <a:latin typeface="Calibri"/>
-              </a:defRPr>
-            </a:lvl1pPr>
-          </a:lstStyle>
-          <a:p>
-            <a:pPr indent="0" algn="ctr" defTabSz="457200">
-              <a:lnSpc>
-                <a:spcPct val="100000"/>
-              </a:lnSpc>
-              <a:buNone/>
-            </a:pPr>
-            <a:r>
-              <a:rPr lang="en-US" sz="4400" b="0" u="none" strike="noStrike">
-                <a:solidFill>
-                  <a:schemeClr val="dk1"/>
-                </a:solidFill>
-                <a:effectLst/>
-                <a:uFillTx/>
-                <a:latin typeface="Calibri"/>
-              </a:rPr>
-              <a:t>Click to edit Master title style</a:t>
-            </a:r>
-            <a:endParaRPr lang="en-US" sz="4400" b="0" u="none" strike="noStrike">
-              <a:solidFill>
-                <a:schemeClr val="dk1"/>
-              </a:solidFill>
-              <a:effectLst/>
-              <a:uFillTx/>
-              <a:latin typeface="Calibri"/>
-            </a:endParaRPr>
-          </a:p>
-        </p:txBody>
-      </p:sp>
-      <p:sp>
-        <p:nvSpPr>
-          <p:cNvPr id="41" name="PlaceHolder 2"/>
-          <p:cNvSpPr>
-            <a:spLocks noGrp="1"/>
-          </p:cNvSpPr>
-          <p:nvPr>
-            <p:ph type="dt" idx="22"/>
-          </p:nvPr>
-        </p:nvSpPr>
-        <p:spPr>
-          <a:xfrm>
-            <a:off x="457200" y="6356520"/>
-            <a:ext cx="2133360" cy="364680"/>
-          </a:xfrm>
-          <a:prstGeom prst="rect">
-            <a:avLst/>
-          </a:prstGeom>
-          <a:noFill/>
-          <a:ln w="0">
-            <a:noFill/>
-          </a:ln>
-        </p:spPr>
-        <p:txBody>
-          <a:bodyPr lIns="91440" tIns="45720" rIns="91440" bIns="45720" anchor="ctr">
-            <a:noAutofit/>
-          </a:bodyPr>
-          <a:lstStyle>
-            <a:lvl1pPr indent="0" algn="l" defTabSz="457200">
-              <a:lnSpc>
-                <a:spcPct val="100000"/>
-              </a:lnSpc>
-              <a:buNone/>
-              <a:defRPr lang="en-US" sz="1200" b="0" u="none" strike="noStrike">
-                <a:solidFill>
-                  <a:schemeClr val="dk1">
-                    <a:tint val="75000"/>
-                  </a:schemeClr>
-                </a:solidFill>
-                <a:effectLst/>
-                <a:uFillTx/>
-                <a:latin typeface="Calibri"/>
-              </a:defRPr>
-            </a:lvl1pPr>
-          </a:lstStyle>
-          <a:p>
-            <a:pPr indent="0" algn="l" defTabSz="457200">
-              <a:lnSpc>
-                <a:spcPct val="100000"/>
-              </a:lnSpc>
-              <a:buNone/>
-            </a:pPr>
-            <a:r>
-              <a:rPr lang="en-US" sz="1200" b="0" u="none" strike="noStrike">
-                <a:solidFill>
-                  <a:schemeClr val="dk1">
-                    <a:tint val="75000"/>
-                  </a:schemeClr>
-                </a:solidFill>
-                <a:effectLst/>
-                <a:uFillTx/>
-                <a:latin typeface="Calibri"/>
-              </a:rPr>
-              <a:t>&lt;date/time&gt;</a:t>
-            </a:r>
-            <a:endParaRPr lang="en-US" sz="1200" b="0" u="none" strike="noStrike">
-              <a:solidFill>
-                <a:srgbClr val="000000"/>
-              </a:solidFill>
-              <a:effectLst/>
-              <a:uFillTx/>
-              <a:latin typeface="Times New Roman"/>
-            </a:endParaRPr>
-          </a:p>
-        </p:txBody>
-      </p:sp>
-      <p:sp>
-        <p:nvSpPr>
-          <p:cNvPr id="42" name="PlaceHolder 3"/>
-          <p:cNvSpPr>
-            <a:spLocks noGrp="1"/>
-          </p:cNvSpPr>
-          <p:nvPr>
-            <p:ph type="ftr" idx="23"/>
-          </p:nvPr>
-        </p:nvSpPr>
-        <p:spPr>
-          <a:xfrm>
-            <a:off x="3124080" y="6356520"/>
-            <a:ext cx="2895120" cy="364680"/>
-          </a:xfrm>
-          <a:prstGeom prst="rect">
-            <a:avLst/>
-          </a:prstGeom>
-          <a:noFill/>
-          <a:ln w="0">
-            <a:noFill/>
-          </a:ln>
-        </p:spPr>
-        <p:txBody>
-          <a:bodyPr lIns="91440" tIns="45720" rIns="91440" bIns="45720" anchor="ctr">
-            <a:noAutofit/>
-          </a:bodyPr>
-          <a:lstStyle>
-            <a:lvl1pPr indent="0" algn="ctr">
-              <a:buNone/>
-              <a:defRPr lang="en-US" sz="1400" b="0" u="none" strike="noStrike">
-                <a:solidFill>
-                  <a:srgbClr val="000000"/>
-                </a:solidFill>
-                <a:effectLst/>
-                <a:uFillTx/>
-                <a:latin typeface="Times New Roman"/>
-              </a:defRPr>
-            </a:lvl1pPr>
-          </a:lstStyle>
-          <a:p>
-            <a:pPr indent="0" algn="ctr">
-              <a:buNone/>
-            </a:pPr>
-            <a:r>
-              <a:rPr lang="en-US" sz="1400" b="0" u="none" strike="noStrike">
-                <a:solidFill>
-                  <a:srgbClr val="000000"/>
-                </a:solidFill>
-                <a:effectLst/>
-                <a:uFillTx/>
-                <a:latin typeface="Times New Roman"/>
-              </a:rPr>
-              <a:t>&lt;footer&gt;</a:t>
-            </a:r>
-            <a:endParaRPr lang="en-US" sz="1400" b="0" u="none" strike="noStrike">
-              <a:solidFill>
-                <a:srgbClr val="000000"/>
-              </a:solidFill>
-              <a:effectLst/>
-              <a:uFillTx/>
-              <a:latin typeface="Times New Roman"/>
-            </a:endParaRPr>
-          </a:p>
-        </p:txBody>
-      </p:sp>
-      <p:sp>
-        <p:nvSpPr>
-          <p:cNvPr id="43" name="PlaceHolder 4"/>
-          <p:cNvSpPr>
-            <a:spLocks noGrp="1"/>
-          </p:cNvSpPr>
-          <p:nvPr>
-            <p:ph type="sldNum" idx="24"/>
-          </p:nvPr>
-        </p:nvSpPr>
-        <p:spPr>
-          <a:xfrm>
-            <a:off x="6553080" y="6356520"/>
-            <a:ext cx="2133360" cy="364680"/>
-          </a:xfrm>
-          <a:prstGeom prst="rect">
-            <a:avLst/>
-          </a:prstGeom>
-          <a:noFill/>
-          <a:ln w="0">
-            <a:noFill/>
-          </a:ln>
-        </p:spPr>
-        <p:txBody>
-          <a:bodyPr lIns="91440" tIns="45720" rIns="91440" bIns="45720" anchor="ctr">
-            <a:noAutofit/>
-          </a:bodyPr>
-          <a:lstStyle>
-            <a:lvl1pPr indent="0" algn="r" defTabSz="457200">
-              <a:lnSpc>
-                <a:spcPct val="100000"/>
-              </a:lnSpc>
-              <a:buNone/>
-              <a:defRPr lang="en-US" sz="1200" b="0" u="none" strike="noStrike">
-                <a:solidFill>
-                  <a:schemeClr val="dk1">
-                    <a:tint val="75000"/>
-                  </a:schemeClr>
-                </a:solidFill>
-                <a:effectLst/>
-                <a:uFillTx/>
-                <a:latin typeface="Calibri"/>
-              </a:defRPr>
-            </a:lvl1pPr>
-          </a:lstStyle>
-          <a:p>
-            <a:pPr indent="0" algn="r" defTabSz="457200">
-              <a:lnSpc>
-                <a:spcPct val="100000"/>
-              </a:lnSpc>
-              <a:buNone/>
-            </a:pPr>
-            <a:fld id="{A8A7D03B-7980-45AF-A6E1-04C0FAD64E2E}" type="slidenum">
-              <a:rPr lang="en-US" sz="1200" b="0" u="none" strike="noStrike">
-                <a:solidFill>
-                  <a:schemeClr val="dk1">
-                    <a:tint val="75000"/>
-                  </a:schemeClr>
-                </a:solidFill>
-                <a:effectLst/>
-                <a:uFillTx/>
-                <a:latin typeface="Calibri"/>
-              </a:rPr>
-              <a:t>&lt;number&gt;</a:t>
-            </a:fld>
-            <a:endParaRPr lang="en-US" sz="1200" b="0" u="none" strike="noStrike">
-              <a:solidFill>
-                <a:srgbClr val="000000"/>
-              </a:solidFill>
-              <a:effectLst/>
-              <a:uFillTx/>
-              <a:latin typeface="Times New Roman"/>
-            </a:endParaRPr>
-          </a:p>
-        </p:txBody>
-      </p:sp>
-    </p:spTree>
-  </p:cSld>
-</p:sldLayout>
-</file>
-
-<file path=ppt/slideLayouts/slideLayout9.xml><?xml version="1.0" encoding="utf-8"?>
-<p:sldLayout xmlns:a="http://schemas.openxmlformats.org/drawingml/2006/main" xmlns:p="http://schemas.openxmlformats.org/presentationml/2006/main" xmlns:r="http://schemas.openxmlformats.org/officeDocument/2006/relationships" xmlns:p14="http://schemas.microsoft.com/office/powerpoint/2010/main" xmlns:p15="http://schemas.microsoft.com/office/powerpoint/2012/main" xmlns:mc="http://schemas.openxmlformats.org/markup-compatibility/2006" type="blank" preserve="1">
-  <p:cSld name="Blank">
-    <p:bg>
-      <p:bgPr>
-        <a:solidFill>
-          <a:srgbClr val="FFFFFF"/>
-        </a:solidFill>
-      </p:bgPr>
-    </p:bg>
-    <p:spTree>
-      <p:nvGrpSpPr>
-        <p:cNvPr id="1" name=""/>
-        <p:cNvGrpSpPr/>
-        <p:nvPr/>
-      </p:nvGrpSpPr>
-      <p:grpSpPr>
-        <a:xfrm>
-          <a:off x="0" y="0"/>
-          <a:ext cx="0" cy="0"/>
-          <a:chOff x="0" y="0"/>
-          <a:chExt cx="0" cy="0"/>
-        </a:xfrm>
-      </p:grpSpPr>
-      <p:sp>
-        <p:nvSpPr>
-          <p:cNvPr id="44" name="PlaceHolder 1"/>
-          <p:cNvSpPr>
-            <a:spLocks noGrp="1"/>
-          </p:cNvSpPr>
-          <p:nvPr>
-            <p:ph type="dt" idx="25"/>
-          </p:nvPr>
-        </p:nvSpPr>
-        <p:spPr>
-          <a:xfrm>
-            <a:off x="457200" y="6356520"/>
-            <a:ext cx="2133360" cy="364680"/>
-          </a:xfrm>
-          <a:prstGeom prst="rect">
-            <a:avLst/>
-          </a:prstGeom>
-          <a:noFill/>
-          <a:ln w="0">
-            <a:noFill/>
-          </a:ln>
-        </p:spPr>
-        <p:txBody>
-          <a:bodyPr lIns="91440" tIns="45720" rIns="91440" bIns="45720" anchor="ctr">
-            <a:noAutofit/>
-          </a:bodyPr>
-          <a:lstStyle>
-            <a:lvl1pPr indent="0" algn="l" defTabSz="457200">
-              <a:lnSpc>
-                <a:spcPct val="100000"/>
-              </a:lnSpc>
-              <a:buNone/>
-              <a:defRPr lang="en-US" sz="1200" b="0" u="none" strike="noStrike">
-                <a:solidFill>
-                  <a:schemeClr val="dk1">
-                    <a:tint val="75000"/>
-                  </a:schemeClr>
-                </a:solidFill>
-                <a:effectLst/>
-                <a:uFillTx/>
-                <a:latin typeface="Calibri"/>
-              </a:defRPr>
-            </a:lvl1pPr>
-          </a:lstStyle>
-          <a:p>
-            <a:pPr indent="0" algn="l" defTabSz="457200">
-              <a:lnSpc>
-                <a:spcPct val="100000"/>
-              </a:lnSpc>
-              <a:buNone/>
-            </a:pPr>
-            <a:r>
-              <a:rPr lang="en-US" sz="1200" b="0" u="none" strike="noStrike">
-                <a:solidFill>
-                  <a:schemeClr val="dk1">
-                    <a:tint val="75000"/>
-                  </a:schemeClr>
-                </a:solidFill>
-                <a:effectLst/>
-                <a:uFillTx/>
-                <a:latin typeface="Calibri"/>
-              </a:rPr>
-              <a:t>&lt;date/time&gt;</a:t>
-            </a:r>
-            <a:endParaRPr lang="en-US" sz="1200" b="0" u="none" strike="noStrike">
-              <a:solidFill>
-                <a:srgbClr val="000000"/>
-              </a:solidFill>
-              <a:effectLst/>
-              <a:uFillTx/>
-              <a:latin typeface="Times New Roman"/>
-            </a:endParaRPr>
-          </a:p>
-        </p:txBody>
-      </p:sp>
-      <p:sp>
-        <p:nvSpPr>
-          <p:cNvPr id="45" name="PlaceHolder 2"/>
-          <p:cNvSpPr>
-            <a:spLocks noGrp="1"/>
-          </p:cNvSpPr>
-          <p:nvPr>
-            <p:ph type="ftr" idx="26"/>
-          </p:nvPr>
-        </p:nvSpPr>
-        <p:spPr>
-          <a:xfrm>
-            <a:off x="3124080" y="6356520"/>
-            <a:ext cx="2895120" cy="364680"/>
-          </a:xfrm>
-          <a:prstGeom prst="rect">
-            <a:avLst/>
-          </a:prstGeom>
-          <a:noFill/>
-          <a:ln w="0">
-            <a:noFill/>
-          </a:ln>
-        </p:spPr>
-        <p:txBody>
-          <a:bodyPr lIns="91440" tIns="45720" rIns="91440" bIns="45720" anchor="ctr">
-            <a:noAutofit/>
-          </a:bodyPr>
-          <a:lstStyle>
-            <a:lvl1pPr indent="0" algn="ctr">
-              <a:buNone/>
-              <a:defRPr lang="en-US" sz="1400" b="0" u="none" strike="noStrike">
-                <a:solidFill>
-                  <a:srgbClr val="000000"/>
-                </a:solidFill>
-                <a:effectLst/>
-                <a:uFillTx/>
-                <a:latin typeface="Times New Roman"/>
-              </a:defRPr>
-            </a:lvl1pPr>
-          </a:lstStyle>
-          <a:p>
-            <a:pPr indent="0" algn="ctr">
-              <a:buNone/>
-            </a:pPr>
-            <a:r>
-              <a:rPr lang="en-US" sz="1400" b="0" u="none" strike="noStrike">
-                <a:solidFill>
-                  <a:srgbClr val="000000"/>
-                </a:solidFill>
-                <a:effectLst/>
-                <a:uFillTx/>
-                <a:latin typeface="Times New Roman"/>
-              </a:rPr>
-              <a:t>&lt;footer&gt;</a:t>
-            </a:r>
-            <a:endParaRPr lang="en-US" sz="1400" b="0" u="none" strike="noStrike">
-              <a:solidFill>
-                <a:srgbClr val="000000"/>
-              </a:solidFill>
-              <a:effectLst/>
-              <a:uFillTx/>
-              <a:latin typeface="Times New Roman"/>
-            </a:endParaRPr>
-          </a:p>
-        </p:txBody>
-      </p:sp>
-      <p:sp>
-        <p:nvSpPr>
-          <p:cNvPr id="46" name="PlaceHolder 3"/>
-          <p:cNvSpPr>
-            <a:spLocks noGrp="1"/>
-          </p:cNvSpPr>
-          <p:nvPr>
-            <p:ph type="sldNum" idx="27"/>
-          </p:nvPr>
-        </p:nvSpPr>
-        <p:spPr>
-          <a:xfrm>
-            <a:off x="6553080" y="6356520"/>
-            <a:ext cx="2133360" cy="364680"/>
-          </a:xfrm>
-          <a:prstGeom prst="rect">
-            <a:avLst/>
-          </a:prstGeom>
-          <a:noFill/>
-          <a:ln w="0">
-            <a:noFill/>
-          </a:ln>
-        </p:spPr>
-        <p:txBody>
-          <a:bodyPr lIns="91440" tIns="45720" rIns="91440" bIns="45720" anchor="ctr">
-            <a:noAutofit/>
-          </a:bodyPr>
-          <a:lstStyle>
-            <a:lvl1pPr indent="0" algn="r" defTabSz="457200">
-              <a:lnSpc>
-                <a:spcPct val="100000"/>
-              </a:lnSpc>
-              <a:buNone/>
-              <a:defRPr lang="en-US" sz="1200" b="0" u="none" strike="noStrike">
-                <a:solidFill>
-                  <a:schemeClr val="dk1">
-                    <a:tint val="75000"/>
-                  </a:schemeClr>
-                </a:solidFill>
-                <a:effectLst/>
-                <a:uFillTx/>
-                <a:latin typeface="Calibri"/>
-              </a:defRPr>
-            </a:lvl1pPr>
-          </a:lstStyle>
-          <a:p>
-            <a:pPr indent="0" algn="r" defTabSz="457200">
-              <a:lnSpc>
-                <a:spcPct val="100000"/>
-              </a:lnSpc>
-              <a:buNone/>
-            </a:pPr>
-            <a:fld id="{478179DD-05B9-4CE4-9BED-142F834EC205}" type="slidenum">
-              <a:rPr lang="en-US" sz="1200" b="0" u="none" strike="noStrike">
-                <a:solidFill>
-                  <a:schemeClr val="dk1">
-                    <a:tint val="75000"/>
-                  </a:schemeClr>
-                </a:solidFill>
-                <a:effectLst/>
-                <a:uFillTx/>
-                <a:latin typeface="Calibri"/>
-              </a:rPr>
-              <a:t>&lt;number&gt;</a:t>
-            </a:fld>
-            <a:endParaRPr lang="en-US" sz="1200" b="0" u="none" strike="noStrike">
-              <a:solidFill>
-                <a:srgbClr val="000000"/>
-              </a:solidFill>
-              <a:effectLst/>
-              <a:uFillTx/>
-              <a:latin typeface="Times New Roman"/>
-            </a:endParaRPr>
-          </a:p>
-        </p:txBody>
-      </p:sp>
-      <p:sp>
-        <p:nvSpPr>
-          <p:cNvPr id="47" name="PlaceHolder 4"/>
-          <p:cNvSpPr>
-            <a:spLocks noGrp="1"/>
-          </p:cNvSpPr>
-          <p:nvPr>
-            <p:ph type="title"/>
-          </p:nvPr>
-        </p:nvSpPr>
-        <p:spPr>
-          <a:xfrm>
-            <a:off x="609480" y="273600"/>
-            <a:ext cx="10972080" cy="1144800"/>
-          </a:xfrm>
-          <a:prstGeom prst="rect">
-            <a:avLst/>
-          </a:prstGeom>
-          <a:noFill/>
-          <a:ln w="0">
-            <a:noFill/>
-          </a:ln>
-        </p:spPr>
-        <p:txBody>
-          <a:bodyPr lIns="0" tIns="0" rIns="0" bIns="0" anchor="ctr">
-            <a:noAutofit/>
-          </a:bodyPr>
-          <a:lstStyle>
-            <a:lvl1pPr indent="0" algn="l">
-              <a:buNone/>
-              <a:defRPr lang="en-US" sz="1800" b="0" u="none" strike="noStrike">
-                <a:solidFill>
-                  <a:schemeClr val="dk1"/>
-                </a:solidFill>
-                <a:effectLst/>
-                <a:uFillTx/>
-                <a:latin typeface="Calibri"/>
-              </a:defRPr>
-            </a:lvl1pPr>
-          </a:lstStyle>
-          <a:p>
-            <a:pPr indent="0" algn="l">
-              <a:buNone/>
-            </a:pPr>
-            <a:r>
-              <a:rPr lang="en-US" sz="1800" b="0" u="none" strike="noStrike">
-                <a:solidFill>
-                  <a:schemeClr val="dk1"/>
-                </a:solidFill>
-                <a:effectLst/>
-                <a:uFillTx/>
-                <a:latin typeface="Calibri"/>
-              </a:rPr>
-              <a:t>Click to edit the title text format</a:t>
-            </a:r>
-            <a:endParaRPr lang="en-US" sz="1800" b="0" u="none" strike="noStrike">
-              <a:solidFill>
-                <a:schemeClr val="dk1"/>
-              </a:solidFill>
-              <a:effectLst/>
-              <a:uFillTx/>
-              <a:latin typeface="Calibri"/>
-            </a:endParaRPr>
-          </a:p>
-        </p:txBody>
-      </p:sp>
-      <p:sp>
-        <p:nvSpPr>
-          <p:cNvPr id="48" name="PlaceHolder 5"/>
-          <p:cNvSpPr>
-            <a:spLocks noGrp="1"/>
-          </p:cNvSpPr>
-          <p:nvPr>
-            <p:ph type="body"/>
-          </p:nvPr>
-        </p:nvSpPr>
-        <p:spPr>
-          <a:xfrm>
-            <a:off x="609480" y="1604520"/>
-            <a:ext cx="10972080" cy="3977280"/>
-          </a:xfrm>
-          <a:prstGeom prst="rect">
-            <a:avLst/>
-          </a:prstGeom>
-          <a:noFill/>
-          <a:ln w="0">
-            <a:noFill/>
-          </a:ln>
-        </p:spPr>
-        <p:txBody>
-          <a:bodyPr lIns="0" tIns="0" rIns="0" bIns="0" anchor="t">
-            <a:normAutofit/>
-          </a:bodyPr>
-          <a:lstStyle>
-            <a:lvl1pPr algn="l">
-              <a:spcBef>
-                <a:spcPts val="1417"/>
-              </a:spcBef>
-              <a:buClr>
-                <a:srgbClr val="000000"/>
-              </a:buClr>
-              <a:buSzPct val="45000"/>
-              <a:buFont typeface="Wingdings" charset="2"/>
-              <a:buChar char=""/>
-              <a:defRPr lang="en-US" sz="3200" b="0" u="none" strike="noStrike">
-                <a:solidFill>
-                  <a:schemeClr val="dk1"/>
-                </a:solidFill>
-                <a:effectLst/>
-                <a:uFillTx/>
-                <a:latin typeface="Calibri"/>
-              </a:defRPr>
-            </a:lvl1pPr>
-            <a:lvl2pPr lvl="1" algn="l">
-              <a:spcBef>
-                <a:spcPts val="1134"/>
-              </a:spcBef>
-              <a:buClr>
-                <a:srgbClr val="000000"/>
-              </a:buClr>
-              <a:buSzPct val="75000"/>
-              <a:buFont typeface="Symbol" charset="2"/>
-              <a:buChar char=""/>
-              <a:defRPr lang="en-US" sz="2400" b="0" u="none" strike="noStrike">
-                <a:solidFill>
-                  <a:schemeClr val="dk1"/>
-                </a:solidFill>
-                <a:effectLst/>
-                <a:uFillTx/>
-                <a:latin typeface="Calibri"/>
-              </a:defRPr>
-            </a:lvl2pPr>
-            <a:lvl3pPr lvl="2" algn="l">
-              <a:spcBef>
-                <a:spcPts val="850"/>
-              </a:spcBef>
-              <a:buClr>
-                <a:srgbClr val="000000"/>
-              </a:buClr>
-              <a:buSzPct val="45000"/>
-              <a:buFont typeface="Wingdings" charset="2"/>
-              <a:buChar char=""/>
-              <a:defRPr lang="en-US" sz="2000" b="0" u="none" strike="noStrike">
-                <a:solidFill>
-                  <a:schemeClr val="dk1"/>
-                </a:solidFill>
-                <a:effectLst/>
-                <a:uFillTx/>
-                <a:latin typeface="Calibri"/>
-              </a:defRPr>
-            </a:lvl3pPr>
-            <a:lvl4pPr lvl="3" algn="l">
-              <a:spcBef>
-                <a:spcPts val="567"/>
-              </a:spcBef>
-              <a:buClr>
-                <a:srgbClr val="000000"/>
-              </a:buClr>
-              <a:buSzPct val="75000"/>
-              <a:buFont typeface="Symbol" charset="2"/>
-              <a:buChar char=""/>
-              <a:defRPr lang="en-US" sz="2000" b="0" u="none" strike="noStrike">
-                <a:solidFill>
-                  <a:schemeClr val="dk1"/>
-                </a:solidFill>
-                <a:effectLst/>
-                <a:uFillTx/>
-                <a:latin typeface="Calibri"/>
-              </a:defRPr>
-            </a:lvl4pPr>
-            <a:lvl5pPr lvl="4" algn="l">
-              <a:spcBef>
-                <a:spcPts val="283"/>
-              </a:spcBef>
-              <a:buClr>
-                <a:srgbClr val="000000"/>
-              </a:buClr>
-              <a:buSzPct val="45000"/>
-              <a:buFont typeface="Wingdings" charset="2"/>
-              <a:buChar char=""/>
-              <a:defRPr lang="en-US" sz="2000" b="0" u="none" strike="noStrike">
-                <a:solidFill>
-                  <a:schemeClr val="dk1"/>
-                </a:solidFill>
-                <a:effectLst/>
-                <a:uFillTx/>
-                <a:latin typeface="Calibri"/>
-              </a:defRPr>
-            </a:lvl5pPr>
-            <a:lvl6pPr lvl="5" algn="l">
-              <a:spcBef>
-                <a:spcPts val="283"/>
-              </a:spcBef>
-              <a:buClr>
-                <a:srgbClr val="000000"/>
-              </a:buClr>
-              <a:buSzPct val="45000"/>
-              <a:buFont typeface="Wingdings" charset="2"/>
-              <a:buChar char=""/>
-              <a:defRPr lang="en-US" sz="2000" b="0" u="none" strike="noStrike">
-                <a:solidFill>
-                  <a:schemeClr val="dk1"/>
-                </a:solidFill>
-                <a:effectLst/>
-                <a:uFillTx/>
-                <a:latin typeface="Calibri"/>
-              </a:defRPr>
-            </a:lvl6pPr>
-            <a:lvl7pPr lvl="6" algn="l">
-              <a:spcBef>
-                <a:spcPts val="283"/>
-              </a:spcBef>
-              <a:buClr>
-                <a:srgbClr val="000000"/>
-              </a:buClr>
-              <a:buSzPct val="45000"/>
-              <a:buFont typeface="Wingdings" charset="2"/>
-              <a:buChar char=""/>
-              <a:defRPr lang="en-US" sz="2000" b="0" u="none" strike="noStrike">
-                <a:solidFill>
-                  <a:schemeClr val="dk1"/>
-                </a:solidFill>
-                <a:effectLst/>
-                <a:uFillTx/>
-                <a:latin typeface="Calibri"/>
-              </a:defRPr>
-            </a:lvl7pPr>
-          </a:lstStyle>
-          <a:p>
-            <a:pPr marL="432000" indent="-324000" algn="l">
-              <a:spcBef>
-                <a:spcPts val="1417"/>
-              </a:spcBef>
-              <a:buClr>
-                <a:srgbClr val="000000"/>
-              </a:buClr>
-              <a:buSzPct val="45000"/>
-              <a:buFont typeface="Wingdings" charset="2"/>
-              <a:buChar char=""/>
-            </a:pPr>
-            <a:r>
-              <a:rPr lang="en-US" sz="3200" b="0" u="none" strike="noStrike">
-                <a:solidFill>
-                  <a:schemeClr val="dk1"/>
-                </a:solidFill>
-                <a:effectLst/>
-                <a:uFillTx/>
-                <a:latin typeface="Calibri"/>
-              </a:rPr>
-              <a:t>Click to edit the outline text format</a:t>
-            </a:r>
-            <a:endParaRPr lang="en-US" sz="3200" b="0" u="none" strike="noStrike">
-              <a:solidFill>
-                <a:schemeClr val="dk1"/>
-              </a:solidFill>
-              <a:effectLst/>
-              <a:uFillTx/>
-              <a:latin typeface="Calibri"/>
-            </a:endParaRPr>
-          </a:p>
-          <a:p>
-            <a:pPr marL="864000" lvl="1" indent="-324000" algn="l">
-              <a:spcBef>
-                <a:spcPts val="1134"/>
-              </a:spcBef>
-              <a:buClr>
-                <a:srgbClr val="000000"/>
-              </a:buClr>
-              <a:buSzPct val="75000"/>
-              <a:buFont typeface="Symbol" charset="2"/>
-              <a:buChar char=""/>
-            </a:pPr>
-            <a:r>
-              <a:rPr lang="en-US" sz="2400" b="0" u="none" strike="noStrike">
-                <a:solidFill>
-                  <a:schemeClr val="dk1"/>
-                </a:solidFill>
-                <a:effectLst/>
-                <a:uFillTx/>
-                <a:latin typeface="Calibri"/>
-              </a:rPr>
-              <a:t>Second Outline Level</a:t>
-            </a:r>
-            <a:endParaRPr lang="en-US" sz="2400" b="0" u="none" strike="noStrike">
-              <a:solidFill>
-                <a:schemeClr val="dk1"/>
-              </a:solidFill>
-              <a:effectLst/>
-              <a:uFillTx/>
-              <a:latin typeface="Calibri"/>
-            </a:endParaRPr>
-          </a:p>
-          <a:p>
-            <a:pPr marL="1296000" lvl="2" indent="-288000" algn="l">
-              <a:spcBef>
-                <a:spcPts val="850"/>
-              </a:spcBef>
-              <a:buClr>
-                <a:srgbClr val="000000"/>
-              </a:buClr>
-              <a:buSzPct val="45000"/>
-              <a:buFont typeface="Wingdings" charset="2"/>
-              <a:buChar char=""/>
-            </a:pPr>
-            <a:r>
-              <a:rPr lang="en-US" sz="2000" b="0" u="none" strike="noStrike">
-                <a:solidFill>
-                  <a:schemeClr val="dk1"/>
-                </a:solidFill>
-                <a:effectLst/>
-                <a:uFillTx/>
-                <a:latin typeface="Calibri"/>
-              </a:rPr>
-              <a:t>Third Outline Level</a:t>
-            </a:r>
-            <a:endParaRPr lang="en-US" sz="2000" b="0" u="none" strike="noStrike">
-              <a:solidFill>
-                <a:schemeClr val="dk1"/>
-              </a:solidFill>
-              <a:effectLst/>
-              <a:uFillTx/>
-              <a:latin typeface="Calibri"/>
-            </a:endParaRPr>
-          </a:p>
-          <a:p>
-            <a:pPr marL="1728000" lvl="3" indent="-216000" algn="l">
-              <a:spcBef>
-                <a:spcPts val="567"/>
-              </a:spcBef>
-              <a:buClr>
-                <a:srgbClr val="000000"/>
-              </a:buClr>
-              <a:buSzPct val="75000"/>
-              <a:buFont typeface="Symbol" charset="2"/>
-              <a:buChar char=""/>
-            </a:pPr>
-            <a:r>
-              <a:rPr lang="en-US" sz="2000" b="0" u="none" strike="noStrike">
-                <a:solidFill>
-                  <a:schemeClr val="dk1"/>
-                </a:solidFill>
-                <a:effectLst/>
-                <a:uFillTx/>
-                <a:latin typeface="Calibri"/>
-              </a:rPr>
-              <a:t>Fourth Outline Level</a:t>
-            </a:r>
-            <a:endParaRPr lang="en-US" sz="2000" b="0" u="none" strike="noStrike">
-              <a:solidFill>
-                <a:schemeClr val="dk1"/>
-              </a:solidFill>
-              <a:effectLst/>
-              <a:uFillTx/>
-              <a:latin typeface="Calibri"/>
-            </a:endParaRPr>
-          </a:p>
-          <a:p>
-            <a:pPr marL="2160000" lvl="4" indent="-216000" algn="l">
-              <a:spcBef>
-                <a:spcPts val="283"/>
-              </a:spcBef>
-              <a:buClr>
-                <a:srgbClr val="000000"/>
-              </a:buClr>
-              <a:buSzPct val="45000"/>
-              <a:buFont typeface="Wingdings" charset="2"/>
-              <a:buChar char=""/>
-            </a:pPr>
-            <a:r>
-              <a:rPr lang="en-US" sz="2000" b="0" u="none" strike="noStrike">
-                <a:solidFill>
-                  <a:schemeClr val="dk1"/>
-                </a:solidFill>
-                <a:effectLst/>
-                <a:uFillTx/>
-                <a:latin typeface="Calibri"/>
-              </a:rPr>
-              <a:t>Fifth Outline Level</a:t>
-            </a:r>
-            <a:endParaRPr lang="en-US" sz="2000" b="0" u="none" strike="noStrike">
-              <a:solidFill>
-                <a:schemeClr val="dk1"/>
-              </a:solidFill>
-              <a:effectLst/>
-              <a:uFillTx/>
-              <a:latin typeface="Calibri"/>
-            </a:endParaRPr>
-          </a:p>
-          <a:p>
-            <a:pPr marL="2592000" lvl="5" indent="-216000" algn="l">
-              <a:spcBef>
-                <a:spcPts val="283"/>
-              </a:spcBef>
-              <a:buClr>
-                <a:srgbClr val="000000"/>
-              </a:buClr>
-              <a:buSzPct val="45000"/>
-              <a:buFont typeface="Wingdings" charset="2"/>
-              <a:buChar char=""/>
-            </a:pPr>
-            <a:r>
-              <a:rPr lang="en-US" sz="2000" b="0" u="none" strike="noStrike">
-                <a:solidFill>
-                  <a:schemeClr val="dk1"/>
-                </a:solidFill>
-                <a:effectLst/>
-                <a:uFillTx/>
-                <a:latin typeface="Calibri"/>
-              </a:rPr>
-              <a:t>Sixth Outline Level</a:t>
-            </a:r>
-            <a:endParaRPr lang="en-US" sz="2000" b="0" u="none" strike="noStrike">
-              <a:solidFill>
-                <a:schemeClr val="dk1"/>
-              </a:solidFill>
-              <a:effectLst/>
-              <a:uFillTx/>
-              <a:latin typeface="Calibri"/>
-            </a:endParaRPr>
-          </a:p>
-          <a:p>
-            <a:pPr marL="3024000" lvl="6" indent="-216000" algn="l">
-              <a:spcBef>
-                <a:spcPts val="283"/>
-              </a:spcBef>
-              <a:buClr>
-                <a:srgbClr val="000000"/>
-              </a:buClr>
-              <a:buSzPct val="45000"/>
-              <a:buFont typeface="Wingdings" charset="2"/>
-              <a:buChar char=""/>
-            </a:pPr>
-            <a:r>
-              <a:rPr lang="en-US" sz="2000" b="0" u="none" strike="noStrike">
-                <a:solidFill>
-                  <a:schemeClr val="dk1"/>
-                </a:solidFill>
-                <a:effectLst/>
-                <a:uFillTx/>
-                <a:latin typeface="Calibri"/>
-              </a:rPr>
-              <a:t>Seventh Outline Level</a:t>
-            </a:r>
-            <a:endParaRPr lang="en-US" sz="2000" b="0" u="none" strike="noStrike">
-              <a:solidFill>
-                <a:schemeClr val="dk1"/>
-              </a:solidFill>
-              <a:effectLst/>
-              <a:uFillTx/>
-              <a:latin typeface="Calibri"/>
             </a:endParaRPr>
           </a:p>
         </p:txBody>
@@ -7343,7 +7763,7 @@
         <p:spPr>
           <a:xfrm>
             <a:off x="252000" y="0"/>
-            <a:ext cx="12191400" cy="6857640"/>
+            <a:ext cx="12191040" cy="6857280"/>
           </a:xfrm>
           <a:prstGeom prst="rect">
             <a:avLst/>
@@ -7399,7 +7819,7 @@
         <p:spPr>
           <a:xfrm>
             <a:off x="731520" y="731520"/>
-            <a:ext cx="6949080" cy="5394600"/>
+            <a:ext cx="6948720" cy="5394240"/>
           </a:xfrm>
           <a:prstGeom prst="roundRect">
             <a:avLst>
@@ -7622,7 +8042,7 @@
                 <a:uFillTx/>
                 <a:latin typeface="Calibri"/>
               </a:rPr>
-              <a:t>Submitted By: Laxman Rawat(22530204) , Bibek Kafle(225302 )</a:t>
+              <a:t>Submitted By: Laxman Rawat(22530204) , Bivek Kafle(22530190 )</a:t>
             </a:r>
             <a:endParaRPr lang="en-US" sz="1100" b="0" u="none" strike="noStrike">
               <a:solidFill>
@@ -7644,7 +8064,7 @@
         <p:spPr>
           <a:xfrm>
             <a:off x="8001000" y="685800"/>
-            <a:ext cx="3428640" cy="5440320"/>
+            <a:ext cx="3428280" cy="5439960"/>
           </a:xfrm>
           <a:prstGeom prst="roundRect">
             <a:avLst>
@@ -7709,7 +8129,7 @@
         <p:spPr>
           <a:xfrm>
             <a:off x="8458200" y="1371600"/>
-            <a:ext cx="2650680" cy="4087080"/>
+            <a:ext cx="2650320" cy="4086720"/>
           </a:xfrm>
           <a:prstGeom prst="rect">
             <a:avLst/>
@@ -7752,14 +8172,14 @@
       </p:grpSpPr>
       <p:sp>
         <p:nvSpPr>
-          <p:cNvPr id="133" name="Rectangle 1"/>
+          <p:cNvPr id="131" name="Rectangle 1"/>
           <p:cNvSpPr/>
           <p:nvPr/>
         </p:nvSpPr>
         <p:spPr>
           <a:xfrm>
             <a:off x="0" y="0"/>
-            <a:ext cx="12191400" cy="6857640"/>
+            <a:ext cx="12191040" cy="6857280"/>
           </a:xfrm>
           <a:prstGeom prst="rect">
             <a:avLst/>
@@ -7808,14 +8228,14 @@
       </p:sp>
       <p:sp>
         <p:nvSpPr>
-          <p:cNvPr id="134" name="Rounded Rectangle 2"/>
+          <p:cNvPr id="132" name="Rounded Rectangle 2"/>
           <p:cNvSpPr/>
           <p:nvPr/>
         </p:nvSpPr>
         <p:spPr>
           <a:xfrm>
             <a:off x="731520" y="411480"/>
-            <a:ext cx="3108600" cy="319680"/>
+            <a:ext cx="3108240" cy="319320"/>
           </a:xfrm>
           <a:prstGeom prst="roundRect">
             <a:avLst>
@@ -7885,14 +8305,14 @@
       </p:sp>
       <p:sp>
         <p:nvSpPr>
-          <p:cNvPr id="135" name="TextBox 3"/>
+          <p:cNvPr id="133" name="TextBox 3"/>
           <p:cNvSpPr/>
           <p:nvPr/>
         </p:nvSpPr>
         <p:spPr>
           <a:xfrm>
             <a:off x="731520" y="749880"/>
-            <a:ext cx="8686440" cy="548280"/>
+            <a:ext cx="8686080" cy="547920"/>
           </a:xfrm>
           <a:prstGeom prst="rect">
             <a:avLst/>
@@ -7942,14 +8362,14 @@
       </p:sp>
       <p:sp>
         <p:nvSpPr>
-          <p:cNvPr id="136" name="TextBox 4"/>
+          <p:cNvPr id="134" name="TextBox 4"/>
           <p:cNvSpPr/>
           <p:nvPr/>
         </p:nvSpPr>
         <p:spPr>
           <a:xfrm>
             <a:off x="8229600" y="411480"/>
-            <a:ext cx="3200040" cy="456840"/>
+            <a:ext cx="3199680" cy="456480"/>
           </a:xfrm>
           <a:prstGeom prst="rect">
             <a:avLst/>
@@ -8025,14 +8445,14 @@
       </p:sp>
       <p:sp>
         <p:nvSpPr>
-          <p:cNvPr id="137" name="Rectangle 5"/>
+          <p:cNvPr id="135" name="Rectangle 5"/>
           <p:cNvSpPr/>
           <p:nvPr/>
         </p:nvSpPr>
         <p:spPr>
           <a:xfrm>
             <a:off x="731520" y="1325880"/>
-            <a:ext cx="10728360" cy="12240"/>
+            <a:ext cx="10728000" cy="11880"/>
           </a:xfrm>
           <a:prstGeom prst="rect">
             <a:avLst/>
@@ -8081,14 +8501,14 @@
       </p:sp>
       <p:sp>
         <p:nvSpPr>
-          <p:cNvPr id="138" name="Rounded Rectangle 6"/>
+          <p:cNvPr id="136" name="Rounded Rectangle 6"/>
           <p:cNvSpPr/>
           <p:nvPr/>
         </p:nvSpPr>
         <p:spPr>
           <a:xfrm>
             <a:off x="731520" y="1554480"/>
-            <a:ext cx="4388760" cy="4754520"/>
+            <a:ext cx="4388400" cy="4754160"/>
           </a:xfrm>
           <a:prstGeom prst="roundRect">
             <a:avLst>
@@ -8365,14 +8785,14 @@
       </p:sp>
       <p:sp>
         <p:nvSpPr>
-          <p:cNvPr id="139" name="Rounded Rectangle 7"/>
+          <p:cNvPr id="137" name="Rounded Rectangle 7"/>
           <p:cNvSpPr/>
           <p:nvPr/>
         </p:nvSpPr>
         <p:spPr>
           <a:xfrm>
             <a:off x="5394960" y="1554480"/>
-            <a:ext cx="6034680" cy="4754520"/>
+            <a:ext cx="6034320" cy="4754160"/>
           </a:xfrm>
           <a:prstGeom prst="roundRect">
             <a:avLst>
@@ -8426,7 +8846,7 @@
       </p:sp>
       <p:pic>
         <p:nvPicPr>
-          <p:cNvPr id="140" name="Picture 8" descr="verify item1.png"/>
+          <p:cNvPr id="138" name="Picture 8" descr="verify item1.png"/>
           <p:cNvPicPr/>
           <p:nvPr/>
         </p:nvPicPr>
@@ -8437,7 +8857,7 @@
         <p:spPr>
           <a:xfrm>
             <a:off x="5577840" y="1691640"/>
-            <a:ext cx="5668920" cy="4033800"/>
+            <a:ext cx="5668560" cy="4033440"/>
           </a:xfrm>
           <a:prstGeom prst="rect">
             <a:avLst/>
@@ -8450,7 +8870,7 @@
       </p:pic>
       <p:pic>
         <p:nvPicPr>
-          <p:cNvPr id="141" name="Picture 9" descr="Admin panel.png"/>
+          <p:cNvPr id="139" name="Picture 9" descr="Admin panel.png"/>
           <p:cNvPicPr/>
           <p:nvPr/>
         </p:nvPicPr>
@@ -8461,7 +8881,7 @@
         <p:spPr>
           <a:xfrm>
             <a:off x="5577840" y="3977640"/>
-            <a:ext cx="5668920" cy="2390040"/>
+            <a:ext cx="5668560" cy="2389680"/>
           </a:xfrm>
           <a:prstGeom prst="rect">
             <a:avLst/>
@@ -8504,14 +8924,14 @@
       </p:grpSpPr>
       <p:sp>
         <p:nvSpPr>
-          <p:cNvPr id="142" name="Rectangle 1"/>
+          <p:cNvPr id="140" name="Rectangle 1"/>
           <p:cNvSpPr/>
           <p:nvPr/>
         </p:nvSpPr>
         <p:spPr>
           <a:xfrm>
             <a:off x="0" y="0"/>
-            <a:ext cx="12191400" cy="6857640"/>
+            <a:ext cx="12191040" cy="6857280"/>
           </a:xfrm>
           <a:prstGeom prst="rect">
             <a:avLst/>
@@ -8560,14 +8980,14 @@
       </p:sp>
       <p:sp>
         <p:nvSpPr>
-          <p:cNvPr id="143" name="Rounded Rectangle 2"/>
+          <p:cNvPr id="141" name="Rounded Rectangle 2"/>
           <p:cNvSpPr/>
           <p:nvPr/>
         </p:nvSpPr>
         <p:spPr>
           <a:xfrm>
             <a:off x="731520" y="411480"/>
-            <a:ext cx="3108600" cy="319680"/>
+            <a:ext cx="3108240" cy="319320"/>
           </a:xfrm>
           <a:prstGeom prst="roundRect">
             <a:avLst>
@@ -8637,14 +9057,14 @@
       </p:sp>
       <p:sp>
         <p:nvSpPr>
-          <p:cNvPr id="144" name="TextBox 3"/>
+          <p:cNvPr id="142" name="TextBox 3"/>
           <p:cNvSpPr/>
           <p:nvPr/>
         </p:nvSpPr>
         <p:spPr>
           <a:xfrm>
             <a:off x="731520" y="749880"/>
-            <a:ext cx="8686440" cy="548280"/>
+            <a:ext cx="8686080" cy="547920"/>
           </a:xfrm>
           <a:prstGeom prst="rect">
             <a:avLst/>
@@ -8694,14 +9114,14 @@
       </p:sp>
       <p:sp>
         <p:nvSpPr>
-          <p:cNvPr id="145" name="TextBox 4"/>
+          <p:cNvPr id="143" name="TextBox 4"/>
           <p:cNvSpPr/>
           <p:nvPr/>
         </p:nvSpPr>
         <p:spPr>
           <a:xfrm>
             <a:off x="8229600" y="411480"/>
-            <a:ext cx="3200040" cy="456840"/>
+            <a:ext cx="3199680" cy="456480"/>
           </a:xfrm>
           <a:prstGeom prst="rect">
             <a:avLst/>
@@ -8777,14 +9197,14 @@
       </p:sp>
       <p:sp>
         <p:nvSpPr>
-          <p:cNvPr id="146" name="Rectangle 5"/>
+          <p:cNvPr id="144" name="Rectangle 5"/>
           <p:cNvSpPr/>
           <p:nvPr/>
         </p:nvSpPr>
         <p:spPr>
           <a:xfrm>
             <a:off x="731520" y="1325880"/>
-            <a:ext cx="10728360" cy="12240"/>
+            <a:ext cx="10728000" cy="11880"/>
           </a:xfrm>
           <a:prstGeom prst="rect">
             <a:avLst/>
@@ -8833,14 +9253,14 @@
       </p:sp>
       <p:sp>
         <p:nvSpPr>
-          <p:cNvPr id="147" name="Rounded Rectangle 6"/>
+          <p:cNvPr id="145" name="Rounded Rectangle 6"/>
           <p:cNvSpPr/>
           <p:nvPr/>
         </p:nvSpPr>
         <p:spPr>
           <a:xfrm>
             <a:off x="731520" y="1554480"/>
-            <a:ext cx="5166000" cy="2239920"/>
+            <a:ext cx="5165640" cy="2239560"/>
           </a:xfrm>
           <a:prstGeom prst="roundRect">
             <a:avLst>
@@ -9012,14 +9432,14 @@
       </p:sp>
       <p:sp>
         <p:nvSpPr>
-          <p:cNvPr id="148" name="Rounded Rectangle 7"/>
+          <p:cNvPr id="146" name="Rounded Rectangle 7"/>
           <p:cNvSpPr/>
           <p:nvPr/>
         </p:nvSpPr>
         <p:spPr>
           <a:xfrm>
             <a:off x="6263640" y="1554480"/>
-            <a:ext cx="5166000" cy="2239920"/>
+            <a:ext cx="5165640" cy="2239560"/>
           </a:xfrm>
           <a:prstGeom prst="roundRect">
             <a:avLst>
@@ -9191,14 +9611,14 @@
       </p:sp>
       <p:sp>
         <p:nvSpPr>
-          <p:cNvPr id="149" name="Rounded Rectangle 8"/>
+          <p:cNvPr id="147" name="Rounded Rectangle 8"/>
           <p:cNvSpPr/>
           <p:nvPr/>
         </p:nvSpPr>
         <p:spPr>
           <a:xfrm>
             <a:off x="731520" y="4069080"/>
-            <a:ext cx="5166000" cy="2239920"/>
+            <a:ext cx="5165640" cy="2239560"/>
           </a:xfrm>
           <a:prstGeom prst="roundRect">
             <a:avLst>
@@ -9370,14 +9790,14 @@
       </p:sp>
       <p:sp>
         <p:nvSpPr>
-          <p:cNvPr id="150" name="Rounded Rectangle 9"/>
+          <p:cNvPr id="148" name="Rounded Rectangle 9"/>
           <p:cNvSpPr/>
           <p:nvPr/>
         </p:nvSpPr>
         <p:spPr>
           <a:xfrm>
             <a:off x="6263640" y="4069080"/>
-            <a:ext cx="5166000" cy="2239920"/>
+            <a:ext cx="5165640" cy="2239560"/>
           </a:xfrm>
           <a:prstGeom prst="roundRect">
             <a:avLst>
@@ -9579,14 +9999,14 @@
       </p:grpSpPr>
       <p:sp>
         <p:nvSpPr>
-          <p:cNvPr id="151" name="Rectangle 1"/>
+          <p:cNvPr id="149" name="Rectangle 1"/>
           <p:cNvSpPr/>
           <p:nvPr/>
         </p:nvSpPr>
         <p:spPr>
           <a:xfrm>
             <a:off x="0" y="0"/>
-            <a:ext cx="12191400" cy="6857640"/>
+            <a:ext cx="12191040" cy="6857280"/>
           </a:xfrm>
           <a:prstGeom prst="rect">
             <a:avLst/>
@@ -9635,14 +10055,14 @@
       </p:sp>
       <p:sp>
         <p:nvSpPr>
-          <p:cNvPr id="152" name="Rounded Rectangle 2"/>
+          <p:cNvPr id="150" name="Rounded Rectangle 2"/>
           <p:cNvSpPr/>
           <p:nvPr/>
         </p:nvSpPr>
         <p:spPr>
           <a:xfrm>
             <a:off x="731520" y="411480"/>
-            <a:ext cx="3108600" cy="319680"/>
+            <a:ext cx="3108240" cy="319320"/>
           </a:xfrm>
           <a:prstGeom prst="roundRect">
             <a:avLst>
@@ -9712,14 +10132,14 @@
       </p:sp>
       <p:sp>
         <p:nvSpPr>
-          <p:cNvPr id="153" name="TextBox 3"/>
+          <p:cNvPr id="151" name="TextBox 3"/>
           <p:cNvSpPr/>
           <p:nvPr/>
         </p:nvSpPr>
         <p:spPr>
           <a:xfrm>
             <a:off x="731520" y="749880"/>
-            <a:ext cx="8686440" cy="548280"/>
+            <a:ext cx="8686080" cy="547920"/>
           </a:xfrm>
           <a:prstGeom prst="rect">
             <a:avLst/>
@@ -9769,14 +10189,14 @@
       </p:sp>
       <p:sp>
         <p:nvSpPr>
-          <p:cNvPr id="154" name="TextBox 4"/>
+          <p:cNvPr id="152" name="TextBox 4"/>
           <p:cNvSpPr/>
           <p:nvPr/>
         </p:nvSpPr>
         <p:spPr>
           <a:xfrm>
             <a:off x="8229600" y="411480"/>
-            <a:ext cx="3200040" cy="456840"/>
+            <a:ext cx="3199680" cy="456480"/>
           </a:xfrm>
           <a:prstGeom prst="rect">
             <a:avLst/>
@@ -9852,14 +10272,14 @@
       </p:sp>
       <p:sp>
         <p:nvSpPr>
-          <p:cNvPr id="155" name="Rectangle 5"/>
+          <p:cNvPr id="153" name="Rectangle 5"/>
           <p:cNvSpPr/>
           <p:nvPr/>
         </p:nvSpPr>
         <p:spPr>
           <a:xfrm>
             <a:off x="731520" y="1325880"/>
-            <a:ext cx="10728360" cy="12240"/>
+            <a:ext cx="10728000" cy="11880"/>
           </a:xfrm>
           <a:prstGeom prst="rect">
             <a:avLst/>
@@ -9908,14 +10328,14 @@
       </p:sp>
       <p:sp>
         <p:nvSpPr>
-          <p:cNvPr id="156" name="Rounded Rectangle 6"/>
+          <p:cNvPr id="154" name="Rounded Rectangle 6"/>
           <p:cNvSpPr/>
           <p:nvPr/>
         </p:nvSpPr>
         <p:spPr>
           <a:xfrm>
             <a:off x="731520" y="1554480"/>
-            <a:ext cx="5166000" cy="4754520"/>
+            <a:ext cx="5165640" cy="4754160"/>
           </a:xfrm>
           <a:prstGeom prst="roundRect">
             <a:avLst>
@@ -10192,14 +10612,14 @@
       </p:sp>
       <p:sp>
         <p:nvSpPr>
-          <p:cNvPr id="157" name="Rounded Rectangle 7"/>
+          <p:cNvPr id="155" name="Rounded Rectangle 7"/>
           <p:cNvSpPr/>
           <p:nvPr/>
         </p:nvSpPr>
         <p:spPr>
           <a:xfrm>
             <a:off x="6263640" y="1554480"/>
-            <a:ext cx="5166000" cy="4754520"/>
+            <a:ext cx="5165640" cy="4754160"/>
           </a:xfrm>
           <a:prstGeom prst="roundRect">
             <a:avLst>
@@ -10506,14 +10926,14 @@
       </p:grpSpPr>
       <p:sp>
         <p:nvSpPr>
-          <p:cNvPr id="158" name="Rectangle 1"/>
+          <p:cNvPr id="156" name="Rectangle 1"/>
           <p:cNvSpPr/>
           <p:nvPr/>
         </p:nvSpPr>
         <p:spPr>
           <a:xfrm>
             <a:off x="0" y="0"/>
-            <a:ext cx="12191400" cy="6857640"/>
+            <a:ext cx="12191040" cy="6857280"/>
           </a:xfrm>
           <a:prstGeom prst="rect">
             <a:avLst/>
@@ -10562,14 +10982,14 @@
       </p:sp>
       <p:sp>
         <p:nvSpPr>
-          <p:cNvPr id="159" name="Rounded Rectangle 2"/>
+          <p:cNvPr id="157" name="Rounded Rectangle 2"/>
           <p:cNvSpPr/>
           <p:nvPr/>
         </p:nvSpPr>
         <p:spPr>
           <a:xfrm>
             <a:off x="731520" y="411480"/>
-            <a:ext cx="3108600" cy="319680"/>
+            <a:ext cx="3108240" cy="319320"/>
           </a:xfrm>
           <a:prstGeom prst="roundRect">
             <a:avLst>
@@ -10639,14 +11059,14 @@
       </p:sp>
       <p:sp>
         <p:nvSpPr>
-          <p:cNvPr id="160" name="TextBox 3"/>
+          <p:cNvPr id="158" name="TextBox 3"/>
           <p:cNvSpPr/>
           <p:nvPr/>
         </p:nvSpPr>
         <p:spPr>
           <a:xfrm>
             <a:off x="731520" y="749880"/>
-            <a:ext cx="8686440" cy="548280"/>
+            <a:ext cx="8686080" cy="547920"/>
           </a:xfrm>
           <a:prstGeom prst="rect">
             <a:avLst/>
@@ -10696,14 +11116,14 @@
       </p:sp>
       <p:sp>
         <p:nvSpPr>
-          <p:cNvPr id="161" name="TextBox 4"/>
+          <p:cNvPr id="159" name="TextBox 4"/>
           <p:cNvSpPr/>
           <p:nvPr/>
         </p:nvSpPr>
         <p:spPr>
           <a:xfrm>
             <a:off x="8229600" y="411480"/>
-            <a:ext cx="3200040" cy="456840"/>
+            <a:ext cx="3199680" cy="456480"/>
           </a:xfrm>
           <a:prstGeom prst="rect">
             <a:avLst/>
@@ -10779,14 +11199,14 @@
       </p:sp>
       <p:sp>
         <p:nvSpPr>
-          <p:cNvPr id="162" name="Rectangle 5"/>
+          <p:cNvPr id="160" name="Rectangle 5"/>
           <p:cNvSpPr/>
           <p:nvPr/>
         </p:nvSpPr>
         <p:spPr>
           <a:xfrm>
             <a:off x="731520" y="1325880"/>
-            <a:ext cx="10728360" cy="12240"/>
+            <a:ext cx="10728000" cy="11880"/>
           </a:xfrm>
           <a:prstGeom prst="rect">
             <a:avLst/>
@@ -10835,14 +11255,14 @@
       </p:sp>
       <p:sp>
         <p:nvSpPr>
-          <p:cNvPr id="163" name="Rounded Rectangle 6"/>
+          <p:cNvPr id="161" name="Rounded Rectangle 6"/>
           <p:cNvSpPr/>
           <p:nvPr/>
         </p:nvSpPr>
         <p:spPr>
           <a:xfrm>
             <a:off x="731520" y="1554480"/>
-            <a:ext cx="3337200" cy="4754520"/>
+            <a:ext cx="3336840" cy="4754160"/>
           </a:xfrm>
           <a:prstGeom prst="roundRect">
             <a:avLst>
@@ -11068,14 +11488,14 @@
       </p:sp>
       <p:sp>
         <p:nvSpPr>
-          <p:cNvPr id="164" name="Rounded Rectangle 7"/>
+          <p:cNvPr id="162" name="Rounded Rectangle 7"/>
           <p:cNvSpPr/>
           <p:nvPr/>
         </p:nvSpPr>
         <p:spPr>
           <a:xfrm>
             <a:off x="4416480" y="1554480"/>
-            <a:ext cx="3337200" cy="4754520"/>
+            <a:ext cx="3336840" cy="4754160"/>
           </a:xfrm>
           <a:prstGeom prst="roundRect">
             <a:avLst>
@@ -11301,14 +11721,14 @@
       </p:sp>
       <p:sp>
         <p:nvSpPr>
-          <p:cNvPr id="165" name="Rounded Rectangle 8"/>
+          <p:cNvPr id="163" name="Rounded Rectangle 8"/>
           <p:cNvSpPr/>
           <p:nvPr/>
         </p:nvSpPr>
         <p:spPr>
           <a:xfrm>
             <a:off x="8101440" y="1554480"/>
-            <a:ext cx="3337200" cy="4754520"/>
+            <a:ext cx="3336840" cy="4754160"/>
           </a:xfrm>
           <a:prstGeom prst="roundRect">
             <a:avLst>
@@ -11564,14 +11984,14 @@
       </p:grpSpPr>
       <p:sp>
         <p:nvSpPr>
-          <p:cNvPr id="166" name="Rectangle 1"/>
+          <p:cNvPr id="164" name="Rectangle 1"/>
           <p:cNvSpPr/>
           <p:nvPr/>
         </p:nvSpPr>
         <p:spPr>
           <a:xfrm>
             <a:off x="0" y="0"/>
-            <a:ext cx="12191400" cy="6857640"/>
+            <a:ext cx="12191040" cy="6857280"/>
           </a:xfrm>
           <a:prstGeom prst="rect">
             <a:avLst/>
@@ -11620,14 +12040,14 @@
       </p:sp>
       <p:sp>
         <p:nvSpPr>
-          <p:cNvPr id="167" name="Rounded Rectangle 2"/>
+          <p:cNvPr id="165" name="Rounded Rectangle 2"/>
           <p:cNvSpPr/>
           <p:nvPr/>
         </p:nvSpPr>
         <p:spPr>
           <a:xfrm>
             <a:off x="731520" y="411480"/>
-            <a:ext cx="3108600" cy="319680"/>
+            <a:ext cx="3108240" cy="319320"/>
           </a:xfrm>
           <a:prstGeom prst="roundRect">
             <a:avLst>
@@ -11697,14 +12117,14 @@
       </p:sp>
       <p:sp>
         <p:nvSpPr>
-          <p:cNvPr id="168" name="TextBox 3"/>
+          <p:cNvPr id="166" name="TextBox 3"/>
           <p:cNvSpPr/>
           <p:nvPr/>
         </p:nvSpPr>
         <p:spPr>
           <a:xfrm>
             <a:off x="731520" y="749880"/>
-            <a:ext cx="8686440" cy="548280"/>
+            <a:ext cx="8686080" cy="547920"/>
           </a:xfrm>
           <a:prstGeom prst="rect">
             <a:avLst/>
@@ -11754,14 +12174,14 @@
       </p:sp>
       <p:sp>
         <p:nvSpPr>
-          <p:cNvPr id="169" name="TextBox 4"/>
+          <p:cNvPr id="167" name="TextBox 4"/>
           <p:cNvSpPr/>
           <p:nvPr/>
         </p:nvSpPr>
         <p:spPr>
           <a:xfrm>
             <a:off x="8229600" y="411480"/>
-            <a:ext cx="3200040" cy="456840"/>
+            <a:ext cx="3199680" cy="456480"/>
           </a:xfrm>
           <a:prstGeom prst="rect">
             <a:avLst/>
@@ -11837,14 +12257,14 @@
       </p:sp>
       <p:sp>
         <p:nvSpPr>
-          <p:cNvPr id="170" name="Rectangle 5"/>
+          <p:cNvPr id="168" name="Rectangle 5"/>
           <p:cNvSpPr/>
           <p:nvPr/>
         </p:nvSpPr>
         <p:spPr>
           <a:xfrm>
             <a:off x="731520" y="1325880"/>
-            <a:ext cx="10728360" cy="12240"/>
+            <a:ext cx="10728000" cy="11880"/>
           </a:xfrm>
           <a:prstGeom prst="rect">
             <a:avLst/>
@@ -11893,14 +12313,14 @@
       </p:sp>
       <p:sp>
         <p:nvSpPr>
-          <p:cNvPr id="171" name="Rounded Rectangle 6"/>
+          <p:cNvPr id="169" name="Rounded Rectangle 6"/>
           <p:cNvSpPr/>
           <p:nvPr/>
         </p:nvSpPr>
         <p:spPr>
           <a:xfrm>
             <a:off x="731520" y="1554480"/>
-            <a:ext cx="5166000" cy="4754520"/>
+            <a:ext cx="5165640" cy="4754160"/>
           </a:xfrm>
           <a:prstGeom prst="roundRect">
             <a:avLst>
@@ -12177,14 +12597,14 @@
       </p:sp>
       <p:sp>
         <p:nvSpPr>
-          <p:cNvPr id="172" name="Rounded Rectangle 7"/>
+          <p:cNvPr id="170" name="Rounded Rectangle 7"/>
           <p:cNvSpPr/>
           <p:nvPr/>
         </p:nvSpPr>
         <p:spPr>
           <a:xfrm>
             <a:off x="6263640" y="1554480"/>
-            <a:ext cx="5166000" cy="4754520"/>
+            <a:ext cx="5165640" cy="4754160"/>
           </a:xfrm>
           <a:prstGeom prst="roundRect">
             <a:avLst>
@@ -12491,14 +12911,14 @@
       </p:grpSpPr>
       <p:sp>
         <p:nvSpPr>
-          <p:cNvPr id="173" name="Rectangle 1"/>
+          <p:cNvPr id="171" name="Rectangle 1"/>
           <p:cNvSpPr/>
           <p:nvPr/>
         </p:nvSpPr>
         <p:spPr>
           <a:xfrm>
             <a:off x="0" y="0"/>
-            <a:ext cx="12191400" cy="6857640"/>
+            <a:ext cx="12191040" cy="6857280"/>
           </a:xfrm>
           <a:prstGeom prst="rect">
             <a:avLst/>
@@ -12547,14 +12967,14 @@
       </p:sp>
       <p:sp>
         <p:nvSpPr>
-          <p:cNvPr id="174" name="Rounded Rectangle 2"/>
+          <p:cNvPr id="172" name="Rounded Rectangle 2"/>
           <p:cNvSpPr/>
           <p:nvPr/>
         </p:nvSpPr>
         <p:spPr>
           <a:xfrm>
             <a:off x="1645920" y="1097280"/>
-            <a:ext cx="8899560" cy="4663080"/>
+            <a:ext cx="8899200" cy="4662720"/>
           </a:xfrm>
           <a:prstGeom prst="roundRect">
             <a:avLst>
@@ -12687,31 +13107,6 @@
                 <a:spcPct val="100000"/>
               </a:lnSpc>
             </a:pPr>
-            <a:r>
-              <a:rPr lang="en-US" sz="1200" b="0" u="none" strike="noStrike">
-                <a:solidFill>
-                  <a:srgbClr val="94A3B8"/>
-                </a:solidFill>
-                <a:effectLst/>
-                <a:uFillTx/>
-                <a:latin typeface="Calibri"/>
-              </a:rPr>
-              <a:t>Bibek Poudel  •  Pratikshya Maske  •  Sumina Pokhrel</a:t>
-            </a:r>
-            <a:br>
-              <a:rPr sz="1200"/>
-            </a:br>
-            <a:r>
-              <a:rPr lang="en-US" sz="1200" b="0" u="none" strike="noStrike">
-                <a:solidFill>
-                  <a:srgbClr val="94A3B8"/>
-                </a:solidFill>
-                <a:effectLst/>
-                <a:uFillTx/>
-                <a:latin typeface="Calibri"/>
-              </a:rPr>
-              <a:t>Supervised By: Mr. Anil Thapaliya  |  Mr. Shiva Pathak</a:t>
-            </a:r>
             <a:br>
               <a:rPr sz="1200"/>
             </a:br>
@@ -12776,7 +13171,7 @@
         <p:spPr>
           <a:xfrm>
             <a:off x="0" y="0"/>
-            <a:ext cx="12191400" cy="6857640"/>
+            <a:ext cx="12191040" cy="6857280"/>
           </a:xfrm>
           <a:prstGeom prst="rect">
             <a:avLst/>
@@ -12832,7 +13227,7 @@
         <p:spPr>
           <a:xfrm>
             <a:off x="731520" y="411480"/>
-            <a:ext cx="3108600" cy="319680"/>
+            <a:ext cx="3108240" cy="319320"/>
           </a:xfrm>
           <a:prstGeom prst="roundRect">
             <a:avLst>
@@ -12909,7 +13304,7 @@
         <p:spPr>
           <a:xfrm>
             <a:off x="731520" y="749880"/>
-            <a:ext cx="8686440" cy="548280"/>
+            <a:ext cx="8686080" cy="547920"/>
           </a:xfrm>
           <a:prstGeom prst="rect">
             <a:avLst/>
@@ -12966,7 +13361,7 @@
         <p:spPr>
           <a:xfrm>
             <a:off x="8229600" y="411480"/>
-            <a:ext cx="3200040" cy="456840"/>
+            <a:ext cx="3199680" cy="456480"/>
           </a:xfrm>
           <a:prstGeom prst="rect">
             <a:avLst/>
@@ -13049,7 +13444,7 @@
         <p:spPr>
           <a:xfrm>
             <a:off x="731520" y="1325880"/>
-            <a:ext cx="10728360" cy="12240"/>
+            <a:ext cx="10728000" cy="11880"/>
           </a:xfrm>
           <a:prstGeom prst="rect">
             <a:avLst/>
@@ -13105,7 +13500,7 @@
         <p:spPr>
           <a:xfrm>
             <a:off x="731520" y="1554480"/>
-            <a:ext cx="3337200" cy="4754520"/>
+            <a:ext cx="3336840" cy="4754160"/>
           </a:xfrm>
           <a:prstGeom prst="roundRect">
             <a:avLst>
@@ -13226,14 +13621,6 @@
             </a:endParaRPr>
           </a:p>
           <a:p>
-            <a:pPr defTabSz="457200">
-              <a:lnSpc>
-                <a:spcPct val="100000"/>
-              </a:lnSpc>
-              <a:spcAft>
-                <a:spcPts val="1199"/>
-              </a:spcAft>
-            </a:pPr>
             <a:r>
               <a:rPr lang="en-US" sz="1250" b="1" u="none" strike="noStrike">
                 <a:solidFill>
@@ -13246,15 +13633,48 @@
               <a:t>• </a:t>
             </a:r>
             <a:r>
+              <a:rPr lang="en-US" sz="1200" b="0" u="none" strike="noStrike">
+                <a:solidFill>
+                  <a:srgbClr val="FFFFFF"/>
+                </a:solidFill>
+                <a:effectLst/>
+                <a:uFillTx/>
+                <a:latin typeface="Arial"/>
+              </a:rPr>
+              <a:t>Scattered Lost &amp; Found Records</a:t>
+            </a:r>
+            <a:r>
+              <a:rPr lang="en-US" sz="1800" b="0" u="none" strike="noStrike">
+                <a:solidFill>
+                  <a:srgbClr val="FFFFFF"/>
+                </a:solidFill>
+                <a:effectLst/>
+                <a:uFillTx/>
+                <a:latin typeface="Arial"/>
+              </a:rPr>
+              <a:t> </a:t>
+            </a:r>
+            <a:r>
               <a:rPr lang="en-US" sz="1250" b="1" u="none" strike="noStrike">
                 <a:solidFill>
+                  <a:srgbClr val="534AB7"/>
+                </a:solidFill>
+                <a:effectLst/>
+                <a:uFillTx/>
+                <a:latin typeface="Calibri"/>
+              </a:rPr>
+              <a:t> </a:t>
+            </a:r>
+            <a:r>
+              <a:rPr lang="en-US" sz="1250" b="1" u="none" strike="noStrike">
+                <a:solidFill>
                   <a:srgbClr val="F8FAFC"/>
                 </a:solidFill>
                 <a:effectLst/>
                 <a:uFillTx/>
                 <a:latin typeface="Calibri"/>
               </a:rPr>
-              <a:t>Physical Desks Siloed: </a:t>
+              <a:t>: </a:t>
             </a:r>
             <a:r>
               <a:rPr lang="en-US" sz="1250" b="0" u="none" strike="noStrike">
@@ -13267,6 +13687,16 @@
               </a:rPr>
               <a:t>Lost items at university departments or reception desks remain isolated with no digital registry.</a:t>
             </a:r>
+            <a:endParaRPr lang="en-US" sz="1250" b="0" u="none" strike="noStrike">
+              <a:solidFill>
+                <a:srgbClr val="FFFFFF"/>
+              </a:solidFill>
+              <a:effectLst/>
+              <a:uFillTx/>
+              <a:latin typeface="Arial"/>
+            </a:endParaRPr>
+          </a:p>
+          <a:p>
             <a:endParaRPr lang="en-US" sz="1250" b="0" u="none" strike="noStrike">
               <a:solidFill>
                 <a:srgbClr val="FFFFFF"/>
@@ -13338,7 +13768,7 @@
         <p:spPr>
           <a:xfrm>
             <a:off x="4416480" y="1554480"/>
-            <a:ext cx="3337200" cy="4754520"/>
+            <a:ext cx="3336840" cy="4754160"/>
           </a:xfrm>
           <a:prstGeom prst="roundRect">
             <a:avLst>
@@ -13571,7 +14001,7 @@
         <p:spPr>
           <a:xfrm>
             <a:off x="8101440" y="1554480"/>
-            <a:ext cx="3337200" cy="4754520"/>
+            <a:ext cx="3336840" cy="4754160"/>
           </a:xfrm>
           <a:prstGeom prst="roundRect">
             <a:avLst>
@@ -13696,8 +14126,11 @@
               <a:lnSpc>
                 <a:spcPct val="100000"/>
               </a:lnSpc>
+              <a:spcBef>
+                <a:spcPts val="1191"/>
+              </a:spcBef>
               <a:spcAft>
-                <a:spcPts val="1199"/>
+                <a:spcPts val="992"/>
               </a:spcAft>
             </a:pPr>
             <a:r>
@@ -13720,7 +14153,7 @@
                 <a:uFillTx/>
                 <a:latin typeface="Calibri"/>
               </a:rPr>
-              <a:t>Social Friction: </a:t>
+              <a:t>Communication Problems  : </a:t>
             </a:r>
             <a:r>
               <a:rPr lang="en-US" sz="1250" b="0" u="none" strike="noStrike">
@@ -13747,8 +14180,11 @@
               <a:lnSpc>
                 <a:spcPct val="100000"/>
               </a:lnSpc>
+              <a:spcBef>
+                <a:spcPts val="1191"/>
+              </a:spcBef>
               <a:spcAft>
-                <a:spcPts val="1199"/>
+                <a:spcPts val="992"/>
               </a:spcAft>
             </a:pPr>
             <a:r>
@@ -13771,7 +14207,7 @@
                 <a:uFillTx/>
                 <a:latin typeface="Calibri"/>
               </a:rPr>
-              <a:t>Passive Neglect: </a:t>
+              <a:t>Items Left Unreturned : </a:t>
             </a:r>
             <a:r>
               <a:rPr lang="en-US" sz="1250" b="0" u="none" strike="noStrike">
@@ -13833,8 +14269,8 @@
         </p:nvSpPr>
         <p:spPr>
           <a:xfrm>
-            <a:off x="0" y="0"/>
-            <a:ext cx="12191400" cy="6857640"/>
+            <a:off x="-1143000" y="-228600"/>
+            <a:ext cx="12191040" cy="6857280"/>
           </a:xfrm>
           <a:prstGeom prst="rect">
             <a:avLst/>
@@ -13890,7 +14326,7 @@
         <p:spPr>
           <a:xfrm>
             <a:off x="731520" y="411480"/>
-            <a:ext cx="3108600" cy="319680"/>
+            <a:ext cx="3108240" cy="319320"/>
           </a:xfrm>
           <a:prstGeom prst="roundRect">
             <a:avLst>
@@ -13967,7 +14403,7 @@
         <p:spPr>
           <a:xfrm>
             <a:off x="731520" y="749880"/>
-            <a:ext cx="8686440" cy="548280"/>
+            <a:ext cx="8686080" cy="547920"/>
           </a:xfrm>
           <a:prstGeom prst="rect">
             <a:avLst/>
@@ -14024,7 +14460,7 @@
         <p:spPr>
           <a:xfrm>
             <a:off x="8229600" y="411480"/>
-            <a:ext cx="3200040" cy="456840"/>
+            <a:ext cx="3199680" cy="456480"/>
           </a:xfrm>
           <a:prstGeom prst="rect">
             <a:avLst/>
@@ -14107,7 +14543,7 @@
         <p:spPr>
           <a:xfrm>
             <a:off x="731520" y="1325880"/>
-            <a:ext cx="10728360" cy="12240"/>
+            <a:ext cx="10728000" cy="11880"/>
           </a:xfrm>
           <a:prstGeom prst="rect">
             <a:avLst/>
@@ -14163,7 +14599,7 @@
         <p:spPr>
           <a:xfrm>
             <a:off x="731520" y="1554480"/>
-            <a:ext cx="6857640" cy="4754520"/>
+            <a:ext cx="6857280" cy="4754160"/>
           </a:xfrm>
           <a:prstGeom prst="roundRect">
             <a:avLst>
@@ -14237,6 +14673,60 @@
               <a:lnSpc>
                 <a:spcPct val="100000"/>
               </a:lnSpc>
+              <a:spcBef>
+                <a:spcPts val="1191"/>
+              </a:spcBef>
+              <a:spcAft>
+                <a:spcPts val="992"/>
+              </a:spcAft>
+            </a:pPr>
+            <a:r>
+              <a:rPr lang="en-US" sz="1300" b="1" u="none" strike="noStrike">
+                <a:solidFill>
+                  <a:srgbClr val="534AB7"/>
+                </a:solidFill>
+                <a:effectLst/>
+                <a:uFillTx/>
+                <a:latin typeface="Calibri"/>
+              </a:rPr>
+              <a:t>• </a:t>
+            </a:r>
+            <a:r>
+              <a:rPr lang="en-US" sz="1300" b="1" u="none" strike="noStrike">
+                <a:solidFill>
+                  <a:srgbClr val="F8FAFC"/>
+                </a:solidFill>
+                <a:effectLst/>
+                <a:uFillTx/>
+                <a:latin typeface="Calibri"/>
+              </a:rPr>
+              <a:t>1. Centralized Lost &amp; Found System   : </a:t>
+            </a:r>
+            <a:r>
+              <a:rPr lang="en-US" sz="1300" b="0" u="none" strike="noStrike">
+                <a:solidFill>
+                  <a:srgbClr val="94A3B8"/>
+                </a:solidFill>
+                <a:effectLst/>
+                <a:uFillTx/>
+                <a:latin typeface="Calibri"/>
+              </a:rPr>
+              <a:t>Categorized feed with instant keyword search, category chips, status tags (LOST/FOUND), and GPS map pinning.</a:t>
+            </a:r>
+            <a:endParaRPr lang="en-US" sz="1300" b="0" u="none" strike="noStrike">
+              <a:solidFill>
+                <a:srgbClr val="FFFFFF"/>
+              </a:solidFill>
+              <a:effectLst/>
+              <a:uFillTx/>
+              <a:latin typeface="Arial"/>
+            </a:endParaRPr>
+          </a:p>
+          <a:p>
+            <a:pPr defTabSz="457200">
+              <a:lnSpc>
+                <a:spcPct val="100000"/>
+              </a:lnSpc>
               <a:spcAft>
                 <a:spcPts val="1199"/>
               </a:spcAft>
@@ -14261,7 +14751,7 @@
                 <a:uFillTx/>
                 <a:latin typeface="Calibri"/>
               </a:rPr>
-              <a:t>1. Centralized Digital Repository: </a:t>
+              <a:t>2. Secret Question Proof Verification: </a:t>
             </a:r>
             <a:r>
               <a:rPr lang="en-US" sz="1300" b="0" u="none" strike="noStrike">
@@ -14272,7 +14762,7 @@
                 <a:uFillTx/>
                 <a:latin typeface="Calibri"/>
               </a:rPr>
-              <a:t>Categorized feed with instant keyword search, category chips, status tags (LOST/FOUND), and GPS map pinning.</a:t>
+              <a:t>Finders configure a secret verification question (e.g. lockscreen wallpaper, serial digit) that only the authentic owner can answer.</a:t>
             </a:r>
             <a:endParaRPr lang="en-US" sz="1300" b="0" u="none" strike="noStrike">
               <a:solidFill>
@@ -14312,7 +14802,7 @@
                 <a:uFillTx/>
                 <a:latin typeface="Calibri"/>
               </a:rPr>
-              <a:t>2. Secret Question Proof Verification: </a:t>
+              <a:t>3. Dual-Confirmation Handshake: </a:t>
             </a:r>
             <a:r>
               <a:rPr lang="en-US" sz="1300" b="0" u="none" strike="noStrike">
@@ -14323,7 +14813,7 @@
                 <a:uFillTx/>
                 <a:latin typeface="Calibri"/>
               </a:rPr>
-              <a:t>Finders configure a secret verification question (e.g. lockscreen wallpaper, serial digit) that only the authentic owner can answer.</a:t>
+              <a:t>Eliminates false recovery claims. Both Owner AND Finder must tap 'Confirm Return' in-app during physical handover.</a:t>
             </a:r>
             <a:endParaRPr lang="en-US" sz="1300" b="0" u="none" strike="noStrike">
               <a:solidFill>
@@ -14339,8 +14829,11 @@
               <a:lnSpc>
                 <a:spcPct val="100000"/>
               </a:lnSpc>
+              <a:spcBef>
+                <a:spcPts val="1191"/>
+              </a:spcBef>
               <a:spcAft>
-                <a:spcPts val="1199"/>
+                <a:spcPts val="992"/>
               </a:spcAft>
             </a:pPr>
             <a:r>
@@ -14363,58 +14856,7 @@
                 <a:uFillTx/>
                 <a:latin typeface="Calibri"/>
               </a:rPr>
-              <a:t>3. Dual-Confirmation Handshake: </a:t>
-            </a:r>
-            <a:r>
-              <a:rPr lang="en-US" sz="1300" b="0" u="none" strike="noStrike">
-                <a:solidFill>
-                  <a:srgbClr val="94A3B8"/>
-                </a:solidFill>
-                <a:effectLst/>
-                <a:uFillTx/>
-                <a:latin typeface="Calibri"/>
-              </a:rPr>
-              <a:t>Eliminates false recovery claims. Both Owner AND Finder must tap 'Confirm Return' in-app during physical handover.</a:t>
-            </a:r>
-            <a:endParaRPr lang="en-US" sz="1300" b="0" u="none" strike="noStrike">
-              <a:solidFill>
-                <a:srgbClr val="FFFFFF"/>
-              </a:solidFill>
-              <a:effectLst/>
-              <a:uFillTx/>
-              <a:latin typeface="Arial"/>
-            </a:endParaRPr>
-          </a:p>
-          <a:p>
-            <a:pPr defTabSz="457200">
-              <a:lnSpc>
-                <a:spcPct val="100000"/>
-              </a:lnSpc>
-              <a:spcAft>
-                <a:spcPts val="1199"/>
-              </a:spcAft>
-            </a:pPr>
-            <a:r>
-              <a:rPr lang="en-US" sz="1300" b="1" u="none" strike="noStrike">
-                <a:solidFill>
-                  <a:srgbClr val="534AB7"/>
-                </a:solidFill>
-                <a:effectLst/>
-                <a:uFillTx/>
-                <a:latin typeface="Calibri"/>
-              </a:rPr>
-              <a:t>• </a:t>
-            </a:r>
-            <a:r>
-              <a:rPr lang="en-US" sz="1300" b="1" u="none" strike="noStrike">
-                <a:solidFill>
-                  <a:srgbClr val="F8FAFC"/>
-                </a:solidFill>
-                <a:effectLst/>
-                <a:uFillTx/>
-                <a:latin typeface="Calibri"/>
-              </a:rPr>
-              <a:t>4. Gamified Reputation System: </a:t>
+              <a:t>4. Reward &amp; Rating System   : </a:t>
             </a:r>
             <a:r>
               <a:rPr lang="en-US" sz="1300" b="0" u="none" strike="noStrike">
@@ -14447,7 +14889,7 @@
         <p:spPr>
           <a:xfrm>
             <a:off x="7863840" y="1554480"/>
-            <a:ext cx="3565800" cy="4754520"/>
+            <a:ext cx="3565440" cy="4754160"/>
           </a:xfrm>
           <a:prstGeom prst="roundRect">
             <a:avLst>
@@ -14501,7 +14943,7 @@
       </p:sp>
       <p:pic>
         <p:nvPicPr>
-          <p:cNvPr id="80" name="Picture 8" descr="finder dashboards 5.png"/>
+          <p:cNvPr id="80" name="Picture 1" descr="git_image-2.png"/>
           <p:cNvPicPr/>
           <p:nvPr/>
         </p:nvPicPr>
@@ -14511,8 +14953,8 @@
         </p:blipFill>
         <p:spPr>
           <a:xfrm>
-            <a:off x="8321040" y="1737360"/>
-            <a:ext cx="2559960" cy="4105800"/>
+            <a:off x="8458200" y="1856880"/>
+            <a:ext cx="2650320" cy="4086720"/>
           </a:xfrm>
           <a:prstGeom prst="rect">
             <a:avLst/>
@@ -14562,7 +15004,7 @@
         <p:spPr>
           <a:xfrm>
             <a:off x="0" y="0"/>
-            <a:ext cx="12191400" cy="6857640"/>
+            <a:ext cx="12191040" cy="6857280"/>
           </a:xfrm>
           <a:prstGeom prst="rect">
             <a:avLst/>
@@ -14618,7 +15060,7 @@
         <p:spPr>
           <a:xfrm>
             <a:off x="731520" y="411480"/>
-            <a:ext cx="3108600" cy="319680"/>
+            <a:ext cx="3108240" cy="319320"/>
           </a:xfrm>
           <a:prstGeom prst="roundRect">
             <a:avLst>
@@ -14695,7 +15137,7 @@
         <p:spPr>
           <a:xfrm>
             <a:off x="731520" y="749880"/>
-            <a:ext cx="8686440" cy="548280"/>
+            <a:ext cx="8686080" cy="547920"/>
           </a:xfrm>
           <a:prstGeom prst="rect">
             <a:avLst/>
@@ -14752,7 +15194,7 @@
         <p:spPr>
           <a:xfrm>
             <a:off x="8229600" y="411480"/>
-            <a:ext cx="3200040" cy="456840"/>
+            <a:ext cx="3199680" cy="456480"/>
           </a:xfrm>
           <a:prstGeom prst="rect">
             <a:avLst/>
@@ -14835,7 +15277,7 @@
         <p:spPr>
           <a:xfrm>
             <a:off x="731520" y="1325880"/>
-            <a:ext cx="10728360" cy="12240"/>
+            <a:ext cx="10728000" cy="11880"/>
           </a:xfrm>
           <a:prstGeom prst="rect">
             <a:avLst/>
@@ -14890,8 +15332,8 @@
         </p:nvSpPr>
         <p:spPr>
           <a:xfrm>
-            <a:off x="731520" y="1554480"/>
-            <a:ext cx="4754520" cy="4754520"/>
+            <a:off x="4125240" y="1646640"/>
+            <a:ext cx="4754160" cy="4754160"/>
           </a:xfrm>
           <a:prstGeom prst="roundRect">
             <a:avLst>
@@ -15217,91 +15659,6 @@
           </a:p>
         </p:txBody>
       </p:sp>
-      <p:sp>
-        <p:nvSpPr>
-          <p:cNvPr id="87" name="Rounded Rectangle 7"/>
-          <p:cNvSpPr/>
-          <p:nvPr/>
-        </p:nvSpPr>
-        <p:spPr>
-          <a:xfrm>
-            <a:off x="5760720" y="1554480"/>
-            <a:ext cx="5668920" cy="4754520"/>
-          </a:xfrm>
-          <a:prstGeom prst="roundRect">
-            <a:avLst>
-              <a:gd name="adj" fmla="val 16667"/>
-            </a:avLst>
-          </a:prstGeom>
-          <a:solidFill>
-            <a:srgbClr val="25304D"/>
-          </a:solidFill>
-          <a:ln w="15240">
-            <a:solidFill>
-              <a:srgbClr val="334155"/>
-            </a:solidFill>
-            <a:round/>
-          </a:ln>
-          <a:effectLst>
-            <a:outerShdw blurRad="39960" dir="5400000" dist="23040" rotWithShape="0">
-              <a:srgbClr val="000000">
-                <a:alpha val="35000"/>
-              </a:srgbClr>
-            </a:outerShdw>
-          </a:effectLst>
-        </p:spPr>
-        <p:style>
-          <a:lnRef idx="1">
-            <a:schemeClr val="accent1"/>
-          </a:lnRef>
-          <a:fillRef idx="3">
-            <a:schemeClr val="accent1"/>
-          </a:fillRef>
-          <a:effectRef idx="2">
-            <a:schemeClr val="accent1"/>
-          </a:effectRef>
-          <a:fontRef idx="minor"/>
-        </p:style>
-        <p:txBody>
-          <a:bodyPr lIns="90000" tIns="45000" rIns="90000" bIns="45000" anchor="ctr">
-            <a:noAutofit/>
-          </a:bodyPr>
-          <a:p>
-            <a:endParaRPr lang="en-US" sz="1800" b="0" u="none" strike="noStrike">
-              <a:solidFill>
-                <a:schemeClr val="lt1"/>
-              </a:solidFill>
-              <a:effectLst/>
-              <a:uFillTx/>
-              <a:latin typeface="Calibri"/>
-            </a:endParaRPr>
-          </a:p>
-        </p:txBody>
-      </p:sp>
-      <p:pic>
-        <p:nvPicPr>
-          <p:cNvPr id="88" name="Picture 8" descr="img_9.png"/>
-          <p:cNvPicPr/>
-          <p:nvPr/>
-        </p:nvPicPr>
-        <p:blipFill>
-          <a:blip r:embed="rId1"/>
-          <a:stretch/>
-        </p:blipFill>
-        <p:spPr>
-          <a:xfrm>
-            <a:off x="5943600" y="1737360"/>
-            <a:ext cx="5303160" cy="3888720"/>
-          </a:xfrm>
-          <a:prstGeom prst="rect">
-            <a:avLst/>
-          </a:prstGeom>
-          <a:noFill/>
-          <a:ln w="0">
-            <a:noFill/>
-          </a:ln>
-        </p:spPr>
-      </p:pic>
     </p:spTree>
   </p:cSld>
   <mc:AlternateContent>
@@ -15334,14 +15691,14 @@
       </p:grpSpPr>
       <p:sp>
         <p:nvSpPr>
-          <p:cNvPr id="89" name="Rectangle 1"/>
+          <p:cNvPr id="87" name="Rectangle 1"/>
           <p:cNvSpPr/>
           <p:nvPr/>
         </p:nvSpPr>
         <p:spPr>
           <a:xfrm>
             <a:off x="0" y="0"/>
-            <a:ext cx="12191400" cy="6857640"/>
+            <a:ext cx="12191040" cy="6857280"/>
           </a:xfrm>
           <a:prstGeom prst="rect">
             <a:avLst/>
@@ -15390,14 +15747,14 @@
       </p:sp>
       <p:sp>
         <p:nvSpPr>
-          <p:cNvPr id="90" name="Rounded Rectangle 2"/>
+          <p:cNvPr id="88" name="Rounded Rectangle 2"/>
           <p:cNvSpPr/>
           <p:nvPr/>
         </p:nvSpPr>
         <p:spPr>
           <a:xfrm>
             <a:off x="731520" y="411480"/>
-            <a:ext cx="3108600" cy="319680"/>
+            <a:ext cx="3108240" cy="319320"/>
           </a:xfrm>
           <a:prstGeom prst="roundRect">
             <a:avLst>
@@ -15467,14 +15824,14 @@
       </p:sp>
       <p:sp>
         <p:nvSpPr>
-          <p:cNvPr id="91" name="TextBox 3"/>
+          <p:cNvPr id="89" name="TextBox 3"/>
           <p:cNvSpPr/>
           <p:nvPr/>
         </p:nvSpPr>
         <p:spPr>
           <a:xfrm>
             <a:off x="731520" y="749880"/>
-            <a:ext cx="8686440" cy="548280"/>
+            <a:ext cx="8686080" cy="547920"/>
           </a:xfrm>
           <a:prstGeom prst="rect">
             <a:avLst/>
@@ -15524,14 +15881,14 @@
       </p:sp>
       <p:sp>
         <p:nvSpPr>
-          <p:cNvPr id="92" name="TextBox 4"/>
+          <p:cNvPr id="90" name="TextBox 4"/>
           <p:cNvSpPr/>
           <p:nvPr/>
         </p:nvSpPr>
         <p:spPr>
           <a:xfrm>
             <a:off x="8229600" y="411480"/>
-            <a:ext cx="3200040" cy="456840"/>
+            <a:ext cx="3199680" cy="456480"/>
           </a:xfrm>
           <a:prstGeom prst="rect">
             <a:avLst/>
@@ -15607,14 +15964,14 @@
       </p:sp>
       <p:sp>
         <p:nvSpPr>
-          <p:cNvPr id="93" name="Rectangle 5"/>
+          <p:cNvPr id="91" name="Rectangle 5"/>
           <p:cNvSpPr/>
           <p:nvPr/>
         </p:nvSpPr>
         <p:spPr>
           <a:xfrm>
             <a:off x="731520" y="1325880"/>
-            <a:ext cx="10728360" cy="12240"/>
+            <a:ext cx="10728000" cy="11880"/>
           </a:xfrm>
           <a:prstGeom prst="rect">
             <a:avLst/>
@@ -15663,14 +16020,14 @@
       </p:sp>
       <p:sp>
         <p:nvSpPr>
-          <p:cNvPr id="94" name="Rounded Rectangle 6"/>
+          <p:cNvPr id="92" name="Rounded Rectangle 6"/>
           <p:cNvSpPr/>
           <p:nvPr/>
         </p:nvSpPr>
         <p:spPr>
           <a:xfrm>
             <a:off x="731520" y="1554480"/>
-            <a:ext cx="4754520" cy="4754520"/>
+            <a:ext cx="4754160" cy="4754160"/>
           </a:xfrm>
           <a:prstGeom prst="roundRect">
             <a:avLst>
@@ -15896,14 +16253,14 @@
       </p:sp>
       <p:sp>
         <p:nvSpPr>
-          <p:cNvPr id="95" name="Rounded Rectangle 7"/>
+          <p:cNvPr id="93" name="Rounded Rectangle 7"/>
           <p:cNvSpPr/>
           <p:nvPr/>
         </p:nvSpPr>
         <p:spPr>
           <a:xfrm>
             <a:off x="5760720" y="1554480"/>
-            <a:ext cx="5668920" cy="4754520"/>
+            <a:ext cx="5668560" cy="4754160"/>
           </a:xfrm>
           <a:prstGeom prst="roundRect">
             <a:avLst>
@@ -15957,7 +16314,7 @@
       </p:sp>
       <p:pic>
         <p:nvPicPr>
-          <p:cNvPr id="96" name="Picture 8" descr="img_0.png"/>
+          <p:cNvPr id="94" name="Picture 8" descr="img_0.png"/>
           <p:cNvPicPr/>
           <p:nvPr/>
         </p:nvPicPr>
@@ -15968,7 +16325,7 @@
         <p:spPr>
           <a:xfrm>
             <a:off x="5943600" y="1737360"/>
-            <a:ext cx="5303160" cy="3879360"/>
+            <a:ext cx="5302800" cy="3879000"/>
           </a:xfrm>
           <a:prstGeom prst="rect">
             <a:avLst/>
@@ -16011,14 +16368,14 @@
       </p:grpSpPr>
       <p:sp>
         <p:nvSpPr>
-          <p:cNvPr id="97" name="Rectangle 1"/>
+          <p:cNvPr id="95" name="Rectangle 1"/>
           <p:cNvSpPr/>
           <p:nvPr/>
         </p:nvSpPr>
         <p:spPr>
           <a:xfrm>
             <a:off x="0" y="0"/>
-            <a:ext cx="12191400" cy="6857640"/>
+            <a:ext cx="12191040" cy="6857280"/>
           </a:xfrm>
           <a:prstGeom prst="rect">
             <a:avLst/>
@@ -16067,14 +16424,14 @@
       </p:sp>
       <p:sp>
         <p:nvSpPr>
-          <p:cNvPr id="98" name="Rounded Rectangle 2"/>
+          <p:cNvPr id="96" name="Rounded Rectangle 2"/>
           <p:cNvSpPr/>
           <p:nvPr/>
         </p:nvSpPr>
         <p:spPr>
           <a:xfrm>
             <a:off x="731520" y="411480"/>
-            <a:ext cx="3108600" cy="319680"/>
+            <a:ext cx="3108240" cy="319320"/>
           </a:xfrm>
           <a:prstGeom prst="roundRect">
             <a:avLst>
@@ -16144,14 +16501,14 @@
       </p:sp>
       <p:sp>
         <p:nvSpPr>
-          <p:cNvPr id="99" name="TextBox 3"/>
+          <p:cNvPr id="97" name="TextBox 3"/>
           <p:cNvSpPr/>
           <p:nvPr/>
         </p:nvSpPr>
         <p:spPr>
           <a:xfrm>
             <a:off x="731520" y="749880"/>
-            <a:ext cx="8686440" cy="548280"/>
+            <a:ext cx="8686080" cy="547920"/>
           </a:xfrm>
           <a:prstGeom prst="rect">
             <a:avLst/>
@@ -16201,14 +16558,14 @@
       </p:sp>
       <p:sp>
         <p:nvSpPr>
-          <p:cNvPr id="100" name="TextBox 4"/>
+          <p:cNvPr id="98" name="TextBox 4"/>
           <p:cNvSpPr/>
           <p:nvPr/>
         </p:nvSpPr>
         <p:spPr>
           <a:xfrm>
             <a:off x="8229600" y="411480"/>
-            <a:ext cx="3200040" cy="456840"/>
+            <a:ext cx="3199680" cy="456480"/>
           </a:xfrm>
           <a:prstGeom prst="rect">
             <a:avLst/>
@@ -16284,14 +16641,14 @@
       </p:sp>
       <p:sp>
         <p:nvSpPr>
-          <p:cNvPr id="101" name="Rectangle 5"/>
+          <p:cNvPr id="99" name="Rectangle 5"/>
           <p:cNvSpPr/>
           <p:nvPr/>
         </p:nvSpPr>
         <p:spPr>
           <a:xfrm>
             <a:off x="731520" y="1325880"/>
-            <a:ext cx="10728360" cy="12240"/>
+            <a:ext cx="10728000" cy="11880"/>
           </a:xfrm>
           <a:prstGeom prst="rect">
             <a:avLst/>
@@ -16340,14 +16697,14 @@
       </p:sp>
       <p:sp>
         <p:nvSpPr>
-          <p:cNvPr id="102" name="Rounded Rectangle 6"/>
+          <p:cNvPr id="100" name="Rounded Rectangle 6"/>
           <p:cNvSpPr/>
           <p:nvPr/>
         </p:nvSpPr>
         <p:spPr>
           <a:xfrm>
             <a:off x="731520" y="1554480"/>
-            <a:ext cx="5166000" cy="2239920"/>
+            <a:ext cx="5165640" cy="2239560"/>
           </a:xfrm>
           <a:prstGeom prst="roundRect">
             <a:avLst>
@@ -16621,14 +16978,14 @@
       </p:sp>
       <p:sp>
         <p:nvSpPr>
-          <p:cNvPr id="103" name="Rounded Rectangle 7"/>
+          <p:cNvPr id="101" name="Rounded Rectangle 7"/>
           <p:cNvSpPr/>
           <p:nvPr/>
         </p:nvSpPr>
         <p:spPr>
           <a:xfrm>
             <a:off x="6263640" y="1554480"/>
-            <a:ext cx="5166000" cy="2239920"/>
+            <a:ext cx="5165640" cy="2239560"/>
           </a:xfrm>
           <a:prstGeom prst="roundRect">
             <a:avLst>
@@ -16902,14 +17259,14 @@
       </p:sp>
       <p:sp>
         <p:nvSpPr>
-          <p:cNvPr id="104" name="Rounded Rectangle 8"/>
+          <p:cNvPr id="102" name="Rounded Rectangle 8"/>
           <p:cNvSpPr/>
           <p:nvPr/>
         </p:nvSpPr>
         <p:spPr>
           <a:xfrm>
             <a:off x="731520" y="4069080"/>
-            <a:ext cx="5166000" cy="2239920"/>
+            <a:ext cx="5165640" cy="2239560"/>
           </a:xfrm>
           <a:prstGeom prst="roundRect">
             <a:avLst>
@@ -17132,14 +17489,14 @@
       </p:sp>
       <p:sp>
         <p:nvSpPr>
-          <p:cNvPr id="105" name="Rounded Rectangle 9"/>
+          <p:cNvPr id="103" name="Rounded Rectangle 9"/>
           <p:cNvSpPr/>
           <p:nvPr/>
         </p:nvSpPr>
         <p:spPr>
           <a:xfrm>
             <a:off x="6263640" y="4069080"/>
-            <a:ext cx="5166000" cy="2239920"/>
+            <a:ext cx="5165640" cy="2239560"/>
           </a:xfrm>
           <a:prstGeom prst="roundRect">
             <a:avLst>
@@ -17392,14 +17749,14 @@
       </p:grpSpPr>
       <p:sp>
         <p:nvSpPr>
-          <p:cNvPr id="106" name="Rectangle 1"/>
+          <p:cNvPr id="104" name="Rectangle 1"/>
           <p:cNvSpPr/>
           <p:nvPr/>
         </p:nvSpPr>
         <p:spPr>
           <a:xfrm>
             <a:off x="0" y="0"/>
-            <a:ext cx="12191400" cy="6857640"/>
+            <a:ext cx="12191040" cy="6857280"/>
           </a:xfrm>
           <a:prstGeom prst="rect">
             <a:avLst/>
@@ -17448,14 +17805,14 @@
       </p:sp>
       <p:sp>
         <p:nvSpPr>
-          <p:cNvPr id="107" name="Rounded Rectangle 2"/>
+          <p:cNvPr id="105" name="Rounded Rectangle 2"/>
           <p:cNvSpPr/>
           <p:nvPr/>
         </p:nvSpPr>
         <p:spPr>
           <a:xfrm>
             <a:off x="731520" y="411480"/>
-            <a:ext cx="3108600" cy="319680"/>
+            <a:ext cx="3108240" cy="319320"/>
           </a:xfrm>
           <a:prstGeom prst="roundRect">
             <a:avLst>
@@ -17525,14 +17882,14 @@
       </p:sp>
       <p:sp>
         <p:nvSpPr>
-          <p:cNvPr id="108" name="TextBox 3"/>
+          <p:cNvPr id="106" name="TextBox 3"/>
           <p:cNvSpPr/>
           <p:nvPr/>
         </p:nvSpPr>
         <p:spPr>
           <a:xfrm>
             <a:off x="731520" y="749880"/>
-            <a:ext cx="8686440" cy="548280"/>
+            <a:ext cx="8686080" cy="547920"/>
           </a:xfrm>
           <a:prstGeom prst="rect">
             <a:avLst/>
@@ -17582,14 +17939,14 @@
       </p:sp>
       <p:sp>
         <p:nvSpPr>
-          <p:cNvPr id="109" name="TextBox 4"/>
+          <p:cNvPr id="107" name="TextBox 4"/>
           <p:cNvSpPr/>
           <p:nvPr/>
         </p:nvSpPr>
         <p:spPr>
           <a:xfrm>
             <a:off x="8229600" y="411480"/>
-            <a:ext cx="3200040" cy="456840"/>
+            <a:ext cx="3199680" cy="456480"/>
           </a:xfrm>
           <a:prstGeom prst="rect">
             <a:avLst/>
@@ -17665,14 +18022,14 @@
       </p:sp>
       <p:sp>
         <p:nvSpPr>
-          <p:cNvPr id="110" name="Rectangle 5"/>
+          <p:cNvPr id="108" name="Rectangle 5"/>
           <p:cNvSpPr/>
           <p:nvPr/>
         </p:nvSpPr>
         <p:spPr>
           <a:xfrm>
             <a:off x="731520" y="1325880"/>
-            <a:ext cx="10728360" cy="12240"/>
+            <a:ext cx="10728000" cy="11880"/>
           </a:xfrm>
           <a:prstGeom prst="rect">
             <a:avLst/>
@@ -17721,14 +18078,14 @@
       </p:sp>
       <p:sp>
         <p:nvSpPr>
-          <p:cNvPr id="111" name="Rounded Rectangle 6"/>
+          <p:cNvPr id="109" name="Rounded Rectangle 6"/>
           <p:cNvSpPr/>
           <p:nvPr/>
         </p:nvSpPr>
         <p:spPr>
           <a:xfrm>
             <a:off x="731520" y="1554480"/>
-            <a:ext cx="4754520" cy="4754520"/>
+            <a:ext cx="4754160" cy="4754160"/>
           </a:xfrm>
           <a:prstGeom prst="roundRect">
             <a:avLst>
@@ -18056,14 +18413,14 @@
       </p:sp>
       <p:sp>
         <p:nvSpPr>
-          <p:cNvPr id="112" name="Rounded Rectangle 7"/>
+          <p:cNvPr id="110" name="Rounded Rectangle 7"/>
           <p:cNvSpPr/>
           <p:nvPr/>
         </p:nvSpPr>
         <p:spPr>
           <a:xfrm>
             <a:off x="5760720" y="1554480"/>
-            <a:ext cx="5668920" cy="4754520"/>
+            <a:ext cx="5668560" cy="4754160"/>
           </a:xfrm>
           <a:prstGeom prst="roundRect">
             <a:avLst>
@@ -18117,7 +18474,7 @@
       </p:sp>
       <p:pic>
         <p:nvPicPr>
-          <p:cNvPr id="113" name="Picture 8" descr="finder dashboards 5.png"/>
+          <p:cNvPr id="111" name="Picture 8" descr="finder dashboards 5.png"/>
           <p:cNvPicPr/>
           <p:nvPr/>
         </p:nvPicPr>
@@ -18128,7 +18485,7 @@
         <p:spPr>
           <a:xfrm>
             <a:off x="6035040" y="1691640"/>
-            <a:ext cx="2377080" cy="3812760"/>
+            <a:ext cx="2376720" cy="3812400"/>
           </a:xfrm>
           <a:prstGeom prst="rect">
             <a:avLst/>
@@ -18141,7 +18498,7 @@
       </p:pic>
       <p:pic>
         <p:nvPicPr>
-          <p:cNvPr id="114" name="Picture 9" descr="finderac 4.png"/>
+          <p:cNvPr id="112" name="Picture 9" descr="finderac 4.png"/>
           <p:cNvPicPr/>
           <p:nvPr/>
         </p:nvPicPr>
@@ -18152,7 +18509,7 @@
         <p:spPr>
           <a:xfrm>
             <a:off x="8686800" y="1691640"/>
-            <a:ext cx="2377080" cy="3869280"/>
+            <a:ext cx="2376720" cy="3868920"/>
           </a:xfrm>
           <a:prstGeom prst="rect">
             <a:avLst/>
@@ -18195,14 +18552,14 @@
       </p:grpSpPr>
       <p:sp>
         <p:nvSpPr>
-          <p:cNvPr id="115" name="Rectangle 1"/>
+          <p:cNvPr id="113" name="Rectangle 1"/>
           <p:cNvSpPr/>
           <p:nvPr/>
         </p:nvSpPr>
         <p:spPr>
           <a:xfrm>
             <a:off x="0" y="0"/>
-            <a:ext cx="12191400" cy="6857640"/>
+            <a:ext cx="12191040" cy="6857280"/>
           </a:xfrm>
           <a:prstGeom prst="rect">
             <a:avLst/>
@@ -18251,14 +18608,14 @@
       </p:sp>
       <p:sp>
         <p:nvSpPr>
-          <p:cNvPr id="116" name="Rounded Rectangle 2"/>
+          <p:cNvPr id="114" name="Rounded Rectangle 2"/>
           <p:cNvSpPr/>
           <p:nvPr/>
         </p:nvSpPr>
         <p:spPr>
           <a:xfrm>
             <a:off x="731520" y="411480"/>
-            <a:ext cx="3108600" cy="319680"/>
+            <a:ext cx="3108240" cy="319320"/>
           </a:xfrm>
           <a:prstGeom prst="roundRect">
             <a:avLst>
@@ -18328,14 +18685,14 @@
       </p:sp>
       <p:sp>
         <p:nvSpPr>
-          <p:cNvPr id="117" name="TextBox 3"/>
+          <p:cNvPr id="115" name="TextBox 3"/>
           <p:cNvSpPr/>
           <p:nvPr/>
         </p:nvSpPr>
         <p:spPr>
           <a:xfrm>
             <a:off x="731520" y="749880"/>
-            <a:ext cx="8686440" cy="548280"/>
+            <a:ext cx="8686080" cy="547920"/>
           </a:xfrm>
           <a:prstGeom prst="rect">
             <a:avLst/>
@@ -18385,14 +18742,14 @@
       </p:sp>
       <p:sp>
         <p:nvSpPr>
-          <p:cNvPr id="118" name="TextBox 4"/>
+          <p:cNvPr id="116" name="TextBox 4"/>
           <p:cNvSpPr/>
           <p:nvPr/>
         </p:nvSpPr>
         <p:spPr>
           <a:xfrm>
             <a:off x="8229600" y="411480"/>
-            <a:ext cx="3200040" cy="456840"/>
+            <a:ext cx="3199680" cy="456480"/>
           </a:xfrm>
           <a:prstGeom prst="rect">
             <a:avLst/>
@@ -18468,14 +18825,14 @@
       </p:sp>
       <p:sp>
         <p:nvSpPr>
-          <p:cNvPr id="119" name="Rectangle 5"/>
+          <p:cNvPr id="117" name="Rectangle 5"/>
           <p:cNvSpPr/>
           <p:nvPr/>
         </p:nvSpPr>
         <p:spPr>
           <a:xfrm>
             <a:off x="731520" y="1325880"/>
-            <a:ext cx="10728360" cy="12240"/>
+            <a:ext cx="10728000" cy="11880"/>
           </a:xfrm>
           <a:prstGeom prst="rect">
             <a:avLst/>
@@ -18524,14 +18881,14 @@
       </p:sp>
       <p:sp>
         <p:nvSpPr>
-          <p:cNvPr id="120" name="Rounded Rectangle 6"/>
+          <p:cNvPr id="118" name="Rounded Rectangle 6"/>
           <p:cNvSpPr/>
           <p:nvPr/>
         </p:nvSpPr>
         <p:spPr>
           <a:xfrm>
             <a:off x="731520" y="1554480"/>
-            <a:ext cx="4754520" cy="4754520"/>
+            <a:ext cx="4754160" cy="4754160"/>
           </a:xfrm>
           <a:prstGeom prst="roundRect">
             <a:avLst>
@@ -18808,14 +19165,14 @@
       </p:sp>
       <p:sp>
         <p:nvSpPr>
-          <p:cNvPr id="121" name="Rounded Rectangle 7"/>
+          <p:cNvPr id="119" name="Rounded Rectangle 7"/>
           <p:cNvSpPr/>
           <p:nvPr/>
         </p:nvSpPr>
         <p:spPr>
           <a:xfrm>
             <a:off x="5760720" y="1554480"/>
-            <a:ext cx="5668920" cy="4754520"/>
+            <a:ext cx="5668560" cy="4754160"/>
           </a:xfrm>
           <a:prstGeom prst="roundRect">
             <a:avLst>
@@ -18869,7 +19226,7 @@
       </p:sp>
       <p:pic>
         <p:nvPicPr>
-          <p:cNvPr id="122" name="Picture 8" descr="report lost item.png"/>
+          <p:cNvPr id="120" name="Picture 8" descr="report lost item.png"/>
           <p:cNvPicPr/>
           <p:nvPr/>
         </p:nvPicPr>
@@ -18880,7 +19237,7 @@
         <p:spPr>
           <a:xfrm>
             <a:off x="6035040" y="1691640"/>
-            <a:ext cx="2377080" cy="3588840"/>
+            <a:ext cx="2376720" cy="3588480"/>
           </a:xfrm>
           <a:prstGeom prst="rect">
             <a:avLst/>
@@ -18893,7 +19250,7 @@
       </p:pic>
       <p:pic>
         <p:nvPicPr>
-          <p:cNvPr id="123" name="Picture 9" descr="reporting found item 6.png"/>
+          <p:cNvPr id="121" name="Picture 9" descr="reporting found item 6.png"/>
           <p:cNvPicPr/>
           <p:nvPr/>
         </p:nvPicPr>
@@ -18904,7 +19261,7 @@
         <p:spPr>
           <a:xfrm>
             <a:off x="8686800" y="1691640"/>
-            <a:ext cx="2377080" cy="4152600"/>
+            <a:ext cx="2376720" cy="4152240"/>
           </a:xfrm>
           <a:prstGeom prst="rect">
             <a:avLst/>
@@ -18947,14 +19304,14 @@
       </p:grpSpPr>
       <p:sp>
         <p:nvSpPr>
-          <p:cNvPr id="124" name="Rectangle 1"/>
+          <p:cNvPr id="122" name="Rectangle 1"/>
           <p:cNvSpPr/>
           <p:nvPr/>
         </p:nvSpPr>
         <p:spPr>
           <a:xfrm>
             <a:off x="0" y="0"/>
-            <a:ext cx="12191400" cy="6857640"/>
+            <a:ext cx="12191040" cy="6857280"/>
           </a:xfrm>
           <a:prstGeom prst="rect">
             <a:avLst/>
@@ -19003,14 +19360,14 @@
       </p:sp>
       <p:sp>
         <p:nvSpPr>
-          <p:cNvPr id="125" name="Rounded Rectangle 2"/>
+          <p:cNvPr id="123" name="Rounded Rectangle 2"/>
           <p:cNvSpPr/>
           <p:nvPr/>
         </p:nvSpPr>
         <p:spPr>
           <a:xfrm>
             <a:off x="731520" y="411480"/>
-            <a:ext cx="3108600" cy="319680"/>
+            <a:ext cx="3108240" cy="319320"/>
           </a:xfrm>
           <a:prstGeom prst="roundRect">
             <a:avLst>
@@ -19080,14 +19437,14 @@
       </p:sp>
       <p:sp>
         <p:nvSpPr>
-          <p:cNvPr id="126" name="TextBox 3"/>
+          <p:cNvPr id="124" name="TextBox 3"/>
           <p:cNvSpPr/>
           <p:nvPr/>
         </p:nvSpPr>
         <p:spPr>
           <a:xfrm>
             <a:off x="731520" y="749880"/>
-            <a:ext cx="8686440" cy="548280"/>
+            <a:ext cx="8686080" cy="547920"/>
           </a:xfrm>
           <a:prstGeom prst="rect">
             <a:avLst/>
@@ -19137,14 +19494,14 @@
       </p:sp>
       <p:sp>
         <p:nvSpPr>
-          <p:cNvPr id="127" name="TextBox 4"/>
+          <p:cNvPr id="125" name="TextBox 4"/>
           <p:cNvSpPr/>
           <p:nvPr/>
         </p:nvSpPr>
         <p:spPr>
           <a:xfrm>
             <a:off x="8229600" y="411480"/>
-            <a:ext cx="3200040" cy="456840"/>
+            <a:ext cx="3199680" cy="456480"/>
           </a:xfrm>
           <a:prstGeom prst="rect">
             <a:avLst/>
@@ -19220,14 +19577,14 @@
       </p:sp>
       <p:sp>
         <p:nvSpPr>
-          <p:cNvPr id="128" name="Rectangle 5"/>
+          <p:cNvPr id="126" name="Rectangle 5"/>
           <p:cNvSpPr/>
           <p:nvPr/>
         </p:nvSpPr>
         <p:spPr>
           <a:xfrm>
             <a:off x="731520" y="1325880"/>
-            <a:ext cx="10728360" cy="12240"/>
+            <a:ext cx="10728000" cy="11880"/>
           </a:xfrm>
           <a:prstGeom prst="rect">
             <a:avLst/>
@@ -19276,14 +19633,14 @@
       </p:sp>
       <p:sp>
         <p:nvSpPr>
-          <p:cNvPr id="129" name="Rounded Rectangle 6"/>
+          <p:cNvPr id="127" name="Rounded Rectangle 6"/>
           <p:cNvSpPr/>
           <p:nvPr/>
         </p:nvSpPr>
         <p:spPr>
           <a:xfrm>
             <a:off x="731520" y="1554480"/>
-            <a:ext cx="4754520" cy="4754520"/>
+            <a:ext cx="4754160" cy="4754160"/>
           </a:xfrm>
           <a:prstGeom prst="roundRect">
             <a:avLst>
@@ -19560,14 +19917,14 @@
       </p:sp>
       <p:sp>
         <p:nvSpPr>
-          <p:cNvPr id="130" name="Rounded Rectangle 7"/>
+          <p:cNvPr id="128" name="Rounded Rectangle 7"/>
           <p:cNvSpPr/>
           <p:nvPr/>
         </p:nvSpPr>
         <p:spPr>
           <a:xfrm>
             <a:off x="5760720" y="1554480"/>
-            <a:ext cx="5668920" cy="4754520"/>
+            <a:ext cx="5668560" cy="4754160"/>
           </a:xfrm>
           <a:prstGeom prst="roundRect">
             <a:avLst>
@@ -19621,7 +19978,7 @@
       </p:sp>
       <p:pic>
         <p:nvPicPr>
-          <p:cNvPr id="131" name="Picture 8" descr="report item 3.png"/>
+          <p:cNvPr id="129" name="Picture 8" descr="report item 3.png"/>
           <p:cNvPicPr/>
           <p:nvPr/>
         </p:nvPicPr>
@@ -19632,7 +19989,7 @@
         <p:spPr>
           <a:xfrm>
             <a:off x="6035040" y="1691640"/>
-            <a:ext cx="2377080" cy="3955320"/>
+            <a:ext cx="2376720" cy="3954960"/>
           </a:xfrm>
           <a:prstGeom prst="rect">
             <a:avLst/>
@@ -19645,7 +20002,7 @@
       </p:pic>
       <p:pic>
         <p:nvPicPr>
-          <p:cNvPr id="132" name="Picture 9" descr="chat.png"/>
+          <p:cNvPr id="130" name="Picture 9" descr="chat.png"/>
           <p:cNvPicPr/>
           <p:nvPr/>
         </p:nvPicPr>
@@ -19656,7 +20013,7 @@
         <p:spPr>
           <a:xfrm>
             <a:off x="8686800" y="1691640"/>
-            <a:ext cx="2377080" cy="3858120"/>
+            <a:ext cx="2376720" cy="3857760"/>
           </a:xfrm>
           <a:prstGeom prst="rect">
             <a:avLst/>
